--- a/research_practice/答辩-科研实践.pptx
+++ b/research_practice/答辩-科研实践.pptx
@@ -31,6 +31,7 @@
     <p:sldId id="275" r:id="rId27"/>
     <p:sldId id="276" r:id="rId28"/>
     <p:sldId id="277" r:id="rId29"/>
+    <p:sldId id="278" r:id="rId30"/>
   </p:sldIdLst>
   <p:sldSz cx="12192000" cy="6858000"/>
   <p:notesSz cx="6858000" cy="9144000"/>
@@ -524,22 +525,37 @@
           <a:lstStyle/>
           <a:p>
             <a:r>
-              <a:t>Asterinas 是由北京大学、中关村实验室、蚂蚁集团联合发起的一个用 Rust 编写、与 Linux ABI 兼容的国产自主可控安全操作系统内核，能直接运行 Linux 程序，并借助框内核架构提升内核可靠性。</a:t>
-            </a:r>
-          </a:p>
-          <a:p>
-            <a:r>
-              <a:t>一个面向开发者的操作系统，不能只满足于把程序跑起来，还要支撑起程序开发的完整闭环，而进程调试正是其中最基础的一环。无论是排查应用逻辑的上层开发者，还是分析系统调用、内存与寄存器行为的底层开发者，都离不开用户态进程调试机制。</a:t>
-            </a:r>
-          </a:p>
-          <a:p>
-            <a:r>
-              <a:t>同时，一个新内核要真正可用，关键在于能直接复用现有的用户态生态，而不是要求应用重写；而 Linux ABI 已是事实标准，唯有兼容它，才能直接复用海量现有调试工具链生态运行。</a:t>
-            </a:r>
-          </a:p>
-          <a:p>
-            <a:r>
-              <a:t>因此，在 Asterinas 上支持用户进程调试，本质上就是兼容 Linux 的 ptrace 接口与相关配套机制——而这不是单个系统调用，而是贯穿进程管理、信号、wait、地址空间、寄存器、安全与 procfs 的完整通路。</a:t>
+              <a:t>各类从零或新架构的 OS 都在补调试能力，但接入调试器的技术路线差别很大，多数并未直接复用未经修改的 Linux 工具链。下表对比它们的内核调试接口与调试器接入方式。</a:t>
+            </a:r>
+          </a:p>
+          <a:p>
+            <a:r>
+              <a:t>Redox OS——刻意不在内核实现 Linux ptrace，而是提供一个类 /proc 的 proc scheme 文件接口；并用 Rust 自写了一个 gdbserver，GDB 通过 Redox 的 IPC 走 GDB 远程串行协议连接，relibc 里另有一个尽力而为的用户态 ptrace 兼容层。所以 Redox 的 GDB 根本不经过 ptrace 系统调用。</a:t>
+            </a:r>
+          </a:p>
+          <a:p>
+            <a:r>
+              <a:t>SerenityOS——实现了自己的 ptrace 系统调用，但语义并非 Linux ABI；要让 GDB 工作，需要给 GDB 新增一个 serenity target 后端（移植工作），而不是直接用未经修改的上游 GDB。它还自带一个原生调试器 sdb。</a:t>
+            </a:r>
+          </a:p>
+          <a:p>
+            <a:r>
+              <a:t>Fuchsia / Zircon——微内核，无 ptrace；调试由跑在开发机上的 zxdb 客户端连接目标设备上的 debug_agent 组件完成，基于 Zircon 内核对象 koid 与 job/process 模型，且只能远程调试、不能自托管。</a:t>
+            </a:r>
+          </a:p>
+          <a:p>
+            <a:r>
+              <a:t>Haiku——使用端口式（port-based）调试 API（install_team_debugger、team/thread 调试上下文），不是 ptrace；2024 年 GSoC 把 GDB 15.1 移植上来，后端把 Haiku 的调试端口事件翻译成 gdbserver 语义，并为此修改内核以暴露更多调试信息。</a:t>
+            </a:r>
+          </a:p>
+          <a:p>
+            <a:r>
+              <a:t>对比之下，Asterinas 在内核里原生实现 Linux ptrace ABI，未经修改的上游 GDB / strace 用它们标准的 Linux 后端即可直接运行——无需自写或移植 gdbserver、无需远程 agent、无需为私有接口改造 GDB、无需用户态兼容层。</a:t>
+            </a:r>
+          </a:p>
+          <a:p>
+            <a:r>
+              <a:t>Q&amp;A 防线（gVisor）：若被问到 gVisor，它确实也在内部实现了 Linux ptrace（Sentry 的 pkg/sentry/kernel/ptrace.go），属同一路线；但 gVisor 是跑在宿主 Linux 之上的用户态沙箱运行时（Go），且只实现了跑容器够用的 ptrace 子集（历史上 gdb 与 strace 不能同跟一个进程）。因此稳妥表述是：在从零做的通用 OS 中，原生实现 Linux ptrace、直接复用未改 GDB/strace 的，Asterinas 是其中唯一一个。</a:t>
             </a:r>
           </a:p>
         </p:txBody>
@@ -7044,6 +7060,389 @@
                   <a:srgbClr val="A00016"/>
                 </a:solidFill>
               </a:rPr>
+              <a:t>2.1 要解决什么问题：相同接口，内部更优的实现</a:t>
+            </a:r>
+          </a:p>
+        </p:txBody>
+      </p:sp>
+      <p:sp>
+        <p:nvSpPr>
+          <p:cNvPr id="3" name="TextBox 2"/>
+          <p:cNvSpPr txBox="1"/>
+          <p:nvPr/>
+        </p:nvSpPr>
+        <p:spPr>
+          <a:xfrm>
+            <a:off x="1005840" y="1783080"/>
+            <a:ext cx="10241280" cy="4480559"/>
+          </a:xfrm>
+          <a:prstGeom prst="rect">
+            <a:avLst/>
+          </a:prstGeom>
+          <a:noFill/>
+        </p:spPr>
+        <p:txBody>
+          <a:bodyPr wrap="square" anchor="t" lIns="25400" rIns="25400" tIns="25400" bIns="25400">
+            <a:spAutoFit/>
+          </a:bodyPr>
+          <a:lstStyle/>
+          <a:p>
+            <a:pPr>
+              <a:lnSpc>
+                <a:spcPct val="112000"/>
+              </a:lnSpc>
+              <a:spcAft>
+                <a:spcPts val="700"/>
+              </a:spcAft>
+            </a:pPr>
+            <a:r>
+              <a:rPr sz="1500" b="0">
+                <a:solidFill>
+                  <a:srgbClr val="202020"/>
+                </a:solidFill>
+              </a:rPr>
+              <a:t>对外语义与 ABI 必须对齐 Linux，工作落在内部结构与实现质量。借助框内核 + 安全 Rust 这个载体，几处关键机制做得与 Linux 不同：</a:t>
+            </a:r>
+          </a:p>
+          <a:p>
+            <a:pPr>
+              <a:lnSpc>
+                <a:spcPct val="112000"/>
+              </a:lnSpc>
+              <a:spcAft>
+                <a:spcPts val="700"/>
+              </a:spcAft>
+            </a:pPr>
+            <a:r>
+              <a:rPr sz="1500" b="0">
+                <a:solidFill>
+                  <a:srgbClr val="A00016"/>
+                </a:solidFill>
+              </a:rPr>
+              <a:t>•  </a:t>
+            </a:r>
+            <a:r>
+              <a:rPr sz="1500" b="1">
+                <a:solidFill>
+                  <a:srgbClr val="202020"/>
+                </a:solidFill>
+              </a:rPr>
+              <a:t>跟踪关系是旁路 map，不动进程树</a:t>
+            </a:r>
+            <a:r>
+              <a:rPr sz="1500" b="0">
+                <a:solidFill>
+                  <a:srgbClr val="202020"/>
+                </a:solidFill>
+              </a:rPr>
+              <a:t>：Linux 把 tracee reparent 进全局进程树，attach / detach / exit 须全程持有全局写锁 </a:t>
+            </a:r>
+            <a:r>
+              <a:rPr sz="1500" b="0">
+                <a:solidFill>
+                  <a:srgbClr val="A00016"/>
+                </a:solidFill>
+                <a:latin typeface="Menlo"/>
+                <a:cs typeface="Menlo"/>
+              </a:rPr>
+              <a:t>tasklist_lock</a:t>
+            </a:r>
+            <a:r>
+              <a:rPr sz="1500" b="0">
+                <a:solidFill>
+                  <a:srgbClr val="202020"/>
+                </a:solidFill>
+              </a:rPr>
+              <a:t>；本项目用一张旁路 </a:t>
+            </a:r>
+            <a:r>
+              <a:rPr sz="1500" b="0">
+                <a:solidFill>
+                  <a:srgbClr val="A00016"/>
+                </a:solidFill>
+                <a:latin typeface="Menlo"/>
+                <a:cs typeface="Menlo"/>
+              </a:rPr>
+              <a:t>tracees</a:t>
+            </a:r>
+            <a:r>
+              <a:rPr sz="1500" b="0">
+                <a:solidFill>
+                  <a:srgbClr val="202020"/>
+                </a:solidFill>
+              </a:rPr>
+              <a:t> map，关系变更只落在两把文档化锁序的 per-object 锁上。</a:t>
+            </a:r>
+          </a:p>
+          <a:p>
+            <a:pPr>
+              <a:lnSpc>
+                <a:spcPct val="112000"/>
+              </a:lnSpc>
+              <a:spcAft>
+                <a:spcPts val="700"/>
+              </a:spcAft>
+            </a:pPr>
+            <a:r>
+              <a:rPr sz="1500" b="0">
+                <a:solidFill>
+                  <a:srgbClr val="A00016"/>
+                </a:solidFill>
+              </a:rPr>
+              <a:t>•  </a:t>
+            </a:r>
+            <a:r>
+              <a:rPr sz="1500" b="1">
+                <a:solidFill>
+                  <a:srgbClr val="202020"/>
+                </a:solidFill>
+              </a:rPr>
+              <a:t>寄存器快照，而非原地编辑内核栈</a:t>
+            </a:r>
+            <a:r>
+              <a:rPr sz="1500" b="0">
+                <a:solidFill>
+                  <a:srgbClr val="202020"/>
+                </a:solidFill>
+              </a:rPr>
+              <a:t>：Linux 直接读写 tracee 内核栈上的 </a:t>
+            </a:r>
+            <a:r>
+              <a:rPr sz="1500" b="0">
+                <a:solidFill>
+                  <a:srgbClr val="A00016"/>
+                </a:solidFill>
+                <a:latin typeface="Menlo"/>
+                <a:cs typeface="Menlo"/>
+              </a:rPr>
+              <a:t>pt_regs</a:t>
+            </a:r>
+            <a:r>
+              <a:rPr sz="1500" b="0">
+                <a:solidFill>
+                  <a:srgbClr val="202020"/>
+                </a:solidFill>
+              </a:rPr>
+              <a:t>，须先用 </a:t>
+            </a:r>
+            <a:r>
+              <a:rPr sz="1500" b="0">
+                <a:solidFill>
+                  <a:srgbClr val="A00016"/>
+                </a:solidFill>
+                <a:latin typeface="Menlo"/>
+                <a:cs typeface="Menlo"/>
+              </a:rPr>
+              <a:t>wait_task_inactive</a:t>
+            </a:r>
+            <a:r>
+              <a:rPr sz="1500" b="0">
+                <a:solidFill>
+                  <a:srgbClr val="202020"/>
+                </a:solidFill>
+              </a:rPr>
+              <a:t> 等它下 CPU；本项目进入 stop 时把现场快照进持锁的连续 </a:t>
+            </a:r>
+            <a:r>
+              <a:rPr sz="1500" b="0">
+                <a:solidFill>
+                  <a:srgbClr val="A00016"/>
+                </a:solidFill>
+                <a:latin typeface="Menlo"/>
+                <a:cs typeface="Menlo"/>
+              </a:rPr>
+              <a:t>CUserRegsStruct</a:t>
+            </a:r>
+            <a:r>
+              <a:rPr sz="1500" b="0">
+                <a:solidFill>
+                  <a:srgbClr val="202020"/>
+                </a:solidFill>
+              </a:rPr>
+              <a:t>，一致性由锁保证、与是否在 CPU 上无关。</a:t>
+            </a:r>
+          </a:p>
+          <a:p>
+            <a:pPr>
+              <a:lnSpc>
+                <a:spcPct val="112000"/>
+              </a:lnSpc>
+              <a:spcAft>
+                <a:spcPts val="700"/>
+              </a:spcAft>
+            </a:pPr>
+            <a:r>
+              <a:rPr sz="1500" b="0">
+                <a:solidFill>
+                  <a:srgbClr val="A00016"/>
+                </a:solidFill>
+              </a:rPr>
+              <a:t>•  </a:t>
+            </a:r>
+            <a:r>
+              <a:rPr sz="1500" b="1">
+                <a:solidFill>
+                  <a:srgbClr val="202020"/>
+                </a:solidFill>
+              </a:rPr>
+              <a:t>全安全 Rust 的调试通路</a:t>
+            </a:r>
+            <a:r>
+              <a:rPr sz="1500" b="0">
+                <a:solidFill>
+                  <a:srgbClr val="202020"/>
+                </a:solidFill>
+              </a:rPr>
+              <a:t>：改寄存器、写别人内存、改控制流这三件内核里最易出内存安全漏洞的事，全程零 </a:t>
+            </a:r>
+            <a:r>
+              <a:rPr sz="1500" b="0">
+                <a:solidFill>
+                  <a:srgbClr val="A00016"/>
+                </a:solidFill>
+                <a:latin typeface="Menlo"/>
+                <a:cs typeface="Menlo"/>
+              </a:rPr>
+              <a:t>unsafe</a:t>
+            </a:r>
+            <a:r>
+              <a:rPr sz="1500" b="0">
+                <a:solidFill>
+                  <a:srgbClr val="202020"/>
+                </a:solidFill>
+              </a:rPr>
+              <a:t>，危险性由所有权与类型系统在编译期约束。</a:t>
+            </a:r>
+          </a:p>
+          <a:p>
+            <a:pPr>
+              <a:lnSpc>
+                <a:spcPct val="112000"/>
+              </a:lnSpc>
+              <a:spcAft>
+                <a:spcPts val="700"/>
+              </a:spcAft>
+            </a:pPr>
+            <a:r>
+              <a:rPr sz="1500" b="0">
+                <a:solidFill>
+                  <a:srgbClr val="A00016"/>
+                </a:solidFill>
+              </a:rPr>
+              <a:t>•  </a:t>
+            </a:r>
+            <a:r>
+              <a:rPr sz="1500" b="1">
+                <a:solidFill>
+                  <a:srgbClr val="202020"/>
+                </a:solidFill>
+              </a:rPr>
+              <a:t>字段策略收敛成单表</a:t>
+            </a:r>
+            <a:r>
+              <a:rPr sz="1500" b="0">
+                <a:solidFill>
+                  <a:srgbClr val="202020"/>
+                </a:solidFill>
+              </a:rPr>
+              <a:t>：x86 寄存器的字段级特殊处理用一张 </a:t>
+            </a:r>
+            <a:r>
+              <a:rPr sz="1500" b="0">
+                <a:solidFill>
+                  <a:srgbClr val="A00016"/>
+                </a:solidFill>
+                <a:latin typeface="Menlo"/>
+                <a:cs typeface="Menlo"/>
+              </a:rPr>
+              <a:t>REG_RULES</a:t>
+            </a:r>
+            <a:r>
+              <a:rPr sz="1500" b="0">
+                <a:solidFill>
+                  <a:srgbClr val="202020"/>
+                </a:solidFill>
+              </a:rPr>
+              <a:t> 表声明一次、四条访问路径共查，替代 Linux 在读写两侧重列多遍的历史写法。</a:t>
+            </a:r>
+          </a:p>
+          <a:p>
+            <a:pPr>
+              <a:lnSpc>
+                <a:spcPct val="112000"/>
+              </a:lnSpc>
+              <a:spcAft>
+                <a:spcPts val="700"/>
+              </a:spcAft>
+            </a:pPr>
+            <a:r>
+              <a:rPr sz="1250" b="0">
+                <a:solidFill>
+                  <a:srgbClr val="606060"/>
+                </a:solidFill>
+              </a:rPr>
+              <a:t>这几条不是「重新发明」，而是把同一套 ptrace 语义，重建到一个更安全、更分层的载体上。</a:t>
+            </a:r>
+          </a:p>
+        </p:txBody>
+      </p:sp>
+    </p:spTree>
+  </p:cSld>
+  <p:clrMapOvr>
+    <a:masterClrMapping/>
+  </p:clrMapOvr>
+</p:sld>
+</file>
+
+<file path=ppt/slides/slide11.xml><?xml version="1.0" encoding="utf-8"?>
+<p:sld xmlns:a="http://schemas.openxmlformats.org/drawingml/2006/main" xmlns:p="http://schemas.openxmlformats.org/presentationml/2006/main" xmlns:r="http://schemas.openxmlformats.org/officeDocument/2006/relationships">
+  <p:cSld>
+    <p:bg>
+      <p:bgPr>
+        <a:blipFill dpi="0" rotWithShape="1">
+          <a:blip r:embed="rId2"/>
+          <a:stretch>
+            <a:fillRect/>
+          </a:stretch>
+        </a:blipFill>
+        <a:effectLst/>
+      </p:bgPr>
+    </p:bg>
+    <p:spTree>
+      <p:nvGrpSpPr>
+        <p:cNvPr id="1" name=""/>
+        <p:cNvGrpSpPr/>
+        <p:nvPr/>
+      </p:nvGrpSpPr>
+      <p:grpSpPr/>
+      <p:sp>
+        <p:nvSpPr>
+          <p:cNvPr id="2" name="TextBox 1"/>
+          <p:cNvSpPr txBox="1"/>
+          <p:nvPr/>
+        </p:nvSpPr>
+        <p:spPr>
+          <a:xfrm>
+            <a:off x="1005840" y="932688"/>
+            <a:ext cx="10241280" cy="685800"/>
+          </a:xfrm>
+          <a:prstGeom prst="rect">
+            <a:avLst/>
+          </a:prstGeom>
+          <a:noFill/>
+        </p:spPr>
+        <p:txBody>
+          <a:bodyPr wrap="square" anchor="ctr" lIns="25400" rIns="25400" tIns="25400" bIns="25400">
+            <a:spAutoFit/>
+          </a:bodyPr>
+          <a:lstStyle/>
+          <a:p>
+            <a:r>
+              <a:rPr sz="2400" b="1">
+                <a:solidFill>
+                  <a:srgbClr val="A00016"/>
+                </a:solidFill>
+              </a:rPr>
               <a:t>2.2 ptrace-stop 主状态机：三类停止统一收敛</a:t>
             </a:r>
           </a:p>
@@ -7240,7 +7639,7 @@
 </p:sld>
 </file>
 
-<file path=ppt/slides/slide11.xml><?xml version="1.0" encoding="utf-8"?>
+<file path=ppt/slides/slide12.xml><?xml version="1.0" encoding="utf-8"?>
 <p:sld xmlns:a="http://schemas.openxmlformats.org/drawingml/2006/main" xmlns:p="http://schemas.openxmlformats.org/presentationml/2006/main" xmlns:r="http://schemas.openxmlformats.org/officeDocument/2006/relationships">
   <p:cSld>
     <p:bg>
@@ -7451,7 +7850,7 @@
 </p:sld>
 </file>
 
-<file path=ppt/slides/slide12.xml><?xml version="1.0" encoding="utf-8"?>
+<file path=ppt/slides/slide13.xml><?xml version="1.0" encoding="utf-8"?>
 <p:sld xmlns:a="http://schemas.openxmlformats.org/drawingml/2006/main" xmlns:p="http://schemas.openxmlformats.org/presentationml/2006/main" xmlns:r="http://schemas.openxmlformats.org/officeDocument/2006/relationships">
   <p:cSld>
     <p:bg>
@@ -7662,361 +8061,6 @@
                 </a:solidFill>
               </a:rPr>
               <a:t>整条跨进程读写都夹在统一的读写接口和权限检查边界内，安全可控。</a:t>
-            </a:r>
-          </a:p>
-        </p:txBody>
-      </p:sp>
-    </p:spTree>
-  </p:cSld>
-  <p:clrMapOvr>
-    <a:masterClrMapping/>
-  </p:clrMapOvr>
-</p:sld>
-</file>
-
-<file path=ppt/slides/slide13.xml><?xml version="1.0" encoding="utf-8"?>
-<p:sld xmlns:a="http://schemas.openxmlformats.org/drawingml/2006/main" xmlns:p="http://schemas.openxmlformats.org/presentationml/2006/main" xmlns:r="http://schemas.openxmlformats.org/officeDocument/2006/relationships">
-  <p:cSld>
-    <p:bg>
-      <p:bgPr>
-        <a:blipFill dpi="0" rotWithShape="1">
-          <a:blip r:embed="rId2"/>
-          <a:stretch>
-            <a:fillRect/>
-          </a:stretch>
-        </a:blipFill>
-        <a:effectLst/>
-      </p:bgPr>
-    </p:bg>
-    <p:spTree>
-      <p:nvGrpSpPr>
-        <p:cNvPr id="1" name=""/>
-        <p:cNvGrpSpPr/>
-        <p:nvPr/>
-      </p:nvGrpSpPr>
-      <p:grpSpPr/>
-      <p:sp>
-        <p:nvSpPr>
-          <p:cNvPr id="2" name="TextBox 1"/>
-          <p:cNvSpPr txBox="1"/>
-          <p:nvPr/>
-        </p:nvSpPr>
-        <p:spPr>
-          <a:xfrm>
-            <a:off x="1005840" y="932688"/>
-            <a:ext cx="10241280" cy="685800"/>
-          </a:xfrm>
-          <a:prstGeom prst="rect">
-            <a:avLst/>
-          </a:prstGeom>
-          <a:noFill/>
-        </p:spPr>
-        <p:txBody>
-          <a:bodyPr wrap="square" anchor="ctr" lIns="25400" rIns="25400" tIns="25400" bIns="25400">
-            <a:spAutoFit/>
-          </a:bodyPr>
-          <a:lstStyle/>
-          <a:p>
-            <a:r>
-              <a:rPr sz="2400" b="1">
-                <a:solidFill>
-                  <a:srgbClr val="A00016"/>
-                </a:solidFill>
-              </a:rPr>
-              <a:t>2.5 x86-64 寄存器 ABI：字段级读写策略</a:t>
-            </a:r>
-          </a:p>
-        </p:txBody>
-      </p:sp>
-      <p:pic>
-        <p:nvPicPr>
-          <p:cNvPr id="3" name="Picture 2" descr="08_register_abi.png"/>
-          <p:cNvPicPr>
-            <a:picLocks noChangeAspect="1"/>
-          </p:cNvPicPr>
-          <p:nvPr/>
-        </p:nvPicPr>
-        <p:blipFill>
-          <a:blip r:embed="rId3"/>
-          <a:stretch>
-            <a:fillRect/>
-          </a:stretch>
-        </p:blipFill>
-        <p:spPr>
-          <a:xfrm>
-            <a:off x="4330645" y="1783080"/>
-            <a:ext cx="3591668" cy="2084831"/>
-          </a:xfrm>
-          <a:prstGeom prst="rect">
-            <a:avLst/>
-          </a:prstGeom>
-        </p:spPr>
-      </p:pic>
-      <p:sp>
-        <p:nvSpPr>
-          <p:cNvPr id="4" name="TextBox 3"/>
-          <p:cNvSpPr txBox="1"/>
-          <p:nvPr/>
-        </p:nvSpPr>
-        <p:spPr>
-          <a:xfrm>
-            <a:off x="1005840" y="3977639"/>
-            <a:ext cx="10241280" cy="2286000"/>
-          </a:xfrm>
-          <a:prstGeom prst="rect">
-            <a:avLst/>
-          </a:prstGeom>
-          <a:noFill/>
-        </p:spPr>
-        <p:txBody>
-          <a:bodyPr wrap="square" anchor="t" lIns="25400" rIns="25400" tIns="25400" bIns="25400">
-            <a:spAutoFit/>
-          </a:bodyPr>
-          <a:lstStyle/>
-          <a:p>
-            <a:pPr>
-              <a:lnSpc>
-                <a:spcPct val="112000"/>
-              </a:lnSpc>
-              <a:spcAft>
-                <a:spcPts val="700"/>
-              </a:spcAft>
-            </a:pPr>
-            <a:r>
-              <a:rPr sz="1500" b="0">
-                <a:solidFill>
-                  <a:srgbClr val="A00016"/>
-                </a:solidFill>
-              </a:rPr>
-              <a:t>•  </a:t>
-            </a:r>
-            <a:r>
-              <a:rPr sz="1500" b="1">
-                <a:solidFill>
-                  <a:srgbClr val="202020"/>
-                </a:solidFill>
-              </a:rPr>
-              <a:t>快照式访问</a:t>
-            </a:r>
-            <a:r>
-              <a:rPr sz="1500" b="0">
-                <a:solidFill>
-                  <a:srgbClr val="202020"/>
-                </a:solidFill>
-              </a:rPr>
-              <a:t>：tracee 陷入内核、进入 ptrace-stop 时，持锁把用户寄存器上下文复制成一份寄存器快照；tracer 持锁在快照上按字段修改，tracee 唤醒时再写回——作为 GDB </a:t>
-            </a:r>
-            <a:r>
-              <a:rPr sz="1500" b="0">
-                <a:solidFill>
-                  <a:srgbClr val="A00016"/>
-                </a:solidFill>
-                <a:latin typeface="Menlo"/>
-                <a:cs typeface="Menlo"/>
-              </a:rPr>
-              <a:t>info registers</a:t>
-            </a:r>
-            <a:r>
-              <a:rPr sz="1500" b="0">
-                <a:solidFill>
-                  <a:srgbClr val="202020"/>
-                </a:solidFill>
-              </a:rPr>
-              <a:t> 的 ABI 基础。</a:t>
-            </a:r>
-          </a:p>
-          <a:p>
-            <a:pPr>
-              <a:lnSpc>
-                <a:spcPct val="112000"/>
-              </a:lnSpc>
-              <a:spcAft>
-                <a:spcPts val="700"/>
-              </a:spcAft>
-            </a:pPr>
-            <a:r>
-              <a:rPr sz="1500" b="0">
-                <a:solidFill>
-                  <a:srgbClr val="A00016"/>
-                </a:solidFill>
-              </a:rPr>
-              <a:t>•  </a:t>
-            </a:r>
-            <a:r>
-              <a:rPr sz="1500" b="1">
-                <a:solidFill>
-                  <a:srgbClr val="202020"/>
-                </a:solidFill>
-              </a:rPr>
-              <a:t>按字段分级管控</a:t>
-            </a:r>
-            <a:r>
-              <a:rPr sz="1500" b="0">
-                <a:solidFill>
-                  <a:srgbClr val="202020"/>
-                </a:solidFill>
-              </a:rPr>
-              <a:t>：</a:t>
-            </a:r>
-            <a:r>
-              <a:rPr sz="1500" b="0">
-                <a:solidFill>
-                  <a:srgbClr val="A00016"/>
-                </a:solidFill>
-                <a:latin typeface="Menlo"/>
-                <a:cs typeface="Menlo"/>
-              </a:rPr>
-              <a:t>rax..r15</a:t>
-            </a:r>
-            <a:r>
-              <a:rPr sz="1500" b="0">
-                <a:solidFill>
-                  <a:srgbClr val="202020"/>
-                </a:solidFill>
-              </a:rPr>
-              <a:t> 由 tracer 自由修改；</a:t>
-            </a:r>
-            <a:r>
-              <a:rPr sz="1500" b="0">
-                <a:solidFill>
-                  <a:srgbClr val="A00016"/>
-                </a:solidFill>
-                <a:latin typeface="Menlo"/>
-                <a:cs typeface="Menlo"/>
-              </a:rPr>
-              <a:t>rip/rsp/fs/gsbase</a:t>
-            </a:r>
-            <a:r>
-              <a:rPr sz="1500" b="0">
-                <a:solidFill>
-                  <a:srgbClr val="202020"/>
-                </a:solidFill>
-              </a:rPr>
-              <a:t> 必须是用户地址；</a:t>
-            </a:r>
-            <a:r>
-              <a:rPr sz="1500" b="0">
-                <a:solidFill>
-                  <a:srgbClr val="A00016"/>
-                </a:solidFill>
-                <a:latin typeface="Menlo"/>
-                <a:cs typeface="Menlo"/>
-              </a:rPr>
-              <a:t>rflags</a:t>
-            </a:r>
-            <a:r>
-              <a:rPr sz="1500" b="0">
-                <a:solidFill>
-                  <a:srgbClr val="202020"/>
-                </a:solidFill>
-              </a:rPr>
-              <a:t> 仅能写用户态可控位；</a:t>
-            </a:r>
-            <a:r>
-              <a:rPr sz="1500" b="0">
-                <a:solidFill>
-                  <a:srgbClr val="A00016"/>
-                </a:solidFill>
-                <a:latin typeface="Menlo"/>
-                <a:cs typeface="Menlo"/>
-              </a:rPr>
-              <a:t>cs/ss/ds/es</a:t>
-            </a:r>
-            <a:r>
-              <a:rPr sz="1500" b="0">
-                <a:solidFill>
-                  <a:srgbClr val="202020"/>
-                </a:solidFill>
-              </a:rPr>
-              <a:t> 段寄存器只读、与 Linux 一致。</a:t>
-            </a:r>
-          </a:p>
-          <a:p>
-            <a:pPr>
-              <a:lnSpc>
-                <a:spcPct val="112000"/>
-              </a:lnSpc>
-              <a:spcAft>
-                <a:spcPts val="700"/>
-              </a:spcAft>
-            </a:pPr>
-            <a:r>
-              <a:rPr sz="1500" b="0">
-                <a:solidFill>
-                  <a:srgbClr val="A00016"/>
-                </a:solidFill>
-              </a:rPr>
-              <a:t>•  </a:t>
-            </a:r>
-            <a:r>
-              <a:rPr sz="1500" b="1">
-                <a:solidFill>
-                  <a:srgbClr val="202020"/>
-                </a:solidFill>
-              </a:rPr>
-              <a:t>与 Linux 的差异</a:t>
-            </a:r>
-            <a:r>
-              <a:rPr sz="1500" b="0">
-                <a:solidFill>
-                  <a:srgbClr val="202020"/>
-                </a:solidFill>
-              </a:rPr>
-              <a:t>：「哪个字段要怎么校验」用单张 </a:t>
-            </a:r>
-            <a:r>
-              <a:rPr sz="1500" b="0">
-                <a:solidFill>
-                  <a:srgbClr val="A00016"/>
-                </a:solidFill>
-                <a:latin typeface="Menlo"/>
-                <a:cs typeface="Menlo"/>
-              </a:rPr>
-              <a:t>REG_RULES</a:t>
-            </a:r>
-            <a:r>
-              <a:rPr sz="1500" b="0">
-                <a:solidFill>
-                  <a:srgbClr val="202020"/>
-                </a:solidFill>
-              </a:rPr>
-              <a:t> 策略表声明一次、读 / 写 / 按偏移四条路径共查同表，替代 Linux 在 </a:t>
-            </a:r>
-            <a:r>
-              <a:rPr sz="1500" b="0">
-                <a:solidFill>
-                  <a:srgbClr val="A00016"/>
-                </a:solidFill>
-                <a:latin typeface="Menlo"/>
-                <a:cs typeface="Menlo"/>
-              </a:rPr>
-              <a:t>getreg</a:t>
-            </a:r>
-            <a:r>
-              <a:rPr sz="1500" b="0">
-                <a:solidFill>
-                  <a:srgbClr val="202020"/>
-                </a:solidFill>
-              </a:rPr>
-              <a:t>/</a:t>
-            </a:r>
-            <a:r>
-              <a:rPr sz="1500" b="0">
-                <a:solidFill>
-                  <a:srgbClr val="A00016"/>
-                </a:solidFill>
-                <a:latin typeface="Menlo"/>
-                <a:cs typeface="Menlo"/>
-              </a:rPr>
-              <a:t>putreg</a:t>
-            </a:r>
-            <a:r>
-              <a:rPr sz="1500" b="0">
-                <a:solidFill>
-                  <a:srgbClr val="202020"/>
-                </a:solidFill>
-              </a:rPr>
-              <a:t>（及 32 位 compat）里重列多遍的历史写法，并以编译期断言防止表与结构体漂移。</a:t>
             </a:r>
           </a:p>
         </p:txBody>
@@ -8078,6 +8122,361 @@
                   <a:srgbClr val="A00016"/>
                 </a:solidFill>
               </a:rPr>
+              <a:t>2.5 x86-64 寄存器 ABI：字段级读写策略</a:t>
+            </a:r>
+          </a:p>
+        </p:txBody>
+      </p:sp>
+      <p:pic>
+        <p:nvPicPr>
+          <p:cNvPr id="3" name="Picture 2" descr="08_register_abi.png"/>
+          <p:cNvPicPr>
+            <a:picLocks noChangeAspect="1"/>
+          </p:cNvPicPr>
+          <p:nvPr/>
+        </p:nvPicPr>
+        <p:blipFill>
+          <a:blip r:embed="rId3"/>
+          <a:stretch>
+            <a:fillRect/>
+          </a:stretch>
+        </p:blipFill>
+        <p:spPr>
+          <a:xfrm>
+            <a:off x="4330645" y="1783080"/>
+            <a:ext cx="3591668" cy="2084831"/>
+          </a:xfrm>
+          <a:prstGeom prst="rect">
+            <a:avLst/>
+          </a:prstGeom>
+        </p:spPr>
+      </p:pic>
+      <p:sp>
+        <p:nvSpPr>
+          <p:cNvPr id="4" name="TextBox 3"/>
+          <p:cNvSpPr txBox="1"/>
+          <p:nvPr/>
+        </p:nvSpPr>
+        <p:spPr>
+          <a:xfrm>
+            <a:off x="1005840" y="3977639"/>
+            <a:ext cx="10241280" cy="2286000"/>
+          </a:xfrm>
+          <a:prstGeom prst="rect">
+            <a:avLst/>
+          </a:prstGeom>
+          <a:noFill/>
+        </p:spPr>
+        <p:txBody>
+          <a:bodyPr wrap="square" anchor="t" lIns="25400" rIns="25400" tIns="25400" bIns="25400">
+            <a:spAutoFit/>
+          </a:bodyPr>
+          <a:lstStyle/>
+          <a:p>
+            <a:pPr>
+              <a:lnSpc>
+                <a:spcPct val="112000"/>
+              </a:lnSpc>
+              <a:spcAft>
+                <a:spcPts val="700"/>
+              </a:spcAft>
+            </a:pPr>
+            <a:r>
+              <a:rPr sz="1500" b="0">
+                <a:solidFill>
+                  <a:srgbClr val="A00016"/>
+                </a:solidFill>
+              </a:rPr>
+              <a:t>•  </a:t>
+            </a:r>
+            <a:r>
+              <a:rPr sz="1500" b="1">
+                <a:solidFill>
+                  <a:srgbClr val="202020"/>
+                </a:solidFill>
+              </a:rPr>
+              <a:t>快照式访问</a:t>
+            </a:r>
+            <a:r>
+              <a:rPr sz="1500" b="0">
+                <a:solidFill>
+                  <a:srgbClr val="202020"/>
+                </a:solidFill>
+              </a:rPr>
+              <a:t>：tracee 陷入内核、进入 ptrace-stop 时，持锁把用户寄存器上下文复制成一份寄存器快照；tracer 持锁在快照上按字段修改，tracee 唤醒时再写回——作为 GDB </a:t>
+            </a:r>
+            <a:r>
+              <a:rPr sz="1500" b="0">
+                <a:solidFill>
+                  <a:srgbClr val="A00016"/>
+                </a:solidFill>
+                <a:latin typeface="Menlo"/>
+                <a:cs typeface="Menlo"/>
+              </a:rPr>
+              <a:t>info registers</a:t>
+            </a:r>
+            <a:r>
+              <a:rPr sz="1500" b="0">
+                <a:solidFill>
+                  <a:srgbClr val="202020"/>
+                </a:solidFill>
+              </a:rPr>
+              <a:t> 的 ABI 基础。</a:t>
+            </a:r>
+          </a:p>
+          <a:p>
+            <a:pPr>
+              <a:lnSpc>
+                <a:spcPct val="112000"/>
+              </a:lnSpc>
+              <a:spcAft>
+                <a:spcPts val="700"/>
+              </a:spcAft>
+            </a:pPr>
+            <a:r>
+              <a:rPr sz="1500" b="0">
+                <a:solidFill>
+                  <a:srgbClr val="A00016"/>
+                </a:solidFill>
+              </a:rPr>
+              <a:t>•  </a:t>
+            </a:r>
+            <a:r>
+              <a:rPr sz="1500" b="1">
+                <a:solidFill>
+                  <a:srgbClr val="202020"/>
+                </a:solidFill>
+              </a:rPr>
+              <a:t>按字段分级管控</a:t>
+            </a:r>
+            <a:r>
+              <a:rPr sz="1500" b="0">
+                <a:solidFill>
+                  <a:srgbClr val="202020"/>
+                </a:solidFill>
+              </a:rPr>
+              <a:t>：</a:t>
+            </a:r>
+            <a:r>
+              <a:rPr sz="1500" b="0">
+                <a:solidFill>
+                  <a:srgbClr val="A00016"/>
+                </a:solidFill>
+                <a:latin typeface="Menlo"/>
+                <a:cs typeface="Menlo"/>
+              </a:rPr>
+              <a:t>rax..r15</a:t>
+            </a:r>
+            <a:r>
+              <a:rPr sz="1500" b="0">
+                <a:solidFill>
+                  <a:srgbClr val="202020"/>
+                </a:solidFill>
+              </a:rPr>
+              <a:t> 由 tracer 自由修改；</a:t>
+            </a:r>
+            <a:r>
+              <a:rPr sz="1500" b="0">
+                <a:solidFill>
+                  <a:srgbClr val="A00016"/>
+                </a:solidFill>
+                <a:latin typeface="Menlo"/>
+                <a:cs typeface="Menlo"/>
+              </a:rPr>
+              <a:t>rip/rsp/fs/gsbase</a:t>
+            </a:r>
+            <a:r>
+              <a:rPr sz="1500" b="0">
+                <a:solidFill>
+                  <a:srgbClr val="202020"/>
+                </a:solidFill>
+              </a:rPr>
+              <a:t> 必须是用户地址；</a:t>
+            </a:r>
+            <a:r>
+              <a:rPr sz="1500" b="0">
+                <a:solidFill>
+                  <a:srgbClr val="A00016"/>
+                </a:solidFill>
+                <a:latin typeface="Menlo"/>
+                <a:cs typeface="Menlo"/>
+              </a:rPr>
+              <a:t>rflags</a:t>
+            </a:r>
+            <a:r>
+              <a:rPr sz="1500" b="0">
+                <a:solidFill>
+                  <a:srgbClr val="202020"/>
+                </a:solidFill>
+              </a:rPr>
+              <a:t> 仅能写用户态可控位；</a:t>
+            </a:r>
+            <a:r>
+              <a:rPr sz="1500" b="0">
+                <a:solidFill>
+                  <a:srgbClr val="A00016"/>
+                </a:solidFill>
+                <a:latin typeface="Menlo"/>
+                <a:cs typeface="Menlo"/>
+              </a:rPr>
+              <a:t>cs/ss/ds/es</a:t>
+            </a:r>
+            <a:r>
+              <a:rPr sz="1500" b="0">
+                <a:solidFill>
+                  <a:srgbClr val="202020"/>
+                </a:solidFill>
+              </a:rPr>
+              <a:t> 段寄存器只读、与 Linux 一致。</a:t>
+            </a:r>
+          </a:p>
+          <a:p>
+            <a:pPr>
+              <a:lnSpc>
+                <a:spcPct val="112000"/>
+              </a:lnSpc>
+              <a:spcAft>
+                <a:spcPts val="700"/>
+              </a:spcAft>
+            </a:pPr>
+            <a:r>
+              <a:rPr sz="1500" b="0">
+                <a:solidFill>
+                  <a:srgbClr val="A00016"/>
+                </a:solidFill>
+              </a:rPr>
+              <a:t>•  </a:t>
+            </a:r>
+            <a:r>
+              <a:rPr sz="1500" b="1">
+                <a:solidFill>
+                  <a:srgbClr val="202020"/>
+                </a:solidFill>
+              </a:rPr>
+              <a:t>与 Linux 的差异</a:t>
+            </a:r>
+            <a:r>
+              <a:rPr sz="1500" b="0">
+                <a:solidFill>
+                  <a:srgbClr val="202020"/>
+                </a:solidFill>
+              </a:rPr>
+              <a:t>：「哪个字段要怎么校验」用单张 </a:t>
+            </a:r>
+            <a:r>
+              <a:rPr sz="1500" b="0">
+                <a:solidFill>
+                  <a:srgbClr val="A00016"/>
+                </a:solidFill>
+                <a:latin typeface="Menlo"/>
+                <a:cs typeface="Menlo"/>
+              </a:rPr>
+              <a:t>REG_RULES</a:t>
+            </a:r>
+            <a:r>
+              <a:rPr sz="1500" b="0">
+                <a:solidFill>
+                  <a:srgbClr val="202020"/>
+                </a:solidFill>
+              </a:rPr>
+              <a:t> 策略表声明一次、读 / 写 / 按偏移四条路径共查同表，替代 Linux 在 </a:t>
+            </a:r>
+            <a:r>
+              <a:rPr sz="1500" b="0">
+                <a:solidFill>
+                  <a:srgbClr val="A00016"/>
+                </a:solidFill>
+                <a:latin typeface="Menlo"/>
+                <a:cs typeface="Menlo"/>
+              </a:rPr>
+              <a:t>getreg</a:t>
+            </a:r>
+            <a:r>
+              <a:rPr sz="1500" b="0">
+                <a:solidFill>
+                  <a:srgbClr val="202020"/>
+                </a:solidFill>
+              </a:rPr>
+              <a:t>/</a:t>
+            </a:r>
+            <a:r>
+              <a:rPr sz="1500" b="0">
+                <a:solidFill>
+                  <a:srgbClr val="A00016"/>
+                </a:solidFill>
+                <a:latin typeface="Menlo"/>
+                <a:cs typeface="Menlo"/>
+              </a:rPr>
+              <a:t>putreg</a:t>
+            </a:r>
+            <a:r>
+              <a:rPr sz="1500" b="0">
+                <a:solidFill>
+                  <a:srgbClr val="202020"/>
+                </a:solidFill>
+              </a:rPr>
+              <a:t>（及 32 位 compat）里重列多遍的历史写法，并以编译期断言防止表与结构体漂移。</a:t>
+            </a:r>
+          </a:p>
+        </p:txBody>
+      </p:sp>
+    </p:spTree>
+  </p:cSld>
+  <p:clrMapOvr>
+    <a:masterClrMapping/>
+  </p:clrMapOvr>
+</p:sld>
+</file>
+
+<file path=ppt/slides/slide15.xml><?xml version="1.0" encoding="utf-8"?>
+<p:sld xmlns:a="http://schemas.openxmlformats.org/drawingml/2006/main" xmlns:p="http://schemas.openxmlformats.org/presentationml/2006/main" xmlns:r="http://schemas.openxmlformats.org/officeDocument/2006/relationships">
+  <p:cSld>
+    <p:bg>
+      <p:bgPr>
+        <a:blipFill dpi="0" rotWithShape="1">
+          <a:blip r:embed="rId2"/>
+          <a:stretch>
+            <a:fillRect/>
+          </a:stretch>
+        </a:blipFill>
+        <a:effectLst/>
+      </p:bgPr>
+    </p:bg>
+    <p:spTree>
+      <p:nvGrpSpPr>
+        <p:cNvPr id="1" name=""/>
+        <p:cNvGrpSpPr/>
+        <p:nvPr/>
+      </p:nvGrpSpPr>
+      <p:grpSpPr/>
+      <p:sp>
+        <p:nvSpPr>
+          <p:cNvPr id="2" name="TextBox 1"/>
+          <p:cNvSpPr txBox="1"/>
+          <p:nvPr/>
+        </p:nvSpPr>
+        <p:spPr>
+          <a:xfrm>
+            <a:off x="1005840" y="932688"/>
+            <a:ext cx="10241280" cy="685800"/>
+          </a:xfrm>
+          <a:prstGeom prst="rect">
+            <a:avLst/>
+          </a:prstGeom>
+          <a:noFill/>
+        </p:spPr>
+        <p:txBody>
+          <a:bodyPr wrap="square" anchor="ctr" lIns="25400" rIns="25400" tIns="25400" bIns="25400">
+            <a:spAutoFit/>
+          </a:bodyPr>
+          <a:lstStyle/>
+          <a:p>
+            <a:r>
+              <a:rPr sz="2400" b="1">
+                <a:solidFill>
+                  <a:srgbClr val="A00016"/>
+                </a:solidFill>
+              </a:rPr>
               <a:t>2.6 恢复语义与信号四态机</a:t>
             </a:r>
           </a:p>
@@ -8252,7 +8651,7 @@
 </p:sld>
 </file>
 
-<file path=ppt/slides/slide15.xml><?xml version="1.0" encoding="utf-8"?>
+<file path=ppt/slides/slide16.xml><?xml version="1.0" encoding="utf-8"?>
 <p:sld xmlns:a="http://schemas.openxmlformats.org/drawingml/2006/main" xmlns:p="http://schemas.openxmlformats.org/presentationml/2006/main" xmlns:r="http://schemas.openxmlformats.org/officeDocument/2006/relationships">
   <p:cSld>
     <p:bg>
@@ -8983,7 +9382,7 @@
 </p:sld>
 </file>
 
-<file path=ppt/slides/slide16.xml><?xml version="1.0" encoding="utf-8"?>
+<file path=ppt/slides/slide17.xml><?xml version="1.0" encoding="utf-8"?>
 <p:sld xmlns:a="http://schemas.openxmlformats.org/drawingml/2006/main" xmlns:p="http://schemas.openxmlformats.org/presentationml/2006/main" xmlns:r="http://schemas.openxmlformats.org/officeDocument/2006/relationships">
   <p:cSld>
     <p:spTree>
@@ -9111,7 +9510,7 @@
 </p:sld>
 </file>
 
-<file path=ppt/slides/slide17.xml><?xml version="1.0" encoding="utf-8"?>
+<file path=ppt/slides/slide18.xml><?xml version="1.0" encoding="utf-8"?>
 <p:sld xmlns:a="http://schemas.openxmlformats.org/drawingml/2006/main" xmlns:p="http://schemas.openxmlformats.org/presentationml/2006/main" xmlns:r="http://schemas.openxmlformats.org/officeDocument/2006/relationships">
   <p:cSld>
     <p:bg>
@@ -9647,7 +10046,7 @@
 </p:sld>
 </file>
 
-<file path=ppt/slides/slide18.xml><?xml version="1.0" encoding="utf-8"?>
+<file path=ppt/slides/slide19.xml><?xml version="1.0" encoding="utf-8"?>
 <p:sld xmlns:a="http://schemas.openxmlformats.org/drawingml/2006/main" xmlns:p="http://schemas.openxmlformats.org/presentationml/2006/main" xmlns:r="http://schemas.openxmlformats.org/officeDocument/2006/relationships">
   <p:cSld>
     <p:bg>
@@ -9906,333 +10305,6 @@
                 </a:solidFill>
               </a:rPr>
               <a:t>：NixOS 上以真实 GDB、strace 验收。</a:t>
-            </a:r>
-          </a:p>
-        </p:txBody>
-      </p:sp>
-    </p:spTree>
-  </p:cSld>
-  <p:clrMapOvr>
-    <a:masterClrMapping/>
-  </p:clrMapOvr>
-</p:sld>
-</file>
-
-<file path=ppt/slides/slide19.xml><?xml version="1.0" encoding="utf-8"?>
-<p:sld xmlns:a="http://schemas.openxmlformats.org/drawingml/2006/main" xmlns:p="http://schemas.openxmlformats.org/presentationml/2006/main" xmlns:r="http://schemas.openxmlformats.org/officeDocument/2006/relationships">
-  <p:cSld>
-    <p:bg>
-      <p:bgPr>
-        <a:blipFill dpi="0" rotWithShape="1">
-          <a:blip r:embed="rId2"/>
-          <a:stretch>
-            <a:fillRect/>
-          </a:stretch>
-        </a:blipFill>
-        <a:effectLst/>
-      </p:bgPr>
-    </p:bg>
-    <p:spTree>
-      <p:nvGrpSpPr>
-        <p:cNvPr id="1" name=""/>
-        <p:cNvGrpSpPr/>
-        <p:nvPr/>
-      </p:nvGrpSpPr>
-      <p:grpSpPr/>
-      <p:sp>
-        <p:nvSpPr>
-          <p:cNvPr id="2" name="TextBox 1"/>
-          <p:cNvSpPr txBox="1"/>
-          <p:nvPr/>
-        </p:nvSpPr>
-        <p:spPr>
-          <a:xfrm>
-            <a:off x="1005840" y="932688"/>
-            <a:ext cx="10241280" cy="685800"/>
-          </a:xfrm>
-          <a:prstGeom prst="rect">
-            <a:avLst/>
-          </a:prstGeom>
-          <a:noFill/>
-        </p:spPr>
-        <p:txBody>
-          <a:bodyPr wrap="square" anchor="ctr" lIns="25400" rIns="25400" tIns="25400" bIns="25400">
-            <a:spAutoFit/>
-          </a:bodyPr>
-          <a:lstStyle/>
-          <a:p>
-            <a:r>
-              <a:rPr sz="2400" b="1">
-                <a:solidFill>
-                  <a:srgbClr val="A00016"/>
-                </a:solidFill>
-              </a:rPr>
-              <a:t>3.3 实现中的细节打磨</a:t>
-            </a:r>
-          </a:p>
-        </p:txBody>
-      </p:sp>
-      <p:sp>
-        <p:nvSpPr>
-          <p:cNvPr id="3" name="TextBox 2"/>
-          <p:cNvSpPr txBox="1"/>
-          <p:nvPr/>
-        </p:nvSpPr>
-        <p:spPr>
-          <a:xfrm>
-            <a:off x="1005840" y="1783080"/>
-            <a:ext cx="10241280" cy="4480559"/>
-          </a:xfrm>
-          <a:prstGeom prst="rect">
-            <a:avLst/>
-          </a:prstGeom>
-          <a:noFill/>
-        </p:spPr>
-        <p:txBody>
-          <a:bodyPr wrap="square" anchor="t" lIns="25400" rIns="25400" tIns="25400" bIns="25400">
-            <a:spAutoFit/>
-          </a:bodyPr>
-          <a:lstStyle/>
-          <a:p>
-            <a:pPr>
-              <a:lnSpc>
-                <a:spcPct val="112000"/>
-              </a:lnSpc>
-              <a:spcAft>
-                <a:spcPts val="700"/>
-              </a:spcAft>
-            </a:pPr>
-            <a:r>
-              <a:rPr sz="1500" b="0">
-                <a:solidFill>
-                  <a:srgbClr val="202020"/>
-                </a:solidFill>
-              </a:rPr>
-              <a:t>主线特性之外，还有一批小而必要的支撑改动（小 PR），它们决定了真实工具能否真正跑通：</a:t>
-            </a:r>
-          </a:p>
-          <a:p>
-            <a:pPr>
-              <a:lnSpc>
-                <a:spcPct val="112000"/>
-              </a:lnSpc>
-              <a:spcAft>
-                <a:spcPts val="700"/>
-              </a:spcAft>
-            </a:pPr>
-            <a:r>
-              <a:rPr sz="1500" b="0">
-                <a:solidFill>
-                  <a:srgbClr val="A00016"/>
-                </a:solidFill>
-              </a:rPr>
-              <a:t>•  </a:t>
-            </a:r>
-            <a:r>
-              <a:rPr sz="1500" b="1">
-                <a:solidFill>
-                  <a:srgbClr val="202020"/>
-                </a:solidFill>
-              </a:rPr>
-              <a:t>/proc/pid/mem force-write</a:t>
-            </a:r>
-            <a:r>
-              <a:rPr sz="1500" b="0">
-                <a:solidFill>
-                  <a:srgbClr val="202020"/>
-                </a:solidFill>
-              </a:rPr>
-              <a:t>：允许写入只读代码页——这是写入 int3 软件断点的前提。</a:t>
-            </a:r>
-          </a:p>
-          <a:p>
-            <a:pPr>
-              <a:lnSpc>
-                <a:spcPct val="112000"/>
-              </a:lnSpc>
-              <a:spcAft>
-                <a:spcPts val="700"/>
-              </a:spcAft>
-            </a:pPr>
-            <a:r>
-              <a:rPr sz="1500" b="0">
-                <a:solidFill>
-                  <a:srgbClr val="A00016"/>
-                </a:solidFill>
-              </a:rPr>
-              <a:t>•  </a:t>
-            </a:r>
-            <a:r>
-              <a:rPr sz="1500" b="1">
-                <a:solidFill>
-                  <a:srgbClr val="202020"/>
-                </a:solidFill>
-              </a:rPr>
-              <a:t>x86 GDT 插入空 KCODE32 槽</a:t>
-            </a:r>
-            <a:r>
-              <a:rPr sz="1500" b="0">
-                <a:solidFill>
-                  <a:srgbClr val="202020"/>
-                </a:solidFill>
-              </a:rPr>
-              <a:t>：把 USER_CS / USER_SS 调成 Linux 期望的 0x33 / 0x2b，消除 GDB 警告。</a:t>
-            </a:r>
-          </a:p>
-          <a:p>
-            <a:pPr>
-              <a:lnSpc>
-                <a:spcPct val="112000"/>
-              </a:lnSpc>
-              <a:spcAft>
-                <a:spcPts val="700"/>
-              </a:spcAft>
-            </a:pPr>
-            <a:r>
-              <a:rPr sz="1500" b="0">
-                <a:solidFill>
-                  <a:srgbClr val="A00016"/>
-                </a:solidFill>
-              </a:rPr>
-              <a:t>•  </a:t>
-            </a:r>
-            <a:r>
-              <a:rPr sz="1500" b="1">
-                <a:solidFill>
-                  <a:srgbClr val="202020"/>
-                </a:solidFill>
-              </a:rPr>
-              <a:t>debug registers 读仿真 + personality 行为</a:t>
-            </a:r>
-            <a:r>
-              <a:rPr sz="1500" b="0">
-                <a:solidFill>
-                  <a:srgbClr val="202020"/>
-                </a:solidFill>
-              </a:rPr>
-              <a:t>：满足 GDB 的探测，又不放开硬件断点。</a:t>
-            </a:r>
-          </a:p>
-          <a:p>
-            <a:pPr>
-              <a:lnSpc>
-                <a:spcPct val="112000"/>
-              </a:lnSpc>
-              <a:spcAft>
-                <a:spcPts val="700"/>
-              </a:spcAft>
-            </a:pPr>
-            <a:r>
-              <a:rPr sz="1500" b="0">
-                <a:solidFill>
-                  <a:srgbClr val="A00016"/>
-                </a:solidFill>
-              </a:rPr>
-              <a:t>•  </a:t>
-            </a:r>
-            <a:r>
-              <a:rPr sz="1500" b="1">
-                <a:solidFill>
-                  <a:srgbClr val="202020"/>
-                </a:solidFill>
-              </a:rPr>
-              <a:t>procfs 补全</a:t>
-            </a:r>
-            <a:r>
-              <a:rPr sz="1500" b="0">
-                <a:solidFill>
-                  <a:srgbClr val="202020"/>
-                </a:solidFill>
-              </a:rPr>
-              <a:t>：</a:t>
-            </a:r>
-            <a:r>
-              <a:rPr sz="1500" b="0">
-                <a:solidFill>
-                  <a:srgbClr val="A00016"/>
-                </a:solidFill>
-                <a:latin typeface="Menlo"/>
-                <a:cs typeface="Menlo"/>
-              </a:rPr>
-              <a:t>/proc/[pid]/maps</a:t>
-            </a:r>
-            <a:r>
-              <a:rPr sz="1500" b="0">
-                <a:solidFill>
-                  <a:srgbClr val="202020"/>
-                </a:solidFill>
-              </a:rPr>
-              <a:t> 补全非 [stack] 条目以定位代码/库映射；</a:t>
-            </a:r>
-            <a:r>
-              <a:rPr sz="1500" b="0">
-                <a:solidFill>
-                  <a:srgbClr val="A00016"/>
-                </a:solidFill>
-                <a:latin typeface="Menlo"/>
-                <a:cs typeface="Menlo"/>
-              </a:rPr>
-              <a:t>/proc/pid/auxv</a:t>
-            </a:r>
-            <a:r>
-              <a:rPr sz="1500" b="0">
-                <a:solidFill>
-                  <a:srgbClr val="202020"/>
-                </a:solidFill>
-              </a:rPr>
-              <a:t> 暴露辅助向量；</a:t>
-            </a:r>
-            <a:r>
-              <a:rPr sz="1500" b="0">
-                <a:solidFill>
-                  <a:srgbClr val="A00016"/>
-                </a:solidFill>
-                <a:latin typeface="Menlo"/>
-                <a:cs typeface="Menlo"/>
-              </a:rPr>
-              <a:t>/proc/[tid]</a:t>
-            </a:r>
-            <a:r>
-              <a:rPr sz="1500" b="0">
-                <a:solidFill>
-                  <a:srgbClr val="202020"/>
-                </a:solidFill>
-              </a:rPr>
-              <a:t> 提供每线程视图。</a:t>
-            </a:r>
-          </a:p>
-          <a:p>
-            <a:pPr>
-              <a:lnSpc>
-                <a:spcPct val="112000"/>
-              </a:lnSpc>
-              <a:spcAft>
-                <a:spcPts val="700"/>
-              </a:spcAft>
-            </a:pPr>
-            <a:r>
-              <a:rPr sz="1500" b="0">
-                <a:solidFill>
-                  <a:srgbClr val="A00016"/>
-                </a:solidFill>
-              </a:rPr>
-              <a:t>•  </a:t>
-            </a:r>
-            <a:r>
-              <a:rPr sz="1500" b="1">
-                <a:solidFill>
-                  <a:srgbClr val="202020"/>
-                </a:solidFill>
-              </a:rPr>
-              <a:t>tkill 系统调用与 Yama ptrace_scope</a:t>
-            </a:r>
-            <a:r>
-              <a:rPr sz="1500" b="0">
-                <a:solidFill>
-                  <a:srgbClr val="202020"/>
-                </a:solidFill>
-              </a:rPr>
-              <a:t>：补齐定向信号投递与调试安全边界。</a:t>
             </a:r>
           </a:p>
         </p:txBody>
@@ -10421,7 +10493,7 @@
                             <a:srgbClr val="202020"/>
                           </a:solidFill>
                         </a:rPr>
-                        <a:t>问题定义、断点案例、调试通路、总体目标</a:t>
+                        <a:t>问题定义、断点案例、调试通路、相关工作、总体目标</a:t>
                       </a:r>
                     </a:p>
                   </a:txBody>
@@ -10642,6 +10714,333 @@
 <file path=ppt/slides/slide20.xml><?xml version="1.0" encoding="utf-8"?>
 <p:sld xmlns:a="http://schemas.openxmlformats.org/drawingml/2006/main" xmlns:p="http://schemas.openxmlformats.org/presentationml/2006/main" xmlns:r="http://schemas.openxmlformats.org/officeDocument/2006/relationships">
   <p:cSld>
+    <p:bg>
+      <p:bgPr>
+        <a:blipFill dpi="0" rotWithShape="1">
+          <a:blip r:embed="rId2"/>
+          <a:stretch>
+            <a:fillRect/>
+          </a:stretch>
+        </a:blipFill>
+        <a:effectLst/>
+      </p:bgPr>
+    </p:bg>
+    <p:spTree>
+      <p:nvGrpSpPr>
+        <p:cNvPr id="1" name=""/>
+        <p:cNvGrpSpPr/>
+        <p:nvPr/>
+      </p:nvGrpSpPr>
+      <p:grpSpPr/>
+      <p:sp>
+        <p:nvSpPr>
+          <p:cNvPr id="2" name="TextBox 1"/>
+          <p:cNvSpPr txBox="1"/>
+          <p:nvPr/>
+        </p:nvSpPr>
+        <p:spPr>
+          <a:xfrm>
+            <a:off x="1005840" y="932688"/>
+            <a:ext cx="10241280" cy="685800"/>
+          </a:xfrm>
+          <a:prstGeom prst="rect">
+            <a:avLst/>
+          </a:prstGeom>
+          <a:noFill/>
+        </p:spPr>
+        <p:txBody>
+          <a:bodyPr wrap="square" anchor="ctr" lIns="25400" rIns="25400" tIns="25400" bIns="25400">
+            <a:spAutoFit/>
+          </a:bodyPr>
+          <a:lstStyle/>
+          <a:p>
+            <a:r>
+              <a:rPr sz="2400" b="1">
+                <a:solidFill>
+                  <a:srgbClr val="A00016"/>
+                </a:solidFill>
+              </a:rPr>
+              <a:t>3.3 实现中的细节打磨</a:t>
+            </a:r>
+          </a:p>
+        </p:txBody>
+      </p:sp>
+      <p:sp>
+        <p:nvSpPr>
+          <p:cNvPr id="3" name="TextBox 2"/>
+          <p:cNvSpPr txBox="1"/>
+          <p:nvPr/>
+        </p:nvSpPr>
+        <p:spPr>
+          <a:xfrm>
+            <a:off x="1005840" y="1783080"/>
+            <a:ext cx="10241280" cy="4480559"/>
+          </a:xfrm>
+          <a:prstGeom prst="rect">
+            <a:avLst/>
+          </a:prstGeom>
+          <a:noFill/>
+        </p:spPr>
+        <p:txBody>
+          <a:bodyPr wrap="square" anchor="t" lIns="25400" rIns="25400" tIns="25400" bIns="25400">
+            <a:spAutoFit/>
+          </a:bodyPr>
+          <a:lstStyle/>
+          <a:p>
+            <a:pPr>
+              <a:lnSpc>
+                <a:spcPct val="112000"/>
+              </a:lnSpc>
+              <a:spcAft>
+                <a:spcPts val="700"/>
+              </a:spcAft>
+            </a:pPr>
+            <a:r>
+              <a:rPr sz="1500" b="0">
+                <a:solidFill>
+                  <a:srgbClr val="202020"/>
+                </a:solidFill>
+              </a:rPr>
+              <a:t>主线特性之外，还有一批小而必要的支撑改动（小 PR），它们决定了真实工具能否真正跑通：</a:t>
+            </a:r>
+          </a:p>
+          <a:p>
+            <a:pPr>
+              <a:lnSpc>
+                <a:spcPct val="112000"/>
+              </a:lnSpc>
+              <a:spcAft>
+                <a:spcPts val="700"/>
+              </a:spcAft>
+            </a:pPr>
+            <a:r>
+              <a:rPr sz="1500" b="0">
+                <a:solidFill>
+                  <a:srgbClr val="A00016"/>
+                </a:solidFill>
+              </a:rPr>
+              <a:t>•  </a:t>
+            </a:r>
+            <a:r>
+              <a:rPr sz="1500" b="1">
+                <a:solidFill>
+                  <a:srgbClr val="202020"/>
+                </a:solidFill>
+              </a:rPr>
+              <a:t>/proc/pid/mem force-write</a:t>
+            </a:r>
+            <a:r>
+              <a:rPr sz="1500" b="0">
+                <a:solidFill>
+                  <a:srgbClr val="202020"/>
+                </a:solidFill>
+              </a:rPr>
+              <a:t>：允许写入只读代码页——这是写入 int3 软件断点的前提。</a:t>
+            </a:r>
+          </a:p>
+          <a:p>
+            <a:pPr>
+              <a:lnSpc>
+                <a:spcPct val="112000"/>
+              </a:lnSpc>
+              <a:spcAft>
+                <a:spcPts val="700"/>
+              </a:spcAft>
+            </a:pPr>
+            <a:r>
+              <a:rPr sz="1500" b="0">
+                <a:solidFill>
+                  <a:srgbClr val="A00016"/>
+                </a:solidFill>
+              </a:rPr>
+              <a:t>•  </a:t>
+            </a:r>
+            <a:r>
+              <a:rPr sz="1500" b="1">
+                <a:solidFill>
+                  <a:srgbClr val="202020"/>
+                </a:solidFill>
+              </a:rPr>
+              <a:t>x86 GDT 插入空 KCODE32 槽</a:t>
+            </a:r>
+            <a:r>
+              <a:rPr sz="1500" b="0">
+                <a:solidFill>
+                  <a:srgbClr val="202020"/>
+                </a:solidFill>
+              </a:rPr>
+              <a:t>：把 USER_CS / USER_SS 调成 Linux 期望的 0x33 / 0x2b，消除 GDB 警告。</a:t>
+            </a:r>
+          </a:p>
+          <a:p>
+            <a:pPr>
+              <a:lnSpc>
+                <a:spcPct val="112000"/>
+              </a:lnSpc>
+              <a:spcAft>
+                <a:spcPts val="700"/>
+              </a:spcAft>
+            </a:pPr>
+            <a:r>
+              <a:rPr sz="1500" b="0">
+                <a:solidFill>
+                  <a:srgbClr val="A00016"/>
+                </a:solidFill>
+              </a:rPr>
+              <a:t>•  </a:t>
+            </a:r>
+            <a:r>
+              <a:rPr sz="1500" b="1">
+                <a:solidFill>
+                  <a:srgbClr val="202020"/>
+                </a:solidFill>
+              </a:rPr>
+              <a:t>debug registers 读仿真 + personality 行为</a:t>
+            </a:r>
+            <a:r>
+              <a:rPr sz="1500" b="0">
+                <a:solidFill>
+                  <a:srgbClr val="202020"/>
+                </a:solidFill>
+              </a:rPr>
+              <a:t>：满足 GDB 的探测，又不放开硬件断点。</a:t>
+            </a:r>
+          </a:p>
+          <a:p>
+            <a:pPr>
+              <a:lnSpc>
+                <a:spcPct val="112000"/>
+              </a:lnSpc>
+              <a:spcAft>
+                <a:spcPts val="700"/>
+              </a:spcAft>
+            </a:pPr>
+            <a:r>
+              <a:rPr sz="1500" b="0">
+                <a:solidFill>
+                  <a:srgbClr val="A00016"/>
+                </a:solidFill>
+              </a:rPr>
+              <a:t>•  </a:t>
+            </a:r>
+            <a:r>
+              <a:rPr sz="1500" b="1">
+                <a:solidFill>
+                  <a:srgbClr val="202020"/>
+                </a:solidFill>
+              </a:rPr>
+              <a:t>procfs 补全</a:t>
+            </a:r>
+            <a:r>
+              <a:rPr sz="1500" b="0">
+                <a:solidFill>
+                  <a:srgbClr val="202020"/>
+                </a:solidFill>
+              </a:rPr>
+              <a:t>：</a:t>
+            </a:r>
+            <a:r>
+              <a:rPr sz="1500" b="0">
+                <a:solidFill>
+                  <a:srgbClr val="A00016"/>
+                </a:solidFill>
+                <a:latin typeface="Menlo"/>
+                <a:cs typeface="Menlo"/>
+              </a:rPr>
+              <a:t>/proc/[pid]/maps</a:t>
+            </a:r>
+            <a:r>
+              <a:rPr sz="1500" b="0">
+                <a:solidFill>
+                  <a:srgbClr val="202020"/>
+                </a:solidFill>
+              </a:rPr>
+              <a:t> 补全非 [stack] 条目以定位代码/库映射；</a:t>
+            </a:r>
+            <a:r>
+              <a:rPr sz="1500" b="0">
+                <a:solidFill>
+                  <a:srgbClr val="A00016"/>
+                </a:solidFill>
+                <a:latin typeface="Menlo"/>
+                <a:cs typeface="Menlo"/>
+              </a:rPr>
+              <a:t>/proc/pid/auxv</a:t>
+            </a:r>
+            <a:r>
+              <a:rPr sz="1500" b="0">
+                <a:solidFill>
+                  <a:srgbClr val="202020"/>
+                </a:solidFill>
+              </a:rPr>
+              <a:t> 暴露辅助向量；</a:t>
+            </a:r>
+            <a:r>
+              <a:rPr sz="1500" b="0">
+                <a:solidFill>
+                  <a:srgbClr val="A00016"/>
+                </a:solidFill>
+                <a:latin typeface="Menlo"/>
+                <a:cs typeface="Menlo"/>
+              </a:rPr>
+              <a:t>/proc/[tid]</a:t>
+            </a:r>
+            <a:r>
+              <a:rPr sz="1500" b="0">
+                <a:solidFill>
+                  <a:srgbClr val="202020"/>
+                </a:solidFill>
+              </a:rPr>
+              <a:t> 提供每线程视图。</a:t>
+            </a:r>
+          </a:p>
+          <a:p>
+            <a:pPr>
+              <a:lnSpc>
+                <a:spcPct val="112000"/>
+              </a:lnSpc>
+              <a:spcAft>
+                <a:spcPts val="700"/>
+              </a:spcAft>
+            </a:pPr>
+            <a:r>
+              <a:rPr sz="1500" b="0">
+                <a:solidFill>
+                  <a:srgbClr val="A00016"/>
+                </a:solidFill>
+              </a:rPr>
+              <a:t>•  </a:t>
+            </a:r>
+            <a:r>
+              <a:rPr sz="1500" b="1">
+                <a:solidFill>
+                  <a:srgbClr val="202020"/>
+                </a:solidFill>
+              </a:rPr>
+              <a:t>tkill 系统调用与 Yama ptrace_scope</a:t>
+            </a:r>
+            <a:r>
+              <a:rPr sz="1500" b="0">
+                <a:solidFill>
+                  <a:srgbClr val="202020"/>
+                </a:solidFill>
+              </a:rPr>
+              <a:t>：补齐定向信号投递与调试安全边界。</a:t>
+            </a:r>
+          </a:p>
+        </p:txBody>
+      </p:sp>
+    </p:spTree>
+  </p:cSld>
+  <p:clrMapOvr>
+    <a:masterClrMapping/>
+  </p:clrMapOvr>
+</p:sld>
+</file>
+
+<file path=ppt/slides/slide21.xml><?xml version="1.0" encoding="utf-8"?>
+<p:sld xmlns:a="http://schemas.openxmlformats.org/drawingml/2006/main" xmlns:p="http://schemas.openxmlformats.org/presentationml/2006/main" xmlns:r="http://schemas.openxmlformats.org/officeDocument/2006/relationships">
+  <p:cSld>
     <p:spTree>
       <p:nvGrpSpPr>
         <p:cNvPr id="1" name=""/>
@@ -10767,391 +11166,6 @@
 </p:sld>
 </file>
 
-<file path=ppt/slides/slide21.xml><?xml version="1.0" encoding="utf-8"?>
-<p:sld xmlns:a="http://schemas.openxmlformats.org/drawingml/2006/main" xmlns:p="http://schemas.openxmlformats.org/presentationml/2006/main" xmlns:r="http://schemas.openxmlformats.org/officeDocument/2006/relationships">
-  <p:cSld>
-    <p:bg>
-      <p:bgPr>
-        <a:blipFill dpi="0" rotWithShape="1">
-          <a:blip r:embed="rId2"/>
-          <a:stretch>
-            <a:fillRect/>
-          </a:stretch>
-        </a:blipFill>
-        <a:effectLst/>
-      </p:bgPr>
-    </p:bg>
-    <p:spTree>
-      <p:nvGrpSpPr>
-        <p:cNvPr id="1" name=""/>
-        <p:cNvGrpSpPr/>
-        <p:nvPr/>
-      </p:nvGrpSpPr>
-      <p:grpSpPr/>
-      <p:sp>
-        <p:nvSpPr>
-          <p:cNvPr id="2" name="TextBox 1"/>
-          <p:cNvSpPr txBox="1"/>
-          <p:nvPr/>
-        </p:nvSpPr>
-        <p:spPr>
-          <a:xfrm>
-            <a:off x="1005840" y="932688"/>
-            <a:ext cx="10241280" cy="685800"/>
-          </a:xfrm>
-          <a:prstGeom prst="rect">
-            <a:avLst/>
-          </a:prstGeom>
-          <a:noFill/>
-        </p:spPr>
-        <p:txBody>
-          <a:bodyPr wrap="square" anchor="ctr" lIns="25400" rIns="25400" tIns="25400" bIns="25400">
-            <a:spAutoFit/>
-          </a:bodyPr>
-          <a:lstStyle/>
-          <a:p>
-            <a:r>
-              <a:rPr sz="2400" b="1">
-                <a:solidFill>
-                  <a:srgbClr val="A00016"/>
-                </a:solidFill>
-              </a:rPr>
-              <a:t>4.1 总结与展望</a:t>
-            </a:r>
-          </a:p>
-        </p:txBody>
-      </p:sp>
-      <p:sp>
-        <p:nvSpPr>
-          <p:cNvPr id="3" name="TextBox 2"/>
-          <p:cNvSpPr txBox="1"/>
-          <p:nvPr/>
-        </p:nvSpPr>
-        <p:spPr>
-          <a:xfrm>
-            <a:off x="1005840" y="1783080"/>
-            <a:ext cx="10241280" cy="4480559"/>
-          </a:xfrm>
-          <a:prstGeom prst="rect">
-            <a:avLst/>
-          </a:prstGeom>
-          <a:noFill/>
-        </p:spPr>
-        <p:txBody>
-          <a:bodyPr wrap="square" anchor="t" lIns="25400" rIns="25400" tIns="25400" bIns="25400">
-            <a:spAutoFit/>
-          </a:bodyPr>
-          <a:lstStyle/>
-          <a:p>
-            <a:pPr>
-              <a:lnSpc>
-                <a:spcPct val="112000"/>
-              </a:lnSpc>
-              <a:spcAft>
-                <a:spcPts val="700"/>
-              </a:spcAft>
-            </a:pPr>
-            <a:r>
-              <a:rPr sz="1500" b="1">
-                <a:solidFill>
-                  <a:srgbClr val="202020"/>
-                </a:solidFill>
-              </a:rPr>
-              <a:t>设计核心</a:t>
-            </a:r>
-            <a:r>
-              <a:rPr sz="1500" b="0">
-                <a:solidFill>
-                  <a:srgbClr val="202020"/>
-                </a:solidFill>
-              </a:rPr>
-              <a:t>　以 </a:t>
-            </a:r>
-            <a:r>
-              <a:rPr sz="1500" b="1">
-                <a:solidFill>
-                  <a:srgbClr val="202020"/>
-                </a:solidFill>
-              </a:rPr>
-              <a:t>ptrace-stop 状态机</a:t>
-            </a:r>
-            <a:r>
-              <a:rPr sz="1500" b="0">
-                <a:solidFill>
-                  <a:srgbClr val="202020"/>
-                </a:solidFill>
-              </a:rPr>
-              <a:t>为中心，把信号、异常、系统调用、wait、寄存器、跨进程内存、安全策略统一到一条 </a:t>
-            </a:r>
-            <a:r>
-              <a:rPr sz="1500" b="1">
-                <a:solidFill>
-                  <a:srgbClr val="202020"/>
-                </a:solidFill>
-              </a:rPr>
-              <a:t>Linux ABI 兼容</a:t>
-            </a:r>
-            <a:r>
-              <a:rPr sz="1500" b="0">
-                <a:solidFill>
-                  <a:srgbClr val="202020"/>
-                </a:solidFill>
-              </a:rPr>
-              <a:t>的调试路径。</a:t>
-            </a:r>
-          </a:p>
-          <a:p>
-            <a:pPr>
-              <a:lnSpc>
-                <a:spcPct val="112000"/>
-              </a:lnSpc>
-              <a:spcAft>
-                <a:spcPts val="700"/>
-              </a:spcAft>
-            </a:pPr>
-            <a:r>
-              <a:rPr sz="1500" b="1">
-                <a:solidFill>
-                  <a:srgbClr val="202020"/>
-                </a:solidFill>
-              </a:rPr>
-              <a:t>项目价值</a:t>
-            </a:r>
-            <a:r>
-              <a:rPr sz="1500" b="0">
-                <a:solidFill>
-                  <a:srgbClr val="202020"/>
-                </a:solidFill>
-              </a:rPr>
-              <a:t>　不止「能跑 GDB」——更为 RustOS 建立了</a:t>
-            </a:r>
-            <a:r>
-              <a:rPr sz="1500" b="1">
-                <a:solidFill>
-                  <a:srgbClr val="202020"/>
-                </a:solidFill>
-              </a:rPr>
-              <a:t>跨越多个内核子系统的调试能力骨架</a:t>
-            </a:r>
-            <a:r>
-              <a:rPr sz="1500" b="0">
-                <a:solidFill>
-                  <a:srgbClr val="202020"/>
-                </a:solidFill>
-              </a:rPr>
-              <a:t>，同时成为检验进程、内存、信号与安全模型正确性的</a:t>
-            </a:r>
-            <a:r>
-              <a:rPr sz="1500" b="1">
-                <a:solidFill>
-                  <a:srgbClr val="202020"/>
-                </a:solidFill>
-              </a:rPr>
-              <a:t>综合压力测试入口</a:t>
-            </a:r>
-            <a:r>
-              <a:rPr sz="1500" b="0">
-                <a:solidFill>
-                  <a:srgbClr val="202020"/>
-                </a:solidFill>
-              </a:rPr>
-              <a:t>。</a:t>
-            </a:r>
-          </a:p>
-          <a:p>
-            <a:pPr>
-              <a:lnSpc>
-                <a:spcPct val="112000"/>
-              </a:lnSpc>
-              <a:spcAft>
-                <a:spcPts val="700"/>
-              </a:spcAft>
-            </a:pPr>
-            <a:r>
-              <a:rPr sz="1500" b="1">
-                <a:solidFill>
-                  <a:srgbClr val="202020"/>
-                </a:solidFill>
-              </a:rPr>
-              <a:t>后续方向</a:t>
-            </a:r>
-          </a:p>
-          <a:p>
-            <a:pPr>
-              <a:lnSpc>
-                <a:spcPct val="112000"/>
-              </a:lnSpc>
-              <a:spcAft>
-                <a:spcPts val="700"/>
-              </a:spcAft>
-            </a:pPr>
-            <a:r>
-              <a:rPr sz="1500" b="0">
-                <a:solidFill>
-                  <a:srgbClr val="A00016"/>
-                </a:solidFill>
-              </a:rPr>
-              <a:t>•  </a:t>
-            </a:r>
-            <a:r>
-              <a:rPr sz="1500" b="0">
-                <a:solidFill>
-                  <a:srgbClr val="202020"/>
-                </a:solidFill>
-              </a:rPr>
-              <a:t>中途调试已运行进程：支持 </a:t>
-            </a:r>
-            <a:r>
-              <a:rPr sz="1500" b="0">
-                <a:solidFill>
-                  <a:srgbClr val="A00016"/>
-                </a:solidFill>
-                <a:latin typeface="Menlo"/>
-                <a:cs typeface="Menlo"/>
-              </a:rPr>
-              <a:t>PTRACE_ATTACH / DETACH</a:t>
-            </a:r>
-            <a:r>
-              <a:rPr sz="1500" b="0">
-                <a:solidFill>
-                  <a:srgbClr val="202020"/>
-                </a:solidFill>
-              </a:rPr>
-              <a:t>。</a:t>
-            </a:r>
-          </a:p>
-          <a:p>
-            <a:pPr>
-              <a:lnSpc>
-                <a:spcPct val="112000"/>
-              </a:lnSpc>
-              <a:spcAft>
-                <a:spcPts val="700"/>
-              </a:spcAft>
-            </a:pPr>
-            <a:r>
-              <a:rPr sz="1500" b="0">
-                <a:solidFill>
-                  <a:srgbClr val="A00016"/>
-                </a:solidFill>
-              </a:rPr>
-              <a:t>•  </a:t>
-            </a:r>
-            <a:r>
-              <a:rPr sz="1500" b="0">
-                <a:solidFill>
-                  <a:srgbClr val="202020"/>
-                </a:solidFill>
-              </a:rPr>
-              <a:t>调试多线程进程：fork/vfork/clone 的 event-stop。</a:t>
-            </a:r>
-          </a:p>
-          <a:p>
-            <a:pPr>
-              <a:lnSpc>
-                <a:spcPct val="112000"/>
-              </a:lnSpc>
-              <a:spcAft>
-                <a:spcPts val="700"/>
-              </a:spcAft>
-            </a:pPr>
-            <a:r>
-              <a:rPr sz="1500" b="0">
-                <a:solidFill>
-                  <a:srgbClr val="A00016"/>
-                </a:solidFill>
-              </a:rPr>
-              <a:t>•  </a:t>
-            </a:r>
-            <a:r>
-              <a:rPr sz="1500" b="0">
-                <a:solidFill>
-                  <a:srgbClr val="202020"/>
-                </a:solidFill>
-              </a:rPr>
-              <a:t>支持 GDB watchpoint 观察点：x86 debug registers 真实读写。</a:t>
-            </a:r>
-          </a:p>
-          <a:p>
-            <a:pPr>
-              <a:lnSpc>
-                <a:spcPct val="112000"/>
-              </a:lnSpc>
-              <a:spcAft>
-                <a:spcPts val="700"/>
-              </a:spcAft>
-            </a:pPr>
-            <a:r>
-              <a:rPr sz="1500" b="0">
-                <a:solidFill>
-                  <a:srgbClr val="A00016"/>
-                </a:solidFill>
-              </a:rPr>
-              <a:t>•  </a:t>
-            </a:r>
-            <a:r>
-              <a:rPr sz="1500" b="0">
-                <a:solidFill>
-                  <a:srgbClr val="202020"/>
-                </a:solidFill>
-              </a:rPr>
-              <a:t>寄存器扩展：</a:t>
-            </a:r>
-            <a:r>
-              <a:rPr sz="1500" b="0">
-                <a:solidFill>
-                  <a:srgbClr val="A00016"/>
-                </a:solidFill>
-                <a:latin typeface="Menlo"/>
-                <a:cs typeface="Menlo"/>
-              </a:rPr>
-              <a:t>GETREGSET</a:t>
-            </a:r>
-            <a:r>
-              <a:rPr sz="1500" b="0">
-                <a:solidFill>
-                  <a:srgbClr val="202020"/>
-                </a:solidFill>
-              </a:rPr>
-              <a:t>、FP/SIMD。</a:t>
-            </a:r>
-          </a:p>
-          <a:p>
-            <a:pPr>
-              <a:lnSpc>
-                <a:spcPct val="112000"/>
-              </a:lnSpc>
-              <a:spcAft>
-                <a:spcPts val="700"/>
-              </a:spcAft>
-            </a:pPr>
-            <a:r>
-              <a:rPr sz="1500" b="0">
-                <a:solidFill>
-                  <a:srgbClr val="A00016"/>
-                </a:solidFill>
-              </a:rPr>
-              <a:t>•  </a:t>
-            </a:r>
-            <a:r>
-              <a:rPr sz="1500" b="0">
-                <a:solidFill>
-                  <a:srgbClr val="202020"/>
-                </a:solidFill>
-              </a:rPr>
-              <a:t>跨架构推广：riscv64 / loongarch64。</a:t>
-            </a:r>
-          </a:p>
-        </p:txBody>
-      </p:sp>
-    </p:spTree>
-  </p:cSld>
-  <p:clrMapOvr>
-    <a:masterClrMapping/>
-  </p:clrMapOvr>
-</p:sld>
-</file>
-
 <file path=ppt/slides/slide22.xml><?xml version="1.0" encoding="utf-8"?>
 <p:sld xmlns:a="http://schemas.openxmlformats.org/drawingml/2006/main" xmlns:p="http://schemas.openxmlformats.org/presentationml/2006/main" xmlns:r="http://schemas.openxmlformats.org/officeDocument/2006/relationships">
   <p:cSld>
@@ -11181,6 +11195,391 @@
         </p:nvSpPr>
         <p:spPr>
           <a:xfrm>
+            <a:off x="1005840" y="932688"/>
+            <a:ext cx="10241280" cy="685800"/>
+          </a:xfrm>
+          <a:prstGeom prst="rect">
+            <a:avLst/>
+          </a:prstGeom>
+          <a:noFill/>
+        </p:spPr>
+        <p:txBody>
+          <a:bodyPr wrap="square" anchor="ctr" lIns="25400" rIns="25400" tIns="25400" bIns="25400">
+            <a:spAutoFit/>
+          </a:bodyPr>
+          <a:lstStyle/>
+          <a:p>
+            <a:r>
+              <a:rPr sz="2400" b="1">
+                <a:solidFill>
+                  <a:srgbClr val="A00016"/>
+                </a:solidFill>
+              </a:rPr>
+              <a:t>4.1 总结与展望</a:t>
+            </a:r>
+          </a:p>
+        </p:txBody>
+      </p:sp>
+      <p:sp>
+        <p:nvSpPr>
+          <p:cNvPr id="3" name="TextBox 2"/>
+          <p:cNvSpPr txBox="1"/>
+          <p:nvPr/>
+        </p:nvSpPr>
+        <p:spPr>
+          <a:xfrm>
+            <a:off x="1005840" y="1783080"/>
+            <a:ext cx="10241280" cy="4480559"/>
+          </a:xfrm>
+          <a:prstGeom prst="rect">
+            <a:avLst/>
+          </a:prstGeom>
+          <a:noFill/>
+        </p:spPr>
+        <p:txBody>
+          <a:bodyPr wrap="square" anchor="t" lIns="25400" rIns="25400" tIns="25400" bIns="25400">
+            <a:spAutoFit/>
+          </a:bodyPr>
+          <a:lstStyle/>
+          <a:p>
+            <a:pPr>
+              <a:lnSpc>
+                <a:spcPct val="112000"/>
+              </a:lnSpc>
+              <a:spcAft>
+                <a:spcPts val="700"/>
+              </a:spcAft>
+            </a:pPr>
+            <a:r>
+              <a:rPr sz="1500" b="1">
+                <a:solidFill>
+                  <a:srgbClr val="202020"/>
+                </a:solidFill>
+              </a:rPr>
+              <a:t>设计核心</a:t>
+            </a:r>
+            <a:r>
+              <a:rPr sz="1500" b="0">
+                <a:solidFill>
+                  <a:srgbClr val="202020"/>
+                </a:solidFill>
+              </a:rPr>
+              <a:t>　以 </a:t>
+            </a:r>
+            <a:r>
+              <a:rPr sz="1500" b="1">
+                <a:solidFill>
+                  <a:srgbClr val="202020"/>
+                </a:solidFill>
+              </a:rPr>
+              <a:t>ptrace-stop 状态机</a:t>
+            </a:r>
+            <a:r>
+              <a:rPr sz="1500" b="0">
+                <a:solidFill>
+                  <a:srgbClr val="202020"/>
+                </a:solidFill>
+              </a:rPr>
+              <a:t>为中心，把信号、异常、系统调用、wait、寄存器、跨进程内存、安全策略统一到一条 </a:t>
+            </a:r>
+            <a:r>
+              <a:rPr sz="1500" b="1">
+                <a:solidFill>
+                  <a:srgbClr val="202020"/>
+                </a:solidFill>
+              </a:rPr>
+              <a:t>Linux ABI 兼容</a:t>
+            </a:r>
+            <a:r>
+              <a:rPr sz="1500" b="0">
+                <a:solidFill>
+                  <a:srgbClr val="202020"/>
+                </a:solidFill>
+              </a:rPr>
+              <a:t>的调试路径。</a:t>
+            </a:r>
+          </a:p>
+          <a:p>
+            <a:pPr>
+              <a:lnSpc>
+                <a:spcPct val="112000"/>
+              </a:lnSpc>
+              <a:spcAft>
+                <a:spcPts val="700"/>
+              </a:spcAft>
+            </a:pPr>
+            <a:r>
+              <a:rPr sz="1500" b="1">
+                <a:solidFill>
+                  <a:srgbClr val="202020"/>
+                </a:solidFill>
+              </a:rPr>
+              <a:t>项目价值</a:t>
+            </a:r>
+            <a:r>
+              <a:rPr sz="1500" b="0">
+                <a:solidFill>
+                  <a:srgbClr val="202020"/>
+                </a:solidFill>
+              </a:rPr>
+              <a:t>　不止「能跑 GDB」——更为 RustOS 建立了</a:t>
+            </a:r>
+            <a:r>
+              <a:rPr sz="1500" b="1">
+                <a:solidFill>
+                  <a:srgbClr val="202020"/>
+                </a:solidFill>
+              </a:rPr>
+              <a:t>跨越多个内核子系统的调试能力骨架</a:t>
+            </a:r>
+            <a:r>
+              <a:rPr sz="1500" b="0">
+                <a:solidFill>
+                  <a:srgbClr val="202020"/>
+                </a:solidFill>
+              </a:rPr>
+              <a:t>，同时成为检验进程、内存、信号与安全模型正确性的</a:t>
+            </a:r>
+            <a:r>
+              <a:rPr sz="1500" b="1">
+                <a:solidFill>
+                  <a:srgbClr val="202020"/>
+                </a:solidFill>
+              </a:rPr>
+              <a:t>综合压力测试入口</a:t>
+            </a:r>
+            <a:r>
+              <a:rPr sz="1500" b="0">
+                <a:solidFill>
+                  <a:srgbClr val="202020"/>
+                </a:solidFill>
+              </a:rPr>
+              <a:t>。</a:t>
+            </a:r>
+          </a:p>
+          <a:p>
+            <a:pPr>
+              <a:lnSpc>
+                <a:spcPct val="112000"/>
+              </a:lnSpc>
+              <a:spcAft>
+                <a:spcPts val="700"/>
+              </a:spcAft>
+            </a:pPr>
+            <a:r>
+              <a:rPr sz="1500" b="1">
+                <a:solidFill>
+                  <a:srgbClr val="202020"/>
+                </a:solidFill>
+              </a:rPr>
+              <a:t>后续方向</a:t>
+            </a:r>
+          </a:p>
+          <a:p>
+            <a:pPr>
+              <a:lnSpc>
+                <a:spcPct val="112000"/>
+              </a:lnSpc>
+              <a:spcAft>
+                <a:spcPts val="700"/>
+              </a:spcAft>
+            </a:pPr>
+            <a:r>
+              <a:rPr sz="1500" b="0">
+                <a:solidFill>
+                  <a:srgbClr val="A00016"/>
+                </a:solidFill>
+              </a:rPr>
+              <a:t>•  </a:t>
+            </a:r>
+            <a:r>
+              <a:rPr sz="1500" b="0">
+                <a:solidFill>
+                  <a:srgbClr val="202020"/>
+                </a:solidFill>
+              </a:rPr>
+              <a:t>中途调试已运行进程：支持 </a:t>
+            </a:r>
+            <a:r>
+              <a:rPr sz="1500" b="0">
+                <a:solidFill>
+                  <a:srgbClr val="A00016"/>
+                </a:solidFill>
+                <a:latin typeface="Menlo"/>
+                <a:cs typeface="Menlo"/>
+              </a:rPr>
+              <a:t>PTRACE_ATTACH / DETACH</a:t>
+            </a:r>
+            <a:r>
+              <a:rPr sz="1500" b="0">
+                <a:solidFill>
+                  <a:srgbClr val="202020"/>
+                </a:solidFill>
+              </a:rPr>
+              <a:t>。</a:t>
+            </a:r>
+          </a:p>
+          <a:p>
+            <a:pPr>
+              <a:lnSpc>
+                <a:spcPct val="112000"/>
+              </a:lnSpc>
+              <a:spcAft>
+                <a:spcPts val="700"/>
+              </a:spcAft>
+            </a:pPr>
+            <a:r>
+              <a:rPr sz="1500" b="0">
+                <a:solidFill>
+                  <a:srgbClr val="A00016"/>
+                </a:solidFill>
+              </a:rPr>
+              <a:t>•  </a:t>
+            </a:r>
+            <a:r>
+              <a:rPr sz="1500" b="0">
+                <a:solidFill>
+                  <a:srgbClr val="202020"/>
+                </a:solidFill>
+              </a:rPr>
+              <a:t>调试多线程进程：fork/vfork/clone 的 event-stop。</a:t>
+            </a:r>
+          </a:p>
+          <a:p>
+            <a:pPr>
+              <a:lnSpc>
+                <a:spcPct val="112000"/>
+              </a:lnSpc>
+              <a:spcAft>
+                <a:spcPts val="700"/>
+              </a:spcAft>
+            </a:pPr>
+            <a:r>
+              <a:rPr sz="1500" b="0">
+                <a:solidFill>
+                  <a:srgbClr val="A00016"/>
+                </a:solidFill>
+              </a:rPr>
+              <a:t>•  </a:t>
+            </a:r>
+            <a:r>
+              <a:rPr sz="1500" b="0">
+                <a:solidFill>
+                  <a:srgbClr val="202020"/>
+                </a:solidFill>
+              </a:rPr>
+              <a:t>支持 GDB watchpoint 观察点：x86 debug registers 真实读写。</a:t>
+            </a:r>
+          </a:p>
+          <a:p>
+            <a:pPr>
+              <a:lnSpc>
+                <a:spcPct val="112000"/>
+              </a:lnSpc>
+              <a:spcAft>
+                <a:spcPts val="700"/>
+              </a:spcAft>
+            </a:pPr>
+            <a:r>
+              <a:rPr sz="1500" b="0">
+                <a:solidFill>
+                  <a:srgbClr val="A00016"/>
+                </a:solidFill>
+              </a:rPr>
+              <a:t>•  </a:t>
+            </a:r>
+            <a:r>
+              <a:rPr sz="1500" b="0">
+                <a:solidFill>
+                  <a:srgbClr val="202020"/>
+                </a:solidFill>
+              </a:rPr>
+              <a:t>寄存器扩展：</a:t>
+            </a:r>
+            <a:r>
+              <a:rPr sz="1500" b="0">
+                <a:solidFill>
+                  <a:srgbClr val="A00016"/>
+                </a:solidFill>
+                <a:latin typeface="Menlo"/>
+                <a:cs typeface="Menlo"/>
+              </a:rPr>
+              <a:t>GETREGSET</a:t>
+            </a:r>
+            <a:r>
+              <a:rPr sz="1500" b="0">
+                <a:solidFill>
+                  <a:srgbClr val="202020"/>
+                </a:solidFill>
+              </a:rPr>
+              <a:t>、FP/SIMD。</a:t>
+            </a:r>
+          </a:p>
+          <a:p>
+            <a:pPr>
+              <a:lnSpc>
+                <a:spcPct val="112000"/>
+              </a:lnSpc>
+              <a:spcAft>
+                <a:spcPts val="700"/>
+              </a:spcAft>
+            </a:pPr>
+            <a:r>
+              <a:rPr sz="1500" b="0">
+                <a:solidFill>
+                  <a:srgbClr val="A00016"/>
+                </a:solidFill>
+              </a:rPr>
+              <a:t>•  </a:t>
+            </a:r>
+            <a:r>
+              <a:rPr sz="1500" b="0">
+                <a:solidFill>
+                  <a:srgbClr val="202020"/>
+                </a:solidFill>
+              </a:rPr>
+              <a:t>跨架构推广：riscv64 / loongarch64。</a:t>
+            </a:r>
+          </a:p>
+        </p:txBody>
+      </p:sp>
+    </p:spTree>
+  </p:cSld>
+  <p:clrMapOvr>
+    <a:masterClrMapping/>
+  </p:clrMapOvr>
+</p:sld>
+</file>
+
+<file path=ppt/slides/slide23.xml><?xml version="1.0" encoding="utf-8"?>
+<p:sld xmlns:a="http://schemas.openxmlformats.org/drawingml/2006/main" xmlns:p="http://schemas.openxmlformats.org/presentationml/2006/main" xmlns:r="http://schemas.openxmlformats.org/officeDocument/2006/relationships">
+  <p:cSld>
+    <p:bg>
+      <p:bgPr>
+        <a:blipFill dpi="0" rotWithShape="1">
+          <a:blip r:embed="rId2"/>
+          <a:stretch>
+            <a:fillRect/>
+          </a:stretch>
+        </a:blipFill>
+        <a:effectLst/>
+      </p:bgPr>
+    </p:bg>
+    <p:spTree>
+      <p:nvGrpSpPr>
+        <p:cNvPr id="1" name=""/>
+        <p:cNvGrpSpPr/>
+        <p:nvPr/>
+      </p:nvGrpSpPr>
+      <p:grpSpPr/>
+      <p:sp>
+        <p:nvSpPr>
+          <p:cNvPr id="2" name="TextBox 1"/>
+          <p:cNvSpPr txBox="1"/>
+          <p:nvPr/>
+        </p:nvSpPr>
+        <p:spPr>
+          <a:xfrm>
             <a:off x="1097280" y="2743200"/>
             <a:ext cx="9966960" cy="1280160"/>
           </a:xfrm>
@@ -11286,7 +11685,7 @@
                   <a:srgbClr val="606060"/>
                 </a:solidFill>
               </a:rPr>
-              <a:t>调试能力为什么需要、调试器到底要内核做什么</a:t>
+              <a:t>进程调试的意义与内核能力需求</a:t>
             </a:r>
           </a:p>
         </p:txBody>
@@ -11349,7 +11748,7 @@
     <p:bg>
       <p:bgPr>
         <a:blipFill dpi="0" rotWithShape="1">
-          <a:blip r:embed="rId3"/>
+          <a:blip r:embed="rId2"/>
           <a:stretch>
             <a:fillRect/>
           </a:stretch>
@@ -11406,7 +11805,7 @@
         <p:spPr>
           <a:xfrm>
             <a:off x="1005840" y="1783080"/>
-            <a:ext cx="10241280" cy="3392424"/>
+            <a:ext cx="10241280" cy="2624328"/>
           </a:xfrm>
           <a:prstGeom prst="rect">
             <a:avLst/>
@@ -11430,26 +11829,10 @@
             <a:r>
               <a:rPr sz="1500" b="0">
                 <a:solidFill>
-                  <a:srgbClr val="A00016"/>
-                </a:solidFill>
-              </a:rPr>
-              <a:t>•  </a:t>
-            </a:r>
-            <a:r>
-              <a:rPr sz="1500" b="1">
-                <a:solidFill>
                   <a:srgbClr val="202020"/>
                 </a:solidFill>
               </a:rPr>
-              <a:t>Asterinas</a:t>
-            </a:r>
-            <a:r>
-              <a:rPr sz="1500" b="0">
-                <a:solidFill>
-                  <a:srgbClr val="202020"/>
-                </a:solidFill>
-              </a:rPr>
-              <a:t>：用 Rust 编写、与 Linux ABI 兼容的国产自主可控安全内核（北大 / 中关村实验室 / 蚂蚁集团联合发起）。</a:t>
+              <a:t>Asterinas 是由北京大学、中关村实验室、蚂蚁集团联合发起的一个用 Rust 编写、与 Linux ABI 兼容的国产自主可控安全操作系统内核，能直接运行 Linux 程序，并借助框内核架构提升内核可靠性。</a:t>
             </a:r>
           </a:p>
           <a:p>
@@ -11464,18 +11847,10 @@
             <a:r>
               <a:rPr sz="1500" b="0">
                 <a:solidFill>
-                  <a:srgbClr val="A00016"/>
-                </a:solidFill>
-              </a:rPr>
-              <a:t>•  </a:t>
-            </a:r>
-            <a:r>
-              <a:rPr sz="1500" b="0">
-                <a:solidFill>
                   <a:srgbClr val="202020"/>
                 </a:solidFill>
               </a:rPr>
-              <a:t>面向开发者的 OS 不仅要能跑程序，更要支撑开发闭环——</a:t>
+              <a:t>一个面向开发者的操作系统，不能只满足于把程序跑起来，还要支撑起程序开发的完整闭环，而</a:t>
             </a:r>
             <a:r>
               <a:rPr sz="1500" b="1">
@@ -11483,7 +11858,7 @@
                   <a:srgbClr val="202020"/>
                 </a:solidFill>
               </a:rPr>
-              <a:t>进程调试是其中最基础的一环</a:t>
+              <a:t>进程调试</a:t>
             </a:r>
             <a:r>
               <a:rPr sz="1500" b="0">
@@ -11491,7 +11866,23 @@
                   <a:srgbClr val="202020"/>
                 </a:solidFill>
               </a:rPr>
-              <a:t>。</a:t>
+              <a:t>正是其中最基础的一环。无论是排查应用逻辑的上层开发者，还是分析系统调用、内存与寄存器行为的底层开发者，都离不开用户态进程调试机制。同时，一个新内核要真正可用，关键在于能</a:t>
+            </a:r>
+            <a:r>
+              <a:rPr sz="1500" b="1">
+                <a:solidFill>
+                  <a:srgbClr val="202020"/>
+                </a:solidFill>
+              </a:rPr>
+              <a:t>直接复用现有的用户态生态</a:t>
+            </a:r>
+            <a:r>
+              <a:rPr sz="1500" b="0">
+                <a:solidFill>
+                  <a:srgbClr val="202020"/>
+                </a:solidFill>
+              </a:rPr>
+              <a:t>，而不是要求应用重写；而 Linux ABI 已是事实标准，唯有兼容它，才能直接复用海量现有调试工具链生态，如 GDB strace 等。</a:t>
             </a:r>
           </a:p>
           <a:p>
@@ -11506,18 +11897,10 @@
             <a:r>
               <a:rPr sz="1500" b="0">
                 <a:solidFill>
-                  <a:srgbClr val="A00016"/>
-                </a:solidFill>
-              </a:rPr>
-              <a:t>•  </a:t>
-            </a:r>
-            <a:r>
-              <a:rPr sz="1500" b="0">
-                <a:solidFill>
                   <a:srgbClr val="202020"/>
                 </a:solidFill>
               </a:rPr>
-              <a:t>要复用现有用户态生态，就必须</a:t>
+              <a:t>因此，在 Asterinas 上支持用户进程调试，本质上就是</a:t>
             </a:r>
             <a:r>
               <a:rPr sz="1500" b="1">
@@ -11525,7 +11908,7 @@
                   <a:srgbClr val="202020"/>
                 </a:solidFill>
               </a:rPr>
-              <a:t>兼容 Linux ABI（事实标准）</a:t>
+              <a:t>兼容 Linux 的 ptrace 接口与相关配套机制</a:t>
             </a:r>
             <a:r>
               <a:rPr sz="1500" b="0">
@@ -11533,65 +11916,7 @@
                   <a:srgbClr val="202020"/>
                 </a:solidFill>
               </a:rPr>
-              <a:t>，也就必须兼容它的 </a:t>
-            </a:r>
-            <a:r>
-              <a:rPr sz="1500" b="1">
-                <a:solidFill>
-                  <a:srgbClr val="202020"/>
-                </a:solidFill>
-              </a:rPr>
-              <a:t>ptrace 调试接口</a:t>
-            </a:r>
-            <a:r>
-              <a:rPr sz="1500" b="0">
-                <a:solidFill>
-                  <a:srgbClr val="202020"/>
-                </a:solidFill>
-              </a:rPr>
-              <a:t>。</a:t>
-            </a:r>
-          </a:p>
-          <a:p>
-            <a:pPr>
-              <a:lnSpc>
-                <a:spcPct val="112000"/>
-              </a:lnSpc>
-              <a:spcAft>
-                <a:spcPts val="700"/>
-              </a:spcAft>
-            </a:pPr>
-            <a:r>
-              <a:rPr sz="1500" b="0">
-                <a:solidFill>
-                  <a:srgbClr val="A00016"/>
-                </a:solidFill>
-              </a:rPr>
-              <a:t>•  </a:t>
-            </a:r>
-            <a:r>
-              <a:rPr sz="1500" b="0">
-                <a:solidFill>
-                  <a:srgbClr val="202020"/>
-                </a:solidFill>
-              </a:rPr>
-              <a:t>而 ptrace 不是单个系统调用，而是</a:t>
-            </a:r>
-            <a:r>
-              <a:rPr sz="1500" b="1">
-                <a:solidFill>
-                  <a:srgbClr val="202020"/>
-                </a:solidFill>
-              </a:rPr>
-              <a:t>贯穿进程、信号、wait、地址空间、寄存器、安全与 procfs 的完整通路</a:t>
-            </a:r>
-            <a:r>
-              <a:rPr sz="1500" b="0">
-                <a:solidFill>
-                  <a:srgbClr val="202020"/>
-                </a:solidFill>
-              </a:rPr>
-              <a:t>。</a:t>
+              <a:t>——而这不是单个系统调用，而是贯穿进程管理、信号、wait、地址空间、寄存器、安全与 procfs 的完整通路。</a:t>
             </a:r>
           </a:p>
         </p:txBody>
@@ -11674,8 +11999,8 @@
         </p:blipFill>
         <p:spPr>
           <a:xfrm>
-            <a:off x="2575257" y="1783080"/>
-            <a:ext cx="7102444" cy="2084831"/>
+            <a:off x="3419561" y="1783080"/>
+            <a:ext cx="5413837" cy="2084831"/>
           </a:xfrm>
           <a:prstGeom prst="rect">
             <a:avLst/>
@@ -11718,39 +12043,7 @@
                   <a:srgbClr val="202020"/>
                 </a:solidFill>
               </a:rPr>
-              <a:t>调试器对内核只有两类基本诉求：运行时</a:t>
-            </a:r>
-            <a:r>
-              <a:rPr sz="1500" b="1">
-                <a:solidFill>
-                  <a:srgbClr val="202020"/>
-                </a:solidFill>
-              </a:rPr>
-              <a:t>读写目标进程的私有状态</a:t>
-            </a:r>
-            <a:r>
-              <a:rPr sz="1500" b="0">
-                <a:solidFill>
-                  <a:srgbClr val="202020"/>
-                </a:solidFill>
-              </a:rPr>
-              <a:t>（寄存器、内存、控制流），以及调试间隙</a:t>
-            </a:r>
-            <a:r>
-              <a:rPr sz="1500" b="1">
-                <a:solidFill>
-                  <a:srgbClr val="202020"/>
-                </a:solidFill>
-              </a:rPr>
-              <a:t>让它停下、再恢复继续运行</a:t>
-            </a:r>
-            <a:r>
-              <a:rPr sz="1500" b="0">
-                <a:solidFill>
-                  <a:srgbClr val="202020"/>
-                </a:solidFill>
-              </a:rPr>
-              <a:t>。</a:t>
+              <a:t>调试器对内核的基本诉求</a:t>
             </a:r>
           </a:p>
           <a:p>
@@ -11765,10 +12058,88 @@
             <a:r>
               <a:rPr sz="1500" b="0">
                 <a:solidFill>
+                  <a:srgbClr val="A00016"/>
+                </a:solidFill>
+              </a:rPr>
+              <a:t>•  </a:t>
+            </a:r>
+            <a:r>
+              <a:rPr sz="1500" b="0">
+                <a:solidFill>
                   <a:srgbClr val="202020"/>
                 </a:solidFill>
               </a:rPr>
-              <a:t>以最常用的「断点」为例，一次命中并恢复，需要内核按下图配合约 8 步：</a:t>
+              <a:t>运行时暂停目标进程工作</a:t>
+            </a:r>
+          </a:p>
+          <a:p>
+            <a:pPr>
+              <a:lnSpc>
+                <a:spcPct val="112000"/>
+              </a:lnSpc>
+              <a:spcAft>
+                <a:spcPts val="700"/>
+              </a:spcAft>
+            </a:pPr>
+            <a:r>
+              <a:rPr sz="1500" b="0">
+                <a:solidFill>
+                  <a:srgbClr val="A00016"/>
+                </a:solidFill>
+              </a:rPr>
+              <a:t>•  </a:t>
+            </a:r>
+            <a:r>
+              <a:rPr sz="1500" b="0">
+                <a:solidFill>
+                  <a:srgbClr val="202020"/>
+                </a:solidFill>
+              </a:rPr>
+              <a:t>读写目标进程的私有状态（寄存器、内存、控制流 ...）</a:t>
+            </a:r>
+          </a:p>
+          <a:p>
+            <a:pPr>
+              <a:lnSpc>
+                <a:spcPct val="112000"/>
+              </a:lnSpc>
+              <a:spcAft>
+                <a:spcPts val="700"/>
+              </a:spcAft>
+            </a:pPr>
+            <a:r>
+              <a:rPr sz="1500" b="0">
+                <a:solidFill>
+                  <a:srgbClr val="A00016"/>
+                </a:solidFill>
+              </a:rPr>
+              <a:t>•  </a:t>
+            </a:r>
+            <a:r>
+              <a:rPr sz="1500" b="0">
+                <a:solidFill>
+                  <a:srgbClr val="202020"/>
+                </a:solidFill>
+              </a:rPr>
+              <a:t>调试结束后恢复目标进程正常运行</a:t>
+            </a:r>
+          </a:p>
+          <a:p>
+            <a:pPr>
+              <a:lnSpc>
+                <a:spcPct val="112000"/>
+              </a:lnSpc>
+              <a:spcAft>
+                <a:spcPts val="700"/>
+              </a:spcAft>
+            </a:pPr>
+            <a:r>
+              <a:rPr sz="1500" b="0">
+                <a:solidFill>
+                  <a:srgbClr val="202020"/>
+                </a:solidFill>
+              </a:rPr>
+              <a:t>以最常用的「GDB 软件断点」为例，一次命中并恢复，需要内核按下图配合约 8 步：</a:t>
             </a:r>
           </a:p>
           <a:p>
@@ -11882,7 +12253,7 @@
                   <a:srgbClr val="A00016"/>
                 </a:solidFill>
               </a:rPr>
-              <a:t>1.3 调试器要内核提供什么：调试能力通路</a:t>
+              <a:t>1.3 Linux 为调试器提供的抽象：调试能力通路</a:t>
             </a:r>
           </a:p>
         </p:txBody>
@@ -12521,6 +12892,526 @@
 <file path=ppt/slides/slide8.xml><?xml version="1.0" encoding="utf-8"?>
 <p:sld xmlns:a="http://schemas.openxmlformats.org/drawingml/2006/main" xmlns:p="http://schemas.openxmlformats.org/presentationml/2006/main" xmlns:r="http://schemas.openxmlformats.org/officeDocument/2006/relationships">
   <p:cSld>
+    <p:bg>
+      <p:bgPr>
+        <a:blipFill dpi="0" rotWithShape="1">
+          <a:blip r:embed="rId3"/>
+          <a:stretch>
+            <a:fillRect/>
+          </a:stretch>
+        </a:blipFill>
+        <a:effectLst/>
+      </p:bgPr>
+    </p:bg>
+    <p:spTree>
+      <p:nvGrpSpPr>
+        <p:cNvPr id="1" name=""/>
+        <p:cNvGrpSpPr/>
+        <p:nvPr/>
+      </p:nvGrpSpPr>
+      <p:grpSpPr/>
+      <p:sp>
+        <p:nvSpPr>
+          <p:cNvPr id="2" name="TextBox 1"/>
+          <p:cNvSpPr txBox="1"/>
+          <p:nvPr/>
+        </p:nvSpPr>
+        <p:spPr>
+          <a:xfrm>
+            <a:off x="1005840" y="932688"/>
+            <a:ext cx="10241280" cy="685800"/>
+          </a:xfrm>
+          <a:prstGeom prst="rect">
+            <a:avLst/>
+          </a:prstGeom>
+          <a:noFill/>
+        </p:spPr>
+        <p:txBody>
+          <a:bodyPr wrap="square" anchor="ctr" lIns="25400" rIns="25400" tIns="25400" bIns="25400">
+            <a:spAutoFit/>
+          </a:bodyPr>
+          <a:lstStyle/>
+          <a:p>
+            <a:r>
+              <a:rPr sz="2400" b="1">
+                <a:solidFill>
+                  <a:srgbClr val="A00016"/>
+                </a:solidFill>
+              </a:rPr>
+              <a:t>1.5 相关工作：其它 OS 的调试路线对比</a:t>
+            </a:r>
+          </a:p>
+        </p:txBody>
+      </p:sp>
+      <p:graphicFrame>
+        <p:nvGraphicFramePr>
+          <p:cNvPr id="3" name="Table 2"/>
+          <p:cNvGraphicFramePr>
+            <a:graphicFrameLocks noGrp="1"/>
+          </p:cNvGraphicFramePr>
+          <p:nvPr/>
+        </p:nvGraphicFramePr>
+        <p:xfrm>
+          <a:off x="1005840" y="1783080"/>
+          <a:ext cx="10241277" cy="3264408"/>
+        </p:xfrm>
+        <a:graphic>
+          <a:graphicData uri="http://schemas.openxmlformats.org/drawingml/2006/table">
+            <a:tbl>
+              <a:tblPr firstRow="1" bandRow="1">
+                <a:tableStyleId>{5C22544A-7EE6-4342-B048-85BDC9FD1C3A}</a:tableStyleId>
+              </a:tblPr>
+              <a:tblGrid>
+                <a:gridCol w="3413759"/>
+                <a:gridCol w="3413759"/>
+                <a:gridCol w="3413759"/>
+              </a:tblGrid>
+              <a:tr h="544068">
+                <a:tc>
+                  <a:txBody>
+                    <a:bodyPr/>
+                    <a:lstStyle/>
+                    <a:p>
+                      <a:r>
+                        <a:rPr sz="1250" b="1">
+                          <a:solidFill>
+                            <a:srgbClr val="FFFFFF"/>
+                          </a:solidFill>
+                        </a:rPr>
+                        <a:t>系统</a:t>
+                      </a:r>
+                    </a:p>
+                  </a:txBody>
+                  <a:tcPr marL="76200" marR="76200" marT="38100" marB="38100" anchor="ctr">
+                    <a:solidFill>
+                      <a:srgbClr val="A00016"/>
+                    </a:solidFill>
+                  </a:tcPr>
+                </a:tc>
+                <a:tc>
+                  <a:txBody>
+                    <a:bodyPr/>
+                    <a:lstStyle/>
+                    <a:p>
+                      <a:r>
+                        <a:rPr sz="1250" b="1">
+                          <a:solidFill>
+                            <a:srgbClr val="FFFFFF"/>
+                          </a:solidFill>
+                        </a:rPr>
+                        <a:t>内核调试接口</a:t>
+                      </a:r>
+                    </a:p>
+                  </a:txBody>
+                  <a:tcPr marL="76200" marR="76200" marT="38100" marB="38100" anchor="ctr">
+                    <a:solidFill>
+                      <a:srgbClr val="A00016"/>
+                    </a:solidFill>
+                  </a:tcPr>
+                </a:tc>
+                <a:tc>
+                  <a:txBody>
+                    <a:bodyPr/>
+                    <a:lstStyle/>
+                    <a:p>
+                      <a:r>
+                        <a:rPr sz="1250" b="1">
+                          <a:solidFill>
+                            <a:srgbClr val="FFFFFF"/>
+                          </a:solidFill>
+                        </a:rPr>
+                        <a:t>调试器如何接入</a:t>
+                      </a:r>
+                    </a:p>
+                  </a:txBody>
+                  <a:tcPr marL="76200" marR="76200" marT="38100" marB="38100" anchor="ctr">
+                    <a:solidFill>
+                      <a:srgbClr val="A00016"/>
+                    </a:solidFill>
+                  </a:tcPr>
+                </a:tc>
+              </a:tr>
+              <a:tr h="544068">
+                <a:tc>
+                  <a:txBody>
+                    <a:bodyPr/>
+                    <a:lstStyle/>
+                    <a:p>
+                      <a:r>
+                        <a:rPr sz="1250" b="0">
+                          <a:solidFill>
+                            <a:srgbClr val="202020"/>
+                          </a:solidFill>
+                        </a:rPr>
+                        <a:t>Redox OS</a:t>
+                      </a:r>
+                    </a:p>
+                  </a:txBody>
+                  <a:tcPr marL="76200" marR="76200" marT="38100" marB="38100" anchor="ctr">
+                    <a:solidFill>
+                      <a:srgbClr val="F6ECEE"/>
+                    </a:solidFill>
+                  </a:tcPr>
+                </a:tc>
+                <a:tc>
+                  <a:txBody>
+                    <a:bodyPr/>
+                    <a:lstStyle/>
+                    <a:p>
+                      <a:r>
+                        <a:rPr sz="1250" b="0">
+                          <a:solidFill>
+                            <a:srgbClr val="202020"/>
+                          </a:solidFill>
+                        </a:rPr>
+                        <a:t>proc scheme，非 ptrace</a:t>
+                      </a:r>
+                    </a:p>
+                  </a:txBody>
+                  <a:tcPr marL="76200" marR="76200" marT="38100" marB="38100" anchor="ctr">
+                    <a:solidFill>
+                      <a:srgbClr val="F6ECEE"/>
+                    </a:solidFill>
+                  </a:tcPr>
+                </a:tc>
+                <a:tc>
+                  <a:txBody>
+                    <a:bodyPr/>
+                    <a:lstStyle/>
+                    <a:p>
+                      <a:r>
+                        <a:rPr sz="1250" b="0">
+                          <a:solidFill>
+                            <a:srgbClr val="202020"/>
+                          </a:solidFill>
+                        </a:rPr>
+                        <a:t>自写 Rust gdbserver，GDB 走远程协议</a:t>
+                      </a:r>
+                    </a:p>
+                  </a:txBody>
+                  <a:tcPr marL="76200" marR="76200" marT="38100" marB="38100" anchor="ctr">
+                    <a:solidFill>
+                      <a:srgbClr val="F6ECEE"/>
+                    </a:solidFill>
+                  </a:tcPr>
+                </a:tc>
+              </a:tr>
+              <a:tr h="544068">
+                <a:tc>
+                  <a:txBody>
+                    <a:bodyPr/>
+                    <a:lstStyle/>
+                    <a:p>
+                      <a:r>
+                        <a:rPr sz="1250" b="0">
+                          <a:solidFill>
+                            <a:srgbClr val="202020"/>
+                          </a:solidFill>
+                        </a:rPr>
+                        <a:t>SerenityOS</a:t>
+                      </a:r>
+                    </a:p>
+                  </a:txBody>
+                  <a:tcPr marL="76200" marR="76200" marT="38100" marB="38100" anchor="ctr">
+                    <a:solidFill>
+                      <a:srgbClr val="FFFFFF"/>
+                    </a:solidFill>
+                  </a:tcPr>
+                </a:tc>
+                <a:tc>
+                  <a:txBody>
+                    <a:bodyPr/>
+                    <a:lstStyle/>
+                    <a:p>
+                      <a:r>
+                        <a:rPr sz="1250" b="0">
+                          <a:solidFill>
+                            <a:srgbClr val="202020"/>
+                          </a:solidFill>
+                        </a:rPr>
+                        <a:t>自有 ptrace，非 Linux ABI</a:t>
+                      </a:r>
+                    </a:p>
+                  </a:txBody>
+                  <a:tcPr marL="76200" marR="76200" marT="38100" marB="38100" anchor="ctr">
+                    <a:solidFill>
+                      <a:srgbClr val="FFFFFF"/>
+                    </a:solidFill>
+                  </a:tcPr>
+                </a:tc>
+                <a:tc>
+                  <a:txBody>
+                    <a:bodyPr/>
+                    <a:lstStyle/>
+                    <a:p>
+                      <a:r>
+                        <a:rPr sz="1250" b="0">
+                          <a:solidFill>
+                            <a:srgbClr val="202020"/>
+                          </a:solidFill>
+                        </a:rPr>
+                        <a:t>移植 GDB，新增 serenity target 后端</a:t>
+                      </a:r>
+                    </a:p>
+                  </a:txBody>
+                  <a:tcPr marL="76200" marR="76200" marT="38100" marB="38100" anchor="ctr">
+                    <a:solidFill>
+                      <a:srgbClr val="FFFFFF"/>
+                    </a:solidFill>
+                  </a:tcPr>
+                </a:tc>
+              </a:tr>
+              <a:tr h="544068">
+                <a:tc>
+                  <a:txBody>
+                    <a:bodyPr/>
+                    <a:lstStyle/>
+                    <a:p>
+                      <a:r>
+                        <a:rPr sz="1250" b="0">
+                          <a:solidFill>
+                            <a:srgbClr val="202020"/>
+                          </a:solidFill>
+                        </a:rPr>
+                        <a:t>Fuchsia / Zircon</a:t>
+                      </a:r>
+                    </a:p>
+                  </a:txBody>
+                  <a:tcPr marL="76200" marR="76200" marT="38100" marB="38100" anchor="ctr">
+                    <a:solidFill>
+                      <a:srgbClr val="F6ECEE"/>
+                    </a:solidFill>
+                  </a:tcPr>
+                </a:tc>
+                <a:tc>
+                  <a:txBody>
+                    <a:bodyPr/>
+                    <a:lstStyle/>
+                    <a:p>
+                      <a:r>
+                        <a:rPr sz="1250" b="0">
+                          <a:solidFill>
+                            <a:srgbClr val="202020"/>
+                          </a:solidFill>
+                        </a:rPr>
+                        <a:t>内核对象模型，无 ptrace</a:t>
+                      </a:r>
+                    </a:p>
+                  </a:txBody>
+                  <a:tcPr marL="76200" marR="76200" marT="38100" marB="38100" anchor="ctr">
+                    <a:solidFill>
+                      <a:srgbClr val="F6ECEE"/>
+                    </a:solidFill>
+                  </a:tcPr>
+                </a:tc>
+                <a:tc>
+                  <a:txBody>
+                    <a:bodyPr/>
+                    <a:lstStyle/>
+                    <a:p>
+                      <a:r>
+                        <a:rPr sz="1250" b="0">
+                          <a:solidFill>
+                            <a:srgbClr val="202020"/>
+                          </a:solidFill>
+                        </a:rPr>
+                        <a:t>zxdb 客户端连 debug_agent，仅远程调试</a:t>
+                      </a:r>
+                    </a:p>
+                  </a:txBody>
+                  <a:tcPr marL="76200" marR="76200" marT="38100" marB="38100" anchor="ctr">
+                    <a:solidFill>
+                      <a:srgbClr val="F6ECEE"/>
+                    </a:solidFill>
+                  </a:tcPr>
+                </a:tc>
+              </a:tr>
+              <a:tr h="544068">
+                <a:tc>
+                  <a:txBody>
+                    <a:bodyPr/>
+                    <a:lstStyle/>
+                    <a:p>
+                      <a:r>
+                        <a:rPr sz="1250" b="0">
+                          <a:solidFill>
+                            <a:srgbClr val="202020"/>
+                          </a:solidFill>
+                        </a:rPr>
+                        <a:t>Haiku</a:t>
+                      </a:r>
+                    </a:p>
+                  </a:txBody>
+                  <a:tcPr marL="76200" marR="76200" marT="38100" marB="38100" anchor="ctr">
+                    <a:solidFill>
+                      <a:srgbClr val="FFFFFF"/>
+                    </a:solidFill>
+                  </a:tcPr>
+                </a:tc>
+                <a:tc>
+                  <a:txBody>
+                    <a:bodyPr/>
+                    <a:lstStyle/>
+                    <a:p>
+                      <a:r>
+                        <a:rPr sz="1250" b="0">
+                          <a:solidFill>
+                            <a:srgbClr val="202020"/>
+                          </a:solidFill>
+                        </a:rPr>
+                        <a:t>端口式调试 API，非 ptrace</a:t>
+                      </a:r>
+                    </a:p>
+                  </a:txBody>
+                  <a:tcPr marL="76200" marR="76200" marT="38100" marB="38100" anchor="ctr">
+                    <a:solidFill>
+                      <a:srgbClr val="FFFFFF"/>
+                    </a:solidFill>
+                  </a:tcPr>
+                </a:tc>
+                <a:tc>
+                  <a:txBody>
+                    <a:bodyPr/>
+                    <a:lstStyle/>
+                    <a:p>
+                      <a:r>
+                        <a:rPr sz="1250" b="0">
+                          <a:solidFill>
+                            <a:srgbClr val="202020"/>
+                          </a:solidFill>
+                        </a:rPr>
+                        <a:t>移植 GDB，翻译到 Haiku 调试端口</a:t>
+                      </a:r>
+                    </a:p>
+                  </a:txBody>
+                  <a:tcPr marL="76200" marR="76200" marT="38100" marB="38100" anchor="ctr">
+                    <a:solidFill>
+                      <a:srgbClr val="FFFFFF"/>
+                    </a:solidFill>
+                  </a:tcPr>
+                </a:tc>
+              </a:tr>
+              <a:tr h="544068">
+                <a:tc>
+                  <a:txBody>
+                    <a:bodyPr/>
+                    <a:lstStyle/>
+                    <a:p>
+                      <a:r>
+                        <a:rPr sz="1250" b="1">
+                          <a:solidFill>
+                            <a:srgbClr val="202020"/>
+                          </a:solidFill>
+                        </a:rPr>
+                        <a:t>Asterinas（本项目）</a:t>
+                      </a:r>
+                    </a:p>
+                  </a:txBody>
+                  <a:tcPr marL="76200" marR="76200" marT="38100" marB="38100" anchor="ctr">
+                    <a:solidFill>
+                      <a:srgbClr val="F6ECEE"/>
+                    </a:solidFill>
+                  </a:tcPr>
+                </a:tc>
+                <a:tc>
+                  <a:txBody>
+                    <a:bodyPr/>
+                    <a:lstStyle/>
+                    <a:p>
+                      <a:r>
+                        <a:rPr sz="1250" b="1">
+                          <a:solidFill>
+                            <a:srgbClr val="202020"/>
+                          </a:solidFill>
+                        </a:rPr>
+                        <a:t>内核原生 Linux ptrace ABI</a:t>
+                      </a:r>
+                    </a:p>
+                  </a:txBody>
+                  <a:tcPr marL="76200" marR="76200" marT="38100" marB="38100" anchor="ctr">
+                    <a:solidFill>
+                      <a:srgbClr val="F6ECEE"/>
+                    </a:solidFill>
+                  </a:tcPr>
+                </a:tc>
+                <a:tc>
+                  <a:txBody>
+                    <a:bodyPr/>
+                    <a:lstStyle/>
+                    <a:p>
+                      <a:r>
+                        <a:rPr sz="1250" b="1">
+                          <a:solidFill>
+                            <a:srgbClr val="202020"/>
+                          </a:solidFill>
+                        </a:rPr>
+                        <a:t>未经修改的上游 GDB / strace 直接运行</a:t>
+                      </a:r>
+                    </a:p>
+                  </a:txBody>
+                  <a:tcPr marL="76200" marR="76200" marT="38100" marB="38100" anchor="ctr">
+                    <a:solidFill>
+                      <a:srgbClr val="F6ECEE"/>
+                    </a:solidFill>
+                  </a:tcPr>
+                </a:tc>
+              </a:tr>
+            </a:tbl>
+          </a:graphicData>
+        </a:graphic>
+      </p:graphicFrame>
+      <p:sp>
+        <p:nvSpPr>
+          <p:cNvPr id="4" name="TextBox 3"/>
+          <p:cNvSpPr txBox="1"/>
+          <p:nvPr/>
+        </p:nvSpPr>
+        <p:spPr>
+          <a:xfrm>
+            <a:off x="1005840" y="5157216"/>
+            <a:ext cx="10241280" cy="1088136"/>
+          </a:xfrm>
+          <a:prstGeom prst="rect">
+            <a:avLst/>
+          </a:prstGeom>
+          <a:noFill/>
+        </p:spPr>
+        <p:txBody>
+          <a:bodyPr wrap="square" anchor="t" lIns="25400" rIns="25400" tIns="25400" bIns="25400">
+            <a:spAutoFit/>
+          </a:bodyPr>
+          <a:lstStyle/>
+          <a:p>
+            <a:pPr>
+              <a:lnSpc>
+                <a:spcPct val="112000"/>
+              </a:lnSpc>
+              <a:spcAft>
+                <a:spcPts val="700"/>
+              </a:spcAft>
+            </a:pPr>
+            <a:r>
+              <a:rPr sz="1250" b="0">
+                <a:solidFill>
+                  <a:srgbClr val="606060"/>
+                </a:solidFill>
+              </a:rPr>
+              <a:t>多数方案要么自定义协议、配自写或移植的 gdbserver / agent，要么为私有接口改造 GDB；在内核里原生实现 Linux ptrace、让未改的 GDB / strace 直接跑通的是少数——这正是本项目的技术取舍。</a:t>
+            </a:r>
+          </a:p>
+        </p:txBody>
+      </p:sp>
+    </p:spTree>
+  </p:cSld>
+  <p:clrMapOvr>
+    <a:masterClrMapping/>
+  </p:clrMapOvr>
+</p:sld>
+</file>
+
+<file path=ppt/slides/slide9.xml><?xml version="1.0" encoding="utf-8"?>
+<p:sld xmlns:a="http://schemas.openxmlformats.org/drawingml/2006/main" xmlns:p="http://schemas.openxmlformats.org/presentationml/2006/main" xmlns:r="http://schemas.openxmlformats.org/officeDocument/2006/relationships">
+  <p:cSld>
     <p:spTree>
       <p:nvGrpSpPr>
         <p:cNvPr id="1" name=""/>
@@ -12635,389 +13526,6 @@
           <a:lstStyle/>
           <a:p>
             <a:pPr algn="ctr"/>
-          </a:p>
-        </p:txBody>
-      </p:sp>
-    </p:spTree>
-  </p:cSld>
-  <p:clrMapOvr>
-    <a:masterClrMapping/>
-  </p:clrMapOvr>
-</p:sld>
-</file>
-
-<file path=ppt/slides/slide9.xml><?xml version="1.0" encoding="utf-8"?>
-<p:sld xmlns:a="http://schemas.openxmlformats.org/drawingml/2006/main" xmlns:p="http://schemas.openxmlformats.org/presentationml/2006/main" xmlns:r="http://schemas.openxmlformats.org/officeDocument/2006/relationships">
-  <p:cSld>
-    <p:bg>
-      <p:bgPr>
-        <a:blipFill dpi="0" rotWithShape="1">
-          <a:blip r:embed="rId2"/>
-          <a:stretch>
-            <a:fillRect/>
-          </a:stretch>
-        </a:blipFill>
-        <a:effectLst/>
-      </p:bgPr>
-    </p:bg>
-    <p:spTree>
-      <p:nvGrpSpPr>
-        <p:cNvPr id="1" name=""/>
-        <p:cNvGrpSpPr/>
-        <p:nvPr/>
-      </p:nvGrpSpPr>
-      <p:grpSpPr/>
-      <p:sp>
-        <p:nvSpPr>
-          <p:cNvPr id="2" name="TextBox 1"/>
-          <p:cNvSpPr txBox="1"/>
-          <p:nvPr/>
-        </p:nvSpPr>
-        <p:spPr>
-          <a:xfrm>
-            <a:off x="1005840" y="932688"/>
-            <a:ext cx="10241280" cy="685800"/>
-          </a:xfrm>
-          <a:prstGeom prst="rect">
-            <a:avLst/>
-          </a:prstGeom>
-          <a:noFill/>
-        </p:spPr>
-        <p:txBody>
-          <a:bodyPr wrap="square" anchor="ctr" lIns="25400" rIns="25400" tIns="25400" bIns="25400">
-            <a:spAutoFit/>
-          </a:bodyPr>
-          <a:lstStyle/>
-          <a:p>
-            <a:r>
-              <a:rPr sz="2400" b="1">
-                <a:solidFill>
-                  <a:srgbClr val="A00016"/>
-                </a:solidFill>
-              </a:rPr>
-              <a:t>2.1 要解决什么问题：相同接口，内部更优的实现</a:t>
-            </a:r>
-          </a:p>
-        </p:txBody>
-      </p:sp>
-      <p:sp>
-        <p:nvSpPr>
-          <p:cNvPr id="3" name="TextBox 2"/>
-          <p:cNvSpPr txBox="1"/>
-          <p:nvPr/>
-        </p:nvSpPr>
-        <p:spPr>
-          <a:xfrm>
-            <a:off x="1005840" y="1783080"/>
-            <a:ext cx="10241280" cy="4480559"/>
-          </a:xfrm>
-          <a:prstGeom prst="rect">
-            <a:avLst/>
-          </a:prstGeom>
-          <a:noFill/>
-        </p:spPr>
-        <p:txBody>
-          <a:bodyPr wrap="square" anchor="t" lIns="25400" rIns="25400" tIns="25400" bIns="25400">
-            <a:spAutoFit/>
-          </a:bodyPr>
-          <a:lstStyle/>
-          <a:p>
-            <a:pPr>
-              <a:lnSpc>
-                <a:spcPct val="112000"/>
-              </a:lnSpc>
-              <a:spcAft>
-                <a:spcPts val="700"/>
-              </a:spcAft>
-            </a:pPr>
-            <a:r>
-              <a:rPr sz="1500" b="0">
-                <a:solidFill>
-                  <a:srgbClr val="202020"/>
-                </a:solidFill>
-              </a:rPr>
-              <a:t>对外语义与 ABI 必须对齐 Linux，工作落在内部结构与实现质量。借助框内核 + 安全 Rust 这个载体，几处关键机制做得与 Linux 不同：</a:t>
-            </a:r>
-          </a:p>
-          <a:p>
-            <a:pPr>
-              <a:lnSpc>
-                <a:spcPct val="112000"/>
-              </a:lnSpc>
-              <a:spcAft>
-                <a:spcPts val="700"/>
-              </a:spcAft>
-            </a:pPr>
-            <a:r>
-              <a:rPr sz="1500" b="0">
-                <a:solidFill>
-                  <a:srgbClr val="A00016"/>
-                </a:solidFill>
-              </a:rPr>
-              <a:t>•  </a:t>
-            </a:r>
-            <a:r>
-              <a:rPr sz="1500" b="1">
-                <a:solidFill>
-                  <a:srgbClr val="202020"/>
-                </a:solidFill>
-              </a:rPr>
-              <a:t>跟踪关系是旁路 map，不动进程树</a:t>
-            </a:r>
-            <a:r>
-              <a:rPr sz="1500" b="0">
-                <a:solidFill>
-                  <a:srgbClr val="202020"/>
-                </a:solidFill>
-              </a:rPr>
-              <a:t>：Linux 把 tracee reparent 进全局进程树，attach / detach / exit 须全程持有全局写锁 </a:t>
-            </a:r>
-            <a:r>
-              <a:rPr sz="1500" b="0">
-                <a:solidFill>
-                  <a:srgbClr val="A00016"/>
-                </a:solidFill>
-                <a:latin typeface="Menlo"/>
-                <a:cs typeface="Menlo"/>
-              </a:rPr>
-              <a:t>tasklist_lock</a:t>
-            </a:r>
-            <a:r>
-              <a:rPr sz="1500" b="0">
-                <a:solidFill>
-                  <a:srgbClr val="202020"/>
-                </a:solidFill>
-              </a:rPr>
-              <a:t>；本项目用一张旁路 </a:t>
-            </a:r>
-            <a:r>
-              <a:rPr sz="1500" b="0">
-                <a:solidFill>
-                  <a:srgbClr val="A00016"/>
-                </a:solidFill>
-                <a:latin typeface="Menlo"/>
-                <a:cs typeface="Menlo"/>
-              </a:rPr>
-              <a:t>tracees</a:t>
-            </a:r>
-            <a:r>
-              <a:rPr sz="1500" b="0">
-                <a:solidFill>
-                  <a:srgbClr val="202020"/>
-                </a:solidFill>
-              </a:rPr>
-              <a:t> map，关系变更只落在两把文档化锁序的 per-object 锁上。</a:t>
-            </a:r>
-          </a:p>
-          <a:p>
-            <a:pPr>
-              <a:lnSpc>
-                <a:spcPct val="112000"/>
-              </a:lnSpc>
-              <a:spcAft>
-                <a:spcPts val="700"/>
-              </a:spcAft>
-            </a:pPr>
-            <a:r>
-              <a:rPr sz="1500" b="0">
-                <a:solidFill>
-                  <a:srgbClr val="A00016"/>
-                </a:solidFill>
-              </a:rPr>
-              <a:t>•  </a:t>
-            </a:r>
-            <a:r>
-              <a:rPr sz="1500" b="1">
-                <a:solidFill>
-                  <a:srgbClr val="202020"/>
-                </a:solidFill>
-              </a:rPr>
-              <a:t>寄存器快照，而非原地编辑内核栈</a:t>
-            </a:r>
-            <a:r>
-              <a:rPr sz="1500" b="0">
-                <a:solidFill>
-                  <a:srgbClr val="202020"/>
-                </a:solidFill>
-              </a:rPr>
-              <a:t>：Linux 直接读写 tracee 内核栈上的 </a:t>
-            </a:r>
-            <a:r>
-              <a:rPr sz="1500" b="0">
-                <a:solidFill>
-                  <a:srgbClr val="A00016"/>
-                </a:solidFill>
-                <a:latin typeface="Menlo"/>
-                <a:cs typeface="Menlo"/>
-              </a:rPr>
-              <a:t>pt_regs</a:t>
-            </a:r>
-            <a:r>
-              <a:rPr sz="1500" b="0">
-                <a:solidFill>
-                  <a:srgbClr val="202020"/>
-                </a:solidFill>
-              </a:rPr>
-              <a:t>，须先用 </a:t>
-            </a:r>
-            <a:r>
-              <a:rPr sz="1500" b="0">
-                <a:solidFill>
-                  <a:srgbClr val="A00016"/>
-                </a:solidFill>
-                <a:latin typeface="Menlo"/>
-                <a:cs typeface="Menlo"/>
-              </a:rPr>
-              <a:t>wait_task_inactive</a:t>
-            </a:r>
-            <a:r>
-              <a:rPr sz="1500" b="0">
-                <a:solidFill>
-                  <a:srgbClr val="202020"/>
-                </a:solidFill>
-              </a:rPr>
-              <a:t> 等它下 CPU；本项目进入 stop 时把现场快照进持锁的连续 </a:t>
-            </a:r>
-            <a:r>
-              <a:rPr sz="1500" b="0">
-                <a:solidFill>
-                  <a:srgbClr val="A00016"/>
-                </a:solidFill>
-                <a:latin typeface="Menlo"/>
-                <a:cs typeface="Menlo"/>
-              </a:rPr>
-              <a:t>CUserRegsStruct</a:t>
-            </a:r>
-            <a:r>
-              <a:rPr sz="1500" b="0">
-                <a:solidFill>
-                  <a:srgbClr val="202020"/>
-                </a:solidFill>
-              </a:rPr>
-              <a:t>，一致性由锁保证、与是否在 CPU 上无关。</a:t>
-            </a:r>
-          </a:p>
-          <a:p>
-            <a:pPr>
-              <a:lnSpc>
-                <a:spcPct val="112000"/>
-              </a:lnSpc>
-              <a:spcAft>
-                <a:spcPts val="700"/>
-              </a:spcAft>
-            </a:pPr>
-            <a:r>
-              <a:rPr sz="1500" b="0">
-                <a:solidFill>
-                  <a:srgbClr val="A00016"/>
-                </a:solidFill>
-              </a:rPr>
-              <a:t>•  </a:t>
-            </a:r>
-            <a:r>
-              <a:rPr sz="1500" b="1">
-                <a:solidFill>
-                  <a:srgbClr val="202020"/>
-                </a:solidFill>
-              </a:rPr>
-              <a:t>全安全 Rust 的调试通路</a:t>
-            </a:r>
-            <a:r>
-              <a:rPr sz="1500" b="0">
-                <a:solidFill>
-                  <a:srgbClr val="202020"/>
-                </a:solidFill>
-              </a:rPr>
-              <a:t>：改寄存器、写别人内存、改控制流这三件内核里最易出内存安全漏洞的事，全程零 </a:t>
-            </a:r>
-            <a:r>
-              <a:rPr sz="1500" b="0">
-                <a:solidFill>
-                  <a:srgbClr val="A00016"/>
-                </a:solidFill>
-                <a:latin typeface="Menlo"/>
-                <a:cs typeface="Menlo"/>
-              </a:rPr>
-              <a:t>unsafe</a:t>
-            </a:r>
-            <a:r>
-              <a:rPr sz="1500" b="0">
-                <a:solidFill>
-                  <a:srgbClr val="202020"/>
-                </a:solidFill>
-              </a:rPr>
-              <a:t>，危险性由所有权与类型系统在编译期约束。</a:t>
-            </a:r>
-          </a:p>
-          <a:p>
-            <a:pPr>
-              <a:lnSpc>
-                <a:spcPct val="112000"/>
-              </a:lnSpc>
-              <a:spcAft>
-                <a:spcPts val="700"/>
-              </a:spcAft>
-            </a:pPr>
-            <a:r>
-              <a:rPr sz="1500" b="0">
-                <a:solidFill>
-                  <a:srgbClr val="A00016"/>
-                </a:solidFill>
-              </a:rPr>
-              <a:t>•  </a:t>
-            </a:r>
-            <a:r>
-              <a:rPr sz="1500" b="1">
-                <a:solidFill>
-                  <a:srgbClr val="202020"/>
-                </a:solidFill>
-              </a:rPr>
-              <a:t>字段策略收敛成单表</a:t>
-            </a:r>
-            <a:r>
-              <a:rPr sz="1500" b="0">
-                <a:solidFill>
-                  <a:srgbClr val="202020"/>
-                </a:solidFill>
-              </a:rPr>
-              <a:t>：x86 寄存器的字段级特殊处理用一张 </a:t>
-            </a:r>
-            <a:r>
-              <a:rPr sz="1500" b="0">
-                <a:solidFill>
-                  <a:srgbClr val="A00016"/>
-                </a:solidFill>
-                <a:latin typeface="Menlo"/>
-                <a:cs typeface="Menlo"/>
-              </a:rPr>
-              <a:t>REG_RULES</a:t>
-            </a:r>
-            <a:r>
-              <a:rPr sz="1500" b="0">
-                <a:solidFill>
-                  <a:srgbClr val="202020"/>
-                </a:solidFill>
-              </a:rPr>
-              <a:t> 表声明一次、四条访问路径共查，替代 Linux 在读写两侧重列多遍的历史写法。</a:t>
-            </a:r>
-          </a:p>
-          <a:p>
-            <a:pPr>
-              <a:lnSpc>
-                <a:spcPct val="112000"/>
-              </a:lnSpc>
-              <a:spcAft>
-                <a:spcPts val="700"/>
-              </a:spcAft>
-            </a:pPr>
-            <a:r>
-              <a:rPr sz="1250" b="0">
-                <a:solidFill>
-                  <a:srgbClr val="606060"/>
-                </a:solidFill>
-              </a:rPr>
-              <a:t>这几条不是「重新发明」，而是把同一套 ptrace 语义，重建到一个更安全、更分层的载体上。</a:t>
-            </a:r>
           </a:p>
         </p:txBody>
       </p:sp>

--- a/research_practice/答辩-科研实践.pptx
+++ b/research_practice/答辩-科研实践.pptx
@@ -556,6 +556,366 @@
           <a:p>
             <a:r>
               <a:t>Q&amp;A 防线（gVisor）：若被问到 gVisor，它确实也在内部实现了 Linux ptrace（Sentry 的 pkg/sentry/kernel/ptrace.go），属同一路线；但 gVisor 是跑在宿主 Linux 之上的用户态沙箱运行时（Go），且只实现了跑容器够用的 ptrace 子集（历史上 gdb 与 strace 不能同跟一个进程）。因此稳妥表述是：在从零做的通用 OS 中，原生实现 Linux ptrace、直接复用未改 GDB/strace 的，Asterinas 是其中唯一一个。</a:t>
+            </a:r>
+          </a:p>
+        </p:txBody>
+      </p:sp>
+      <p:sp>
+        <p:nvSpPr>
+          <p:cNvPr id="4" name="Slide Number Placeholder 3"/>
+          <p:cNvSpPr>
+            <a:spLocks noGrp="1"/>
+          </p:cNvSpPr>
+          <p:nvPr>
+            <p:ph type="sldNum" idx="5" sz="quarter"/>
+          </p:nvPr>
+        </p:nvSpPr>
+        <p:spPr/>
+      </p:sp>
+    </p:spTree>
+  </p:cSld>
+  <p:clrMapOvr>
+    <a:masterClrMapping/>
+  </p:clrMapOvr>
+</p:notes>
+</file>
+
+<file path=ppt/notesSlides/notesSlide2.xml><?xml version="1.0" encoding="utf-8"?>
+<p:notes xmlns:a="http://schemas.openxmlformats.org/drawingml/2006/main" xmlns:p="http://schemas.openxmlformats.org/presentationml/2006/main" xmlns:r="http://schemas.openxmlformats.org/officeDocument/2006/relationships">
+  <p:cSld>
+    <p:spTree>
+      <p:nvGrpSpPr>
+        <p:cNvPr id="1" name=""/>
+        <p:cNvGrpSpPr/>
+        <p:nvPr/>
+      </p:nvGrpSpPr>
+      <p:grpSpPr>
+        <a:xfrm>
+          <a:off x="0" y="0"/>
+          <a:ext cx="0" cy="0"/>
+          <a:chOff x="0" y="0"/>
+          <a:chExt cx="0" cy="0"/>
+        </a:xfrm>
+      </p:grpSpPr>
+      <p:sp>
+        <p:nvSpPr>
+          <p:cNvPr id="2" name="Slide Image Placeholder 1"/>
+          <p:cNvSpPr>
+            <a:spLocks noGrp="1"/>
+          </p:cNvSpPr>
+          <p:nvPr>
+            <p:ph type="sldImg" idx="2"/>
+          </p:nvPr>
+        </p:nvSpPr>
+        <p:spPr/>
+      </p:sp>
+      <p:sp>
+        <p:nvSpPr>
+          <p:cNvPr id="3" name="Notes Placeholder 2"/>
+          <p:cNvSpPr>
+            <a:spLocks noGrp="1"/>
+          </p:cNvSpPr>
+          <p:nvPr>
+            <p:ph type="body" idx="3" sz="quarter"/>
+          </p:nvPr>
+        </p:nvSpPr>
+        <p:spPr/>
+        <p:txBody>
+          <a:bodyPr/>
+          <a:lstStyle/>
+          <a:p>
+            <a:r>
+              <a:t>解耦与无大锁——ptrace-stop 的停止与恢复仅依赖一个原子标志与等待者，不依赖目标线程是否离开 CPU；跟踪关系为旁路 map、不修改进程树，故不需要 Linux 的全局 tasklist_lock。</a:t>
+            </a:r>
+          </a:p>
+          <a:p>
+            <a:r>
+              <a:t>寄存器快照与内存安全——进入停止时将寄存器现场快照为一份连续副本，在副本上读写、resume 时回写。Linux 原地修改内核栈 pt_regs 的写法可一比一翻译为 unsafe Rust，但以安全 Rust 表达需要更优的设计，将内存安全交由所有权与类型系统在编译期保证。</a:t>
+            </a:r>
+          </a:p>
+          <a:p>
+            <a:r>
+              <a:t>历史包袱与可维护性——将 Linux 中分散重复、复用字段的处理收敛为单一显式表示：寄存器字段策略以一张表声明一次，ptrace-stop 信号的生命周期以一个四态机显式建模。</a:t>
+            </a:r>
+          </a:p>
+        </p:txBody>
+      </p:sp>
+      <p:sp>
+        <p:nvSpPr>
+          <p:cNvPr id="4" name="Slide Number Placeholder 3"/>
+          <p:cNvSpPr>
+            <a:spLocks noGrp="1"/>
+          </p:cNvSpPr>
+          <p:nvPr>
+            <p:ph type="sldNum" idx="5" sz="quarter"/>
+          </p:nvPr>
+        </p:nvSpPr>
+        <p:spPr/>
+      </p:sp>
+    </p:spTree>
+  </p:cSld>
+  <p:clrMapOvr>
+    <a:masterClrMapping/>
+  </p:clrMapOvr>
+</p:notes>
+</file>
+
+<file path=ppt/notesSlides/notesSlide3.xml><?xml version="1.0" encoding="utf-8"?>
+<p:notes xmlns:a="http://schemas.openxmlformats.org/drawingml/2006/main" xmlns:p="http://schemas.openxmlformats.org/presentationml/2006/main" xmlns:r="http://schemas.openxmlformats.org/officeDocument/2006/relationships">
+  <p:cSld>
+    <p:spTree>
+      <p:nvGrpSpPr>
+        <p:cNvPr id="1" name=""/>
+        <p:cNvGrpSpPr/>
+        <p:nvPr/>
+      </p:nvGrpSpPr>
+      <p:grpSpPr>
+        <a:xfrm>
+          <a:off x="0" y="0"/>
+          <a:ext cx="0" cy="0"/>
+          <a:chOff x="0" y="0"/>
+          <a:chExt cx="0" cy="0"/>
+        </a:xfrm>
+      </p:grpSpPr>
+      <p:sp>
+        <p:nvSpPr>
+          <p:cNvPr id="2" name="Slide Image Placeholder 1"/>
+          <p:cNvSpPr>
+            <a:spLocks noGrp="1"/>
+          </p:cNvSpPr>
+          <p:nvPr>
+            <p:ph type="sldImg" idx="2"/>
+          </p:nvPr>
+        </p:nvSpPr>
+        <p:spPr/>
+      </p:sp>
+      <p:sp>
+        <p:nvSpPr>
+          <p:cNvPr id="3" name="Notes Placeholder 2"/>
+          <p:cNvSpPr>
+            <a:spLocks noGrp="1"/>
+          </p:cNvSpPr>
+          <p:nvPr>
+            <p:ph type="body" idx="3" sz="quarter"/>
+          </p:nvPr>
+        </p:nvSpPr>
+        <p:spPr/>
+        <p:txBody>
+          <a:bodyPr/>
+          <a:lstStyle/>
+          <a:p>
+            <a:r>
+              <a:t>Linux 收敛——`ptrace_event`/`ptrace_report_syscall` → `ptrace_notify` → `ptrace_do_notify` → `ptrace_stop`，信号停经 `ptrace_signal` 直接进 `ptrace_stop`。kernel/signal.c `ptrace_stop`：`set_special_state(TASK_TRACED)`、`current-&gt;last_siginfo=info`/`exit_code=exit_code`、随后 `schedule()`；注释明言 ptracer 在 `wait_task_inactive(,__TASK_TRACED)` 等本任务进入 schedule()；resume 经 `wake_up_state(__TASK_TRACED)` 并清 `JOBCTL_TRACED`（kernel/ptrace.c）。`ptrace_check_attach` 调 `wait_task_inactive(child, __TASK_TRACED|TASK_FROZEN)`。Asterinas：ptrace/mod.rs `do_ptrace_stop` → `Waiter::pause_until_by(|| !is_ptrace_stopped())`，`resume()` 翻转 `is_stopped` 并唤醒。三类停止的收敛 Linux 亦如此，不构成本项目相对 Linux 的优势；差异在于与调度解耦。</a:t>
+            </a:r>
+          </a:p>
+        </p:txBody>
+      </p:sp>
+      <p:sp>
+        <p:nvSpPr>
+          <p:cNvPr id="4" name="Slide Number Placeholder 3"/>
+          <p:cNvSpPr>
+            <a:spLocks noGrp="1"/>
+          </p:cNvSpPr>
+          <p:nvPr>
+            <p:ph type="sldNum" idx="5" sz="quarter"/>
+          </p:nvPr>
+        </p:nvSpPr>
+        <p:spPr/>
+      </p:sp>
+    </p:spTree>
+  </p:cSld>
+  <p:clrMapOvr>
+    <a:masterClrMapping/>
+  </p:clrMapOvr>
+</p:notes>
+</file>
+
+<file path=ppt/notesSlides/notesSlide4.xml><?xml version="1.0" encoding="utf-8"?>
+<p:notes xmlns:a="http://schemas.openxmlformats.org/drawingml/2006/main" xmlns:p="http://schemas.openxmlformats.org/presentationml/2006/main" xmlns:r="http://schemas.openxmlformats.org/officeDocument/2006/relationships">
+  <p:cSld>
+    <p:spTree>
+      <p:nvGrpSpPr>
+        <p:cNvPr id="1" name=""/>
+        <p:cNvGrpSpPr/>
+        <p:nvPr/>
+      </p:nvGrpSpPr>
+      <p:grpSpPr>
+        <a:xfrm>
+          <a:off x="0" y="0"/>
+          <a:ext cx="0" cy="0"/>
+          <a:chOff x="0" y="0"/>
+          <a:chExt cx="0" cy="0"/>
+        </a:xfrm>
+      </p:grpSpPr>
+      <p:sp>
+        <p:nvSpPr>
+          <p:cNvPr id="2" name="Slide Image Placeholder 1"/>
+          <p:cNvSpPr>
+            <a:spLocks noGrp="1"/>
+          </p:cNvSpPr>
+          <p:nvPr>
+            <p:ph type="sldImg" idx="2"/>
+          </p:nvPr>
+        </p:nvSpPr>
+        <p:spPr/>
+      </p:sp>
+      <p:sp>
+        <p:nvSpPr>
+          <p:cNvPr id="3" name="Notes Placeholder 2"/>
+          <p:cNvSpPr>
+            <a:spLocks noGrp="1"/>
+          </p:cNvSpPr>
+          <p:nvPr>
+            <p:ph type="body" idx="3" sz="quarter"/>
+          </p:nvPr>
+        </p:nvSpPr>
+        <p:spPr/>
+        <p:txBody>
+          <a:bodyPr/>
+          <a:lstStyle/>
+          <a:p>
+            <a:r>
+              <a:t>Linux kernel/ptrace.c——`__ptrace_link` 改 `child-&gt;parent=new_parent`；`ptrace_traceme`/`ptrace_attach`/`ptrace_detach` 各持 `write_lock_irq(&amp;tasklist_lock)`；kernel/exit.c `exit_ptrace` 路径同样持全局写锁；`ptrace_check_attach` 持 `read_lock(&amp;tasklist_lock)`。Asterinas：ptrace/mod.rs `attach_to`（tracees BTreeMap，锁序 tracer.tracees → tracee.tracee_status）、wait.rs `try_wait_tracees` 遍历 tracees() 旁路 map。边界说明：按 tid 查询全局 PID_TABLE 仍需一次瞬时加锁，但不跨 attach 操作持有；当前主要支持 TRACEME。</a:t>
+            </a:r>
+          </a:p>
+        </p:txBody>
+      </p:sp>
+      <p:sp>
+        <p:nvSpPr>
+          <p:cNvPr id="4" name="Slide Number Placeholder 3"/>
+          <p:cNvSpPr>
+            <a:spLocks noGrp="1"/>
+          </p:cNvSpPr>
+          <p:nvPr>
+            <p:ph type="sldNum" idx="5" sz="quarter"/>
+          </p:nvPr>
+        </p:nvSpPr>
+        <p:spPr/>
+      </p:sp>
+    </p:spTree>
+  </p:cSld>
+  <p:clrMapOvr>
+    <a:masterClrMapping/>
+  </p:clrMapOvr>
+</p:notes>
+</file>
+
+<file path=ppt/notesSlides/notesSlide5.xml><?xml version="1.0" encoding="utf-8"?>
+<p:notes xmlns:a="http://schemas.openxmlformats.org/drawingml/2006/main" xmlns:p="http://schemas.openxmlformats.org/presentationml/2006/main" xmlns:r="http://schemas.openxmlformats.org/officeDocument/2006/relationships">
+  <p:cSld>
+    <p:spTree>
+      <p:nvGrpSpPr>
+        <p:cNvPr id="1" name=""/>
+        <p:cNvGrpSpPr/>
+        <p:nvPr/>
+      </p:nvGrpSpPr>
+      <p:grpSpPr>
+        <a:xfrm>
+          <a:off x="0" y="0"/>
+          <a:ext cx="0" cy="0"/>
+          <a:chOff x="0" y="0"/>
+          <a:chExt cx="0" cy="0"/>
+        </a:xfrm>
+      </p:grpSpPr>
+      <p:sp>
+        <p:nvSpPr>
+          <p:cNvPr id="2" name="Slide Image Placeholder 1"/>
+          <p:cNvSpPr>
+            <a:spLocks noGrp="1"/>
+          </p:cNvSpPr>
+          <p:nvPr>
+            <p:ph type="sldImg" idx="2"/>
+          </p:nvPr>
+        </p:nvSpPr>
+        <p:spPr/>
+      </p:sp>
+      <p:sp>
+        <p:nvSpPr>
+          <p:cNvPr id="3" name="Notes Placeholder 2"/>
+          <p:cNvSpPr>
+            <a:spLocks noGrp="1"/>
+          </p:cNvSpPr>
+          <p:nvPr>
+            <p:ph type="body" idx="3" sz="quarter"/>
+          </p:nvPr>
+        </p:nvSpPr>
+        <p:spPr/>
+        <p:txBody>
+          <a:bodyPr/>
+          <a:lstStyle/>
+          <a:p>
+            <a:r>
+              <a:t>Linux arch/x86/kernel/ptrace.c——`getreg`/`putreg` 走 `*pt_regs_access(task_pt_regs(child), offset)` 原地改；fs_base/gs_base 经 `x86_fsbase_write_task`/`x86_gsbase_read_task`（存在 task-&gt;thread）。Asterinas：ptrace/mod.rs `do_ptrace_stop` 取 `state.general_regs=Some(*user_ctx.general_regs())`、resume 回写 `*user_ctx.general_regs_mut()=regs`；arch/x86/ptrace.rs `CUserRegsStruct` 为 `Pod`。</a:t>
+            </a:r>
+          </a:p>
+        </p:txBody>
+      </p:sp>
+      <p:sp>
+        <p:nvSpPr>
+          <p:cNvPr id="4" name="Slide Number Placeholder 3"/>
+          <p:cNvSpPr>
+            <a:spLocks noGrp="1"/>
+          </p:cNvSpPr>
+          <p:nvPr>
+            <p:ph type="sldNum" idx="5" sz="quarter"/>
+          </p:nvPr>
+        </p:nvSpPr>
+        <p:spPr/>
+      </p:sp>
+    </p:spTree>
+  </p:cSld>
+  <p:clrMapOvr>
+    <a:masterClrMapping/>
+  </p:clrMapOvr>
+</p:notes>
+</file>
+
+<file path=ppt/notesSlides/notesSlide6.xml><?xml version="1.0" encoding="utf-8"?>
+<p:notes xmlns:a="http://schemas.openxmlformats.org/drawingml/2006/main" xmlns:p="http://schemas.openxmlformats.org/presentationml/2006/main" xmlns:r="http://schemas.openxmlformats.org/officeDocument/2006/relationships">
+  <p:cSld>
+    <p:spTree>
+      <p:nvGrpSpPr>
+        <p:cNvPr id="1" name=""/>
+        <p:cNvGrpSpPr/>
+        <p:nvPr/>
+      </p:nvGrpSpPr>
+      <p:grpSpPr>
+        <a:xfrm>
+          <a:off x="0" y="0"/>
+          <a:ext cx="0" cy="0"/>
+          <a:chOff x="0" y="0"/>
+          <a:chExt cx="0" cy="0"/>
+        </a:xfrm>
+      </p:grpSpPr>
+      <p:sp>
+        <p:nvSpPr>
+          <p:cNvPr id="2" name="Slide Image Placeholder 1"/>
+          <p:cNvSpPr>
+            <a:spLocks noGrp="1"/>
+          </p:cNvSpPr>
+          <p:nvPr>
+            <p:ph type="sldImg" idx="2"/>
+          </p:nvPr>
+        </p:nvSpPr>
+        <p:spPr/>
+      </p:sp>
+      <p:sp>
+        <p:nvSpPr>
+          <p:cNvPr id="3" name="Notes Placeholder 2"/>
+          <p:cNvSpPr>
+            <a:spLocks noGrp="1"/>
+          </p:cNvSpPr>
+          <p:nvPr>
+            <p:ph type="body" idx="3" sz="quarter"/>
+          </p:nvPr>
+        </p:nvSpPr>
+        <p:spPr/>
+        <p:txBody>
+          <a:bodyPr/>
+          <a:lstStyle/>
+          <a:p>
+            <a:r>
+              <a:t>寄存器表口径说明——不含 32 位 compat 为 2:1（getreg+putreg → 一张表），含 compat 约 4:1，而 Linux 的重复大半来自本项目不运行的 32 位路径。源码：Linux arch/x86/kernel/ptrace.c `getreg`/`putreg`/`getreg32`/`putreg32`/`SEG32`；kernel/signal.c `ptrace_stop` 复用 `exit_code`/`last_siginfo`，`ptrace_signal` 回读 `exit_code` 作为新信号再投递。Asterinas：arch/x86/ptrace.rs `REG_RULES` + const 断言、ptrace/util.rs `StopDeliverySignal`。信号一项为表述更显式，而非 Linux 存在缺陷。</a:t>
             </a:r>
           </a:p>
         </p:txBody>
@@ -7017,7 +7377,7 @@
     <p:bg>
       <p:bgPr>
         <a:blipFill dpi="0" rotWithShape="1">
-          <a:blip r:embed="rId2"/>
+          <a:blip r:embed="rId3"/>
           <a:stretch>
             <a:fillRect/>
           </a:stretch>
@@ -7060,7 +7420,7 @@
                   <a:srgbClr val="A00016"/>
                 </a:solidFill>
               </a:rPr>
-              <a:t>2.1 要解决什么问题：相同接口，内部更优的实现</a:t>
+              <a:t>2.1 和 Linux 相同抽象接口，但内部更优实现</a:t>
             </a:r>
           </a:p>
         </p:txBody>
@@ -7074,7 +7434,7 @@
         <p:spPr>
           <a:xfrm>
             <a:off x="1005840" y="1783080"/>
-            <a:ext cx="10241280" cy="4480559"/>
+            <a:ext cx="10241280" cy="3776472"/>
           </a:xfrm>
           <a:prstGeom prst="rect">
             <a:avLst/>
@@ -7101,7 +7461,7 @@
                   <a:srgbClr val="202020"/>
                 </a:solidFill>
               </a:rPr>
-              <a:t>对外语义与 ABI 必须对齐 Linux，工作落在内部结构与实现质量。借助框内核 + 安全 Rust 这个载体，几处关键机制做得与 Linux 不同：</a:t>
+              <a:t>借助框内核 + 安全 Rust OS 这一载体，本项目相比 Linux 实现做出三处结构性改良：</a:t>
             </a:r>
           </a:p>
           <a:p>
@@ -7127,51 +7487,7 @@
                   <a:srgbClr val="202020"/>
                 </a:solidFill>
               </a:rPr>
-              <a:t>跟踪关系是旁路 map，不动进程树</a:t>
-            </a:r>
-            <a:r>
-              <a:rPr sz="1500" b="0">
-                <a:solidFill>
-                  <a:srgbClr val="202020"/>
-                </a:solidFill>
-              </a:rPr>
-              <a:t>：Linux 把 tracee reparent 进全局进程树，attach / detach / exit 须全程持有全局写锁 </a:t>
-            </a:r>
-            <a:r>
-              <a:rPr sz="1500" b="0">
-                <a:solidFill>
-                  <a:srgbClr val="A00016"/>
-                </a:solidFill>
-                <a:latin typeface="Menlo"/>
-                <a:cs typeface="Menlo"/>
-              </a:rPr>
-              <a:t>tasklist_lock</a:t>
-            </a:r>
-            <a:r>
-              <a:rPr sz="1500" b="0">
-                <a:solidFill>
-                  <a:srgbClr val="202020"/>
-                </a:solidFill>
-              </a:rPr>
-              <a:t>；本项目用一张旁路 </a:t>
-            </a:r>
-            <a:r>
-              <a:rPr sz="1500" b="0">
-                <a:solidFill>
-                  <a:srgbClr val="A00016"/>
-                </a:solidFill>
-                <a:latin typeface="Menlo"/>
-                <a:cs typeface="Menlo"/>
-              </a:rPr>
-              <a:t>tracees</a:t>
-            </a:r>
-            <a:r>
-              <a:rPr sz="1500" b="0">
-                <a:solidFill>
-                  <a:srgbClr val="202020"/>
-                </a:solidFill>
-              </a:rPr>
-              <a:t> map，关系变更只落在两把文档化锁序的 per-object 锁上。</a:t>
+              <a:t>ptrace 状态机与调度器解耦、建立跟踪无需全局大锁 tasklist_lock</a:t>
             </a:r>
           </a:p>
           <a:p>
@@ -7197,69 +7513,7 @@
                   <a:srgbClr val="202020"/>
                 </a:solidFill>
               </a:rPr>
-              <a:t>寄存器快照，而非原地编辑内核栈</a:t>
-            </a:r>
-            <a:r>
-              <a:rPr sz="1500" b="0">
-                <a:solidFill>
-                  <a:srgbClr val="202020"/>
-                </a:solidFill>
-              </a:rPr>
-              <a:t>：Linux 直接读写 tracee 内核栈上的 </a:t>
-            </a:r>
-            <a:r>
-              <a:rPr sz="1500" b="0">
-                <a:solidFill>
-                  <a:srgbClr val="A00016"/>
-                </a:solidFill>
-                <a:latin typeface="Menlo"/>
-                <a:cs typeface="Menlo"/>
-              </a:rPr>
-              <a:t>pt_regs</a:t>
-            </a:r>
-            <a:r>
-              <a:rPr sz="1500" b="0">
-                <a:solidFill>
-                  <a:srgbClr val="202020"/>
-                </a:solidFill>
-              </a:rPr>
-              <a:t>，须先用 </a:t>
-            </a:r>
-            <a:r>
-              <a:rPr sz="1500" b="0">
-                <a:solidFill>
-                  <a:srgbClr val="A00016"/>
-                </a:solidFill>
-                <a:latin typeface="Menlo"/>
-                <a:cs typeface="Menlo"/>
-              </a:rPr>
-              <a:t>wait_task_inactive</a:t>
-            </a:r>
-            <a:r>
-              <a:rPr sz="1500" b="0">
-                <a:solidFill>
-                  <a:srgbClr val="202020"/>
-                </a:solidFill>
-              </a:rPr>
-              <a:t> 等它下 CPU；本项目进入 stop 时把现场快照进持锁的连续 </a:t>
-            </a:r>
-            <a:r>
-              <a:rPr sz="1500" b="0">
-                <a:solidFill>
-                  <a:srgbClr val="A00016"/>
-                </a:solidFill>
-                <a:latin typeface="Menlo"/>
-                <a:cs typeface="Menlo"/>
-              </a:rPr>
-              <a:t>CUserRegsStruct</a:t>
-            </a:r>
-            <a:r>
-              <a:rPr sz="1500" b="0">
-                <a:solidFill>
-                  <a:srgbClr val="202020"/>
-                </a:solidFill>
-              </a:rPr>
-              <a:t>，一致性由锁保证、与是否在 CPU 上无关。</a:t>
+              <a:t>编译期确保 tracer 和 tracee 不会同时读写同一份寄存器快照，保障内存安全</a:t>
             </a:r>
           </a:p>
           <a:p>
@@ -7285,33 +7539,7 @@
                   <a:srgbClr val="202020"/>
                 </a:solidFill>
               </a:rPr>
-              <a:t>全安全 Rust 的调试通路</a:t>
-            </a:r>
-            <a:r>
-              <a:rPr sz="1500" b="0">
-                <a:solidFill>
-                  <a:srgbClr val="202020"/>
-                </a:solidFill>
-              </a:rPr>
-              <a:t>：改寄存器、写别人内存、改控制流这三件内核里最易出内存安全漏洞的事，全程零 </a:t>
-            </a:r>
-            <a:r>
-              <a:rPr sz="1500" b="0">
-                <a:solidFill>
-                  <a:srgbClr val="A00016"/>
-                </a:solidFill>
-                <a:latin typeface="Menlo"/>
-                <a:cs typeface="Menlo"/>
-              </a:rPr>
-              <a:t>unsafe</a:t>
-            </a:r>
-            <a:r>
-              <a:rPr sz="1500" b="0">
-                <a:solidFill>
-                  <a:srgbClr val="202020"/>
-                </a:solidFill>
-              </a:rPr>
-              <a:t>，危险性由所有权与类型系统在编译期约束。</a:t>
+              <a:t>消除历史设计包袱，提升可维护性</a:t>
             </a:r>
           </a:p>
           <a:p>
@@ -7324,64 +7552,12 @@
               </a:spcAft>
             </a:pPr>
             <a:r>
-              <a:rPr sz="1500" b="0">
-                <a:solidFill>
-                  <a:srgbClr val="A00016"/>
-                </a:solidFill>
-              </a:rPr>
-              <a:t>•  </a:t>
-            </a:r>
-            <a:r>
-              <a:rPr sz="1500" b="1">
-                <a:solidFill>
-                  <a:srgbClr val="202020"/>
-                </a:solidFill>
-              </a:rPr>
-              <a:t>字段策略收敛成单表</a:t>
-            </a:r>
-            <a:r>
-              <a:rPr sz="1500" b="0">
-                <a:solidFill>
-                  <a:srgbClr val="202020"/>
-                </a:solidFill>
-              </a:rPr>
-              <a:t>：x86 寄存器的字段级特殊处理用一张 </a:t>
-            </a:r>
-            <a:r>
-              <a:rPr sz="1500" b="0">
-                <a:solidFill>
-                  <a:srgbClr val="A00016"/>
-                </a:solidFill>
-                <a:latin typeface="Menlo"/>
-                <a:cs typeface="Menlo"/>
-              </a:rPr>
-              <a:t>REG_RULES</a:t>
-            </a:r>
-            <a:r>
-              <a:rPr sz="1500" b="0">
-                <a:solidFill>
-                  <a:srgbClr val="202020"/>
-                </a:solidFill>
-              </a:rPr>
-              <a:t> 表声明一次、四条访问路径共查，替代 Linux 在读写两侧重列多遍的历史写法。</a:t>
-            </a:r>
-          </a:p>
-          <a:p>
-            <a:pPr>
-              <a:lnSpc>
-                <a:spcPct val="112000"/>
-              </a:lnSpc>
-              <a:spcAft>
-                <a:spcPts val="700"/>
-              </a:spcAft>
-            </a:pPr>
-            <a:r>
               <a:rPr sz="1250" b="0">
                 <a:solidFill>
                   <a:srgbClr val="606060"/>
                 </a:solidFill>
               </a:rPr>
-              <a:t>这几条不是「重新发明」，而是把同一套 ptrace 语义，重建到一个更安全、更分层的载体上。</a:t>
+              <a:t>这些都不改变对外行为，而是在等价语义下，把同一套 ptrace 重建到更安全、更具可维护性的载体上。</a:t>
             </a:r>
           </a:p>
         </p:txBody>
@@ -7400,7 +7576,7 @@
     <p:bg>
       <p:bgPr>
         <a:blipFill dpi="0" rotWithShape="1">
-          <a:blip r:embed="rId2"/>
+          <a:blip r:embed="rId3"/>
           <a:stretch>
             <a:fillRect/>
           </a:stretch>
@@ -7443,29 +7619,29 @@
                   <a:srgbClr val="A00016"/>
                 </a:solidFill>
               </a:rPr>
-              <a:t>2.2 ptrace-stop 主状态机：三类停止统一收敛</a:t>
+              <a:t>2.2 ptrace 状态机：与调度器解耦</a:t>
             </a:r>
           </a:p>
         </p:txBody>
       </p:sp>
       <p:pic>
         <p:nvPicPr>
-          <p:cNvPr id="3" name="Picture 2" descr="04_state_machine.png"/>
+          <p:cNvPr id="3" name="Picture 2" descr="04b_sync.png"/>
           <p:cNvPicPr>
             <a:picLocks noChangeAspect="1"/>
           </p:cNvPicPr>
           <p:nvPr/>
         </p:nvPicPr>
         <p:blipFill>
-          <a:blip r:embed="rId3"/>
+          <a:blip r:embed="rId4"/>
           <a:stretch>
             <a:fillRect/>
           </a:stretch>
         </p:blipFill>
         <p:spPr>
           <a:xfrm>
-            <a:off x="3400703" y="1783080"/>
-            <a:ext cx="5451553" cy="2084831"/>
+            <a:off x="4019230" y="1783080"/>
+            <a:ext cx="4214499" cy="2084831"/>
           </a:xfrm>
           <a:prstGeom prst="rect">
             <a:avLst/>
@@ -7524,15 +7700,31 @@
                   <a:srgbClr val="202020"/>
                 </a:solidFill>
               </a:rPr>
-              <a:t>ptrace-stop（保存现场）</a:t>
-            </a:r>
-            <a:r>
-              <a:rPr sz="1500" b="0">
-                <a:solidFill>
-                  <a:srgbClr val="202020"/>
-                </a:solidFill>
-              </a:rPr>
-              <a:t> → wait 报告 → 恢复运行 → 命中下一次停止条件再回到 stop，或退出清理。</a:t>
+              <a:t>ptrace-stop（快照现场、阻塞）</a:t>
+            </a:r>
+            <a:r>
+              <a:rPr sz="1500" b="0">
+                <a:solidFill>
+                  <a:srgbClr val="202020"/>
+                </a:solidFill>
+              </a:rPr>
+              <a:t> → wait 报告 → 恢复运行 → 命中下一次停止条件再回到 stop，或退出清理。三种停止来源（信号停、系统调用停、事件停）</a:t>
+            </a:r>
+            <a:r>
+              <a:rPr sz="1500" b="1">
+                <a:solidFill>
+                  <a:srgbClr val="202020"/>
+                </a:solidFill>
+              </a:rPr>
+              <a:t>统一收敛到 do_ptrace_stop()</a:t>
+            </a:r>
+            <a:r>
+              <a:rPr sz="1500" b="0">
+                <a:solidFill>
+                  <a:srgbClr val="202020"/>
+                </a:solidFill>
+              </a:rPr>
+              <a:t>。</a:t>
             </a:r>
           </a:p>
           <a:p>
@@ -7553,28 +7745,20 @@
               <a:t>•  </a:t>
             </a:r>
             <a:r>
-              <a:rPr sz="1500" b="0">
-                <a:solidFill>
-                  <a:srgbClr val="202020"/>
-                </a:solidFill>
-              </a:rPr>
-              <a:t>三种停止来源（信号停、系统调用停、事件停）</a:t>
-            </a:r>
-            <a:r>
               <a:rPr sz="1500" b="1">
                 <a:solidFill>
                   <a:srgbClr val="202020"/>
                 </a:solidFill>
               </a:rPr>
-              <a:t>统一收敛到 do_ptrace_stop()</a:t>
-            </a:r>
-            <a:r>
-              <a:rPr sz="1500" b="0">
-                <a:solidFill>
-                  <a:srgbClr val="202020"/>
-                </a:solidFill>
-              </a:rPr>
-              <a:t>：同一抽象保存现场、记录 wait status、投 </a:t>
+              <a:t>同步机制</a:t>
+            </a:r>
+            <a:r>
+              <a:rPr sz="1500" b="0">
+                <a:solidFill>
+                  <a:srgbClr val="202020"/>
+                </a:solidFill>
+              </a:rPr>
+              <a:t>：tracer 与 tracee 共享 TraceeStatus = 原子标志 </a:t>
             </a:r>
             <a:r>
               <a:rPr sz="1500" b="0">
@@ -7584,15 +7768,69 @@
                 <a:latin typeface="Menlo"/>
                 <a:cs typeface="Menlo"/>
               </a:rPr>
-              <a:t>SIGCHLD</a:t>
-            </a:r>
-            <a:r>
-              <a:rPr sz="1500" b="0">
-                <a:solidFill>
-                  <a:srgbClr val="202020"/>
-                </a:solidFill>
-              </a:rPr>
-              <a:t>、阻塞 tracee、resume 后回写。</a:t>
+              <a:t>is_stopped</a:t>
+            </a:r>
+            <a:r>
+              <a:rPr sz="1500" b="0">
+                <a:solidFill>
+                  <a:srgbClr val="202020"/>
+                </a:solidFill>
+              </a:rPr>
+              <a:t>（是否停在 ptrace-stop 的唯一依据）加一把互斥锁 </a:t>
+            </a:r>
+            <a:r>
+              <a:rPr sz="1500" b="0">
+                <a:solidFill>
+                  <a:srgbClr val="A00016"/>
+                </a:solidFill>
+                <a:latin typeface="Menlo"/>
+                <a:cs typeface="Menlo"/>
+              </a:rPr>
+              <a:t>state</a:t>
+            </a:r>
+            <a:r>
+              <a:rPr sz="1500" b="0">
+                <a:solidFill>
+                  <a:srgbClr val="202020"/>
+                </a:solidFill>
+              </a:rPr>
+              <a:t>（保护寄存器快照、待投递信号、事件）。被跟踪线程进入停止时将自身挂起于一个 </a:t>
+            </a:r>
+            <a:r>
+              <a:rPr sz="1500" b="0">
+                <a:solidFill>
+                  <a:srgbClr val="A00016"/>
+                </a:solidFill>
+                <a:latin typeface="Menlo"/>
+                <a:cs typeface="Menlo"/>
+              </a:rPr>
+              <a:t>Waiter</a:t>
+            </a:r>
+            <a:r>
+              <a:rPr sz="1500" b="0">
+                <a:solidFill>
+                  <a:srgbClr val="202020"/>
+                </a:solidFill>
+              </a:rPr>
+              <a:t> 上，tracer 执行 resume 时仅翻转 </a:t>
+            </a:r>
+            <a:r>
+              <a:rPr sz="1500" b="0">
+                <a:solidFill>
+                  <a:srgbClr val="A00016"/>
+                </a:solidFill>
+                <a:latin typeface="Menlo"/>
+                <a:cs typeface="Menlo"/>
+              </a:rPr>
+              <a:t>is_stopped</a:t>
+            </a:r>
+            <a:r>
+              <a:rPr sz="1500" b="0">
+                <a:solidFill>
+                  <a:srgbClr val="202020"/>
+                </a:solidFill>
+              </a:rPr>
+              <a:t> 并将其唤醒。</a:t>
             </a:r>
           </a:p>
           <a:p>
@@ -7618,15 +7856,281 @@
                   <a:srgbClr val="202020"/>
                 </a:solidFill>
               </a:rPr>
-              <a:t>与 Linux 的差异</a:t>
-            </a:r>
-            <a:r>
-              <a:rPr sz="1500" b="0">
-                <a:solidFill>
-                  <a:srgbClr val="202020"/>
-                </a:solidFill>
-              </a:rPr>
-              <a:t>：状态机与调度解耦——停止 / 恢复靠 tracee 自己进 stop 时快照、阻塞、唤醒，不依赖「等目标下 CPU」这类调度前提。</a:t>
+              <a:t>Linux 对该状态机的实现（已核 Linux 7.1）</a:t>
+            </a:r>
+            <a:r>
+              <a:rPr sz="1500" b="0">
+                <a:solidFill>
+                  <a:srgbClr val="202020"/>
+                </a:solidFill>
+              </a:rPr>
+              <a:t>：Linux 同样将三类停止收敛至 </a:t>
+            </a:r>
+            <a:r>
+              <a:rPr sz="1500" b="0">
+                <a:solidFill>
+                  <a:srgbClr val="A00016"/>
+                </a:solidFill>
+                <a:latin typeface="Menlo"/>
+                <a:cs typeface="Menlo"/>
+              </a:rPr>
+              <a:t>ptrace_stop()</a:t>
+            </a:r>
+            <a:r>
+              <a:rPr sz="1500" b="0">
+                <a:solidFill>
+                  <a:srgbClr val="202020"/>
+                </a:solidFill>
+              </a:rPr>
+              <a:t>（信号停直接进入，系统调用停经 </a:t>
+            </a:r>
+            <a:r>
+              <a:rPr sz="1500" b="0">
+                <a:solidFill>
+                  <a:srgbClr val="A00016"/>
+                </a:solidFill>
+                <a:latin typeface="Menlo"/>
+                <a:cs typeface="Menlo"/>
+              </a:rPr>
+              <a:t>ptrace_report_syscall</a:t>
+            </a:r>
+            <a:r>
+              <a:rPr sz="1500" b="0">
+                <a:solidFill>
+                  <a:srgbClr val="202020"/>
+                </a:solidFill>
+              </a:rPr>
+              <a:t>、事件停经 </a:t>
+            </a:r>
+            <a:r>
+              <a:rPr sz="1500" b="0">
+                <a:solidFill>
+                  <a:srgbClr val="A00016"/>
+                </a:solidFill>
+                <a:latin typeface="Menlo"/>
+                <a:cs typeface="Menlo"/>
+              </a:rPr>
+              <a:t>ptrace_event</a:t>
+            </a:r>
+            <a:r>
+              <a:rPr sz="1500" b="0">
+                <a:solidFill>
+                  <a:srgbClr val="202020"/>
+                </a:solidFill>
+              </a:rPr>
+              <a:t>，均汇入 </a:t>
+            </a:r>
+            <a:r>
+              <a:rPr sz="1500" b="0">
+                <a:solidFill>
+                  <a:srgbClr val="A00016"/>
+                </a:solidFill>
+                <a:latin typeface="Menlo"/>
+                <a:cs typeface="Menlo"/>
+              </a:rPr>
+              <a:t>ptrace_notify</a:t>
+            </a:r>
+            <a:r>
+              <a:rPr sz="1500" b="0">
+                <a:solidFill>
+                  <a:srgbClr val="202020"/>
+                </a:solidFill>
+              </a:rPr>
+              <a:t>）；被跟踪线程的停止状态保存于 </a:t>
+            </a:r>
+            <a:r>
+              <a:rPr sz="1500" b="0">
+                <a:solidFill>
+                  <a:srgbClr val="A00016"/>
+                </a:solidFill>
+                <a:latin typeface="Menlo"/>
+                <a:cs typeface="Menlo"/>
+              </a:rPr>
+              <a:t>TASK_TRACED</a:t>
+            </a:r>
+            <a:r>
+              <a:rPr sz="1500" b="0">
+                <a:solidFill>
+                  <a:srgbClr val="202020"/>
+                </a:solidFill>
+              </a:rPr>
+              <a:t> 与 </a:t>
+            </a:r>
+            <a:r>
+              <a:rPr sz="1500" b="0">
+                <a:solidFill>
+                  <a:srgbClr val="A00016"/>
+                </a:solidFill>
+                <a:latin typeface="Menlo"/>
+                <a:cs typeface="Menlo"/>
+              </a:rPr>
+              <a:t>jobctl</a:t>
+            </a:r>
+            <a:r>
+              <a:rPr sz="1500" b="0">
+                <a:solidFill>
+                  <a:srgbClr val="202020"/>
+                </a:solidFill>
+              </a:rPr>
+              <a:t> 标志，进入停止时置 </a:t>
+            </a:r>
+            <a:r>
+              <a:rPr sz="1500" b="0">
+                <a:solidFill>
+                  <a:srgbClr val="A00016"/>
+                </a:solidFill>
+                <a:latin typeface="Menlo"/>
+                <a:cs typeface="Menlo"/>
+              </a:rPr>
+              <a:t>TASK_TRACED</a:t>
+            </a:r>
+            <a:r>
+              <a:rPr sz="1500" b="0">
+                <a:solidFill>
+                  <a:srgbClr val="202020"/>
+                </a:solidFill>
+              </a:rPr>
+              <a:t>、向父进程投递 </a:t>
+            </a:r>
+            <a:r>
+              <a:rPr sz="1500" b="0">
+                <a:solidFill>
+                  <a:srgbClr val="A00016"/>
+                </a:solidFill>
+                <a:latin typeface="Menlo"/>
+                <a:cs typeface="Menlo"/>
+              </a:rPr>
+              <a:t>SIGCHLD</a:t>
+            </a:r>
+            <a:r>
+              <a:rPr sz="1500" b="0">
+                <a:solidFill>
+                  <a:srgbClr val="202020"/>
+                </a:solidFill>
+              </a:rPr>
+              <a:t>，随后 </a:t>
+            </a:r>
+            <a:r>
+              <a:rPr sz="1500" b="0">
+                <a:solidFill>
+                  <a:srgbClr val="A00016"/>
+                </a:solidFill>
+                <a:latin typeface="Menlo"/>
+                <a:cs typeface="Menlo"/>
+              </a:rPr>
+              <a:t>schedule()</a:t>
+            </a:r>
+            <a:r>
+              <a:rPr sz="1500" b="0">
+                <a:solidFill>
+                  <a:srgbClr val="202020"/>
+                </a:solidFill>
+              </a:rPr>
+              <a:t> 让出 CPU，tracer 经 </a:t>
+            </a:r>
+            <a:r>
+              <a:rPr sz="1500" b="0">
+                <a:solidFill>
+                  <a:srgbClr val="A00016"/>
+                </a:solidFill>
+                <a:latin typeface="Menlo"/>
+                <a:cs typeface="Menlo"/>
+              </a:rPr>
+              <a:t>wake_up_state(__TASK_TRACED)</a:t>
+            </a:r>
+            <a:r>
+              <a:rPr sz="1500" b="0">
+                <a:solidFill>
+                  <a:srgbClr val="202020"/>
+                </a:solidFill>
+              </a:rPr>
+              <a:t> 将其唤醒。</a:t>
+            </a:r>
+          </a:p>
+          <a:p>
+            <a:pPr>
+              <a:lnSpc>
+                <a:spcPct val="112000"/>
+              </a:lnSpc>
+              <a:spcAft>
+                <a:spcPts val="700"/>
+              </a:spcAft>
+            </a:pPr>
+            <a:r>
+              <a:rPr sz="1500" b="0">
+                <a:solidFill>
+                  <a:srgbClr val="A00016"/>
+                </a:solidFill>
+              </a:rPr>
+              <a:t>•  </a:t>
+            </a:r>
+            <a:r>
+              <a:rPr sz="1500" b="1">
+                <a:solidFill>
+                  <a:srgbClr val="202020"/>
+                </a:solidFill>
+              </a:rPr>
+              <a:t>与本项目的差异</a:t>
+            </a:r>
+            <a:r>
+              <a:rPr sz="1500" b="0">
+                <a:solidFill>
+                  <a:srgbClr val="202020"/>
+                </a:solidFill>
+              </a:rPr>
+              <a:t>：由于停止状态与调度状态绑定，tracer 在操作前必须经 </a:t>
+            </a:r>
+            <a:r>
+              <a:rPr sz="1500" b="0">
+                <a:solidFill>
+                  <a:srgbClr val="A00016"/>
+                </a:solidFill>
+                <a:latin typeface="Menlo"/>
+                <a:cs typeface="Menlo"/>
+              </a:rPr>
+              <a:t>wait_task_inactive(__TASK_TRACED|TASK_FROZEN)</a:t>
+            </a:r>
+            <a:r>
+              <a:rPr sz="1500" b="0">
+                <a:solidFill>
+                  <a:srgbClr val="202020"/>
+                </a:solidFill>
+              </a:rPr>
+              <a:t> 等待目标线程实际离开 CPU——与调度器强耦合；本项目仅以 </a:t>
+            </a:r>
+            <a:r>
+              <a:rPr sz="1500" b="0">
+                <a:solidFill>
+                  <a:srgbClr val="A00016"/>
+                </a:solidFill>
+                <a:latin typeface="Menlo"/>
+                <a:cs typeface="Menlo"/>
+              </a:rPr>
+              <a:t>is_stopped</a:t>
+            </a:r>
+            <a:r>
+              <a:rPr sz="1500" b="0">
+                <a:solidFill>
+                  <a:srgbClr val="202020"/>
+                </a:solidFill>
+              </a:rPr>
+              <a:t> 原子标志为准，</a:t>
+            </a:r>
+            <a:r>
+              <a:rPr sz="1500" b="1">
+                <a:solidFill>
+                  <a:srgbClr val="202020"/>
+                </a:solidFill>
+              </a:rPr>
+              <a:t>与线程是否在 CPU 上执行无关</a:t>
+            </a:r>
+            <a:r>
+              <a:rPr sz="1500" b="0">
+                <a:solidFill>
+                  <a:srgbClr val="202020"/>
+                </a:solidFill>
+              </a:rPr>
+              <a:t>。</a:t>
             </a:r>
           </a:p>
         </p:txBody>
@@ -7645,7 +8149,7 @@
     <p:bg>
       <p:bgPr>
         <a:blipFill dpi="0" rotWithShape="1">
-          <a:blip r:embed="rId2"/>
+          <a:blip r:embed="rId3"/>
           <a:stretch>
             <a:fillRect/>
           </a:stretch>
@@ -7688,69 +8192,21 @@
                   <a:srgbClr val="A00016"/>
                 </a:solidFill>
               </a:rPr>
-              <a:t>2.3 tracer 与 tracee 如何同步</a:t>
-            </a:r>
-          </a:p>
-        </p:txBody>
-      </p:sp>
-      <p:pic>
-        <p:nvPicPr>
-          <p:cNvPr id="3" name="Picture 2" descr="04b_sync.png"/>
-          <p:cNvPicPr>
-            <a:picLocks noChangeAspect="1"/>
-          </p:cNvPicPr>
+              <a:t>2.3 跟踪关系：旁路 map，无全局大锁</a:t>
+            </a:r>
+          </a:p>
+        </p:txBody>
+      </p:sp>
+      <p:sp>
+        <p:nvSpPr>
+          <p:cNvPr id="3" name="TextBox 2"/>
+          <p:cNvSpPr txBox="1"/>
           <p:nvPr/>
-        </p:nvPicPr>
-        <p:blipFill>
-          <a:blip r:embed="rId3"/>
-          <a:stretch>
-            <a:fillRect/>
-          </a:stretch>
-        </p:blipFill>
+        </p:nvSpPr>
         <p:spPr>
           <a:xfrm>
-            <a:off x="1458910" y="1783080"/>
-            <a:ext cx="4214499" cy="2084831"/>
-          </a:xfrm>
-          <a:prstGeom prst="rect">
-            <a:avLst/>
-          </a:prstGeom>
-        </p:spPr>
-      </p:pic>
-      <p:pic>
-        <p:nvPicPr>
-          <p:cNvPr id="4" name="Picture 3" descr="20260617-145625.jpeg"/>
-          <p:cNvPicPr>
-            <a:picLocks noChangeAspect="1"/>
-          </p:cNvPicPr>
-          <p:nvPr/>
-        </p:nvPicPr>
-        <p:blipFill>
-          <a:blip r:embed="rId4"/>
-          <a:stretch>
-            <a:fillRect/>
-          </a:stretch>
-        </p:blipFill>
-        <p:spPr>
-          <a:xfrm>
-            <a:off x="6126479" y="2058117"/>
-            <a:ext cx="5120640" cy="1534757"/>
-          </a:xfrm>
-          <a:prstGeom prst="rect">
-            <a:avLst/>
-          </a:prstGeom>
-        </p:spPr>
-      </p:pic>
-      <p:sp>
-        <p:nvSpPr>
-          <p:cNvPr id="5" name="TextBox 4"/>
-          <p:cNvSpPr txBox="1"/>
-          <p:nvPr/>
-        </p:nvSpPr>
-        <p:spPr>
-          <a:xfrm>
-            <a:off x="1005840" y="3977639"/>
-            <a:ext cx="10241280" cy="2286000"/>
+            <a:off x="1005840" y="1783080"/>
+            <a:ext cx="10241280" cy="2624328"/>
           </a:xfrm>
           <a:prstGeom prst="rect">
             <a:avLst/>
@@ -7785,7 +8241,75 @@
                   <a:srgbClr val="202020"/>
                 </a:solidFill>
               </a:rPr>
-              <a:t>tracer（调试器线程）与 tracee（被调试线程）通过共享结构 TraceeStatus 同步，其中有一个原子标志和一把互斥锁。</a:t>
+              <a:t>跟踪关系是一张</a:t>
+            </a:r>
+            <a:r>
+              <a:rPr sz="1500" b="1">
+                <a:solidFill>
+                  <a:srgbClr val="202020"/>
+                </a:solidFill>
+              </a:rPr>
+              <a:t>旁路表</a:t>
+            </a:r>
+            <a:r>
+              <a:rPr sz="1500" b="0">
+                <a:solidFill>
+                  <a:srgbClr val="202020"/>
+                </a:solidFill>
+              </a:rPr>
+              <a:t>：tracer 用 </a:t>
+            </a:r>
+            <a:r>
+              <a:rPr sz="1500" b="0">
+                <a:solidFill>
+                  <a:srgbClr val="A00016"/>
+                </a:solidFill>
+                <a:latin typeface="Menlo"/>
+                <a:cs typeface="Menlo"/>
+              </a:rPr>
+              <a:t>tracees: Mutex&lt;BTreeMap&lt;Tid, Arc&lt;Thread&gt;&gt;&gt;</a:t>
+            </a:r>
+            <a:r>
+              <a:rPr sz="1500" b="0">
+                <a:solidFill>
+                  <a:srgbClr val="202020"/>
+                </a:solidFill>
+              </a:rPr>
+              <a:t> 强引用持有 tracee，tracee 用 </a:t>
+            </a:r>
+            <a:r>
+              <a:rPr sz="1500" b="0">
+                <a:solidFill>
+                  <a:srgbClr val="A00016"/>
+                </a:solidFill>
+                <a:latin typeface="Menlo"/>
+                <a:cs typeface="Menlo"/>
+              </a:rPr>
+              <a:t>Weak&lt;Thread&gt;</a:t>
+            </a:r>
+            <a:r>
+              <a:rPr sz="1500" b="0">
+                <a:solidFill>
+                  <a:srgbClr val="202020"/>
+                </a:solidFill>
+              </a:rPr>
+              <a:t> 反指 tracer（打破引用环），</a:t>
+            </a:r>
+            <a:r>
+              <a:rPr sz="1500" b="1">
+                <a:solidFill>
+                  <a:srgbClr val="202020"/>
+                </a:solidFill>
+              </a:rPr>
+              <a:t>完全不动进程树</a:t>
+            </a:r>
+            <a:r>
+              <a:rPr sz="1500" b="0">
+                <a:solidFill>
+                  <a:srgbClr val="202020"/>
+                </a:solidFill>
+              </a:rPr>
+              <a:t>。</a:t>
             </a:r>
           </a:p>
           <a:p>
@@ -7811,7 +8335,77 @@
                   <a:srgbClr val="202020"/>
                 </a:solidFill>
               </a:rPr>
-              <a:t>原子标志 is_stopped 是 tracee 是否停在 ptrace-stop 的唯一依据：tracee 停下时置真并挂起，tracer 操作前据此确认其已停止、否则拒绝，恢复执行时置假并唤醒。</a:t>
+              <a:t>tracer 的 wait 亦遍历该旁路 map（</a:t>
+            </a:r>
+            <a:r>
+              <a:rPr sz="1500" b="0">
+                <a:solidFill>
+                  <a:srgbClr val="A00016"/>
+                </a:solidFill>
+                <a:latin typeface="Menlo"/>
+                <a:cs typeface="Menlo"/>
+              </a:rPr>
+              <a:t>try_wait_tracees</a:t>
+            </a:r>
+            <a:r>
+              <a:rPr sz="1500" b="0">
+                <a:solidFill>
+                  <a:srgbClr val="202020"/>
+                </a:solidFill>
+              </a:rPr>
+              <a:t>），而非子进程链；每个 tracee 各持有一个 per-object 的 </a:t>
+            </a:r>
+            <a:r>
+              <a:rPr sz="1500" b="0">
+                <a:solidFill>
+                  <a:srgbClr val="A00016"/>
+                </a:solidFill>
+                <a:latin typeface="Menlo"/>
+                <a:cs typeface="Menlo"/>
+              </a:rPr>
+              <a:t>TraceeStatus</a:t>
+            </a:r>
+            <a:r>
+              <a:rPr sz="1500" b="0">
+                <a:solidFill>
+                  <a:srgbClr val="202020"/>
+                </a:solidFill>
+              </a:rPr>
+              <a:t>，关系变更仅涉及</a:t>
+            </a:r>
+            <a:r>
+              <a:rPr sz="1500" b="1">
+                <a:solidFill>
+                  <a:srgbClr val="202020"/>
+                </a:solidFill>
+              </a:rPr>
+              <a:t>两把 per-object 锁</a:t>
+            </a:r>
+            <a:r>
+              <a:rPr sz="1500" b="0">
+                <a:solidFill>
+                  <a:srgbClr val="202020"/>
+                </a:solidFill>
+              </a:rPr>
+              <a:t>，固定锁序 </a:t>
+            </a:r>
+            <a:r>
+              <a:rPr sz="1500" b="0">
+                <a:solidFill>
+                  <a:srgbClr val="A00016"/>
+                </a:solidFill>
+                <a:latin typeface="Menlo"/>
+                <a:cs typeface="Menlo"/>
+              </a:rPr>
+              <a:t>tracees → tracee_status</a:t>
+            </a:r>
+            <a:r>
+              <a:rPr sz="1500" b="0">
+                <a:solidFill>
+                  <a:srgbClr val="202020"/>
+                </a:solidFill>
+              </a:rPr>
+              <a:t>，避免遍历与停止 / 退出之间交叉等待造成死锁。</a:t>
             </a:r>
           </a:p>
           <a:p>
@@ -7832,12 +8426,88 @@
               <a:t>•  </a:t>
             </a:r>
             <a:r>
-              <a:rPr sz="1500" b="0">
-                <a:solidFill>
-                  <a:srgbClr val="202020"/>
-                </a:solidFill>
-              </a:rPr>
-              <a:t>互斥锁 state 保护现场数据（寄存器快照、待投递信号、事件），两线程读写前都先持锁，避免并发竞争。</a:t>
+              <a:rPr sz="1500" b="1">
+                <a:solidFill>
+                  <a:srgbClr val="202020"/>
+                </a:solidFill>
+              </a:rPr>
+              <a:t>与 Linux 的差异（已核 Linux 7.1）</a:t>
+            </a:r>
+            <a:r>
+              <a:rPr sz="1500" b="0">
+                <a:solidFill>
+                  <a:srgbClr val="202020"/>
+                </a:solidFill>
+              </a:rPr>
+              <a:t>：Linux 把 tracee </a:t>
+            </a:r>
+            <a:r>
+              <a:rPr sz="1500" b="1">
+                <a:solidFill>
+                  <a:srgbClr val="202020"/>
+                </a:solidFill>
+              </a:rPr>
+              <a:t>reparent</a:t>
+            </a:r>
+            <a:r>
+              <a:rPr sz="1500" b="0">
+                <a:solidFill>
+                  <a:srgbClr val="202020"/>
+                </a:solidFill>
+              </a:rPr>
+              <a:t> 进全局进程树（</a:t>
+            </a:r>
+            <a:r>
+              <a:rPr sz="1500" b="0">
+                <a:solidFill>
+                  <a:srgbClr val="A00016"/>
+                </a:solidFill>
+                <a:latin typeface="Menlo"/>
+                <a:cs typeface="Menlo"/>
+              </a:rPr>
+              <a:t>__ptrace_link</a:t>
+            </a:r>
+            <a:r>
+              <a:rPr sz="1500" b="0">
+                <a:solidFill>
+                  <a:srgbClr val="202020"/>
+                </a:solidFill>
+              </a:rPr>
+              <a:t> 改 </a:t>
+            </a:r>
+            <a:r>
+              <a:rPr sz="1500" b="0">
+                <a:solidFill>
+                  <a:srgbClr val="A00016"/>
+                </a:solidFill>
+                <a:latin typeface="Menlo"/>
+                <a:cs typeface="Menlo"/>
+              </a:rPr>
+              <a:t>child-&gt;parent</a:t>
+            </a:r>
+            <a:r>
+              <a:rPr sz="1500" b="0">
+                <a:solidFill>
+                  <a:srgbClr val="202020"/>
+                </a:solidFill>
+              </a:rPr>
+              <a:t>），故 attach / traceme / detach / exit </a:t>
+            </a:r>
+            <a:r>
+              <a:rPr sz="1500" b="1">
+                <a:solidFill>
+                  <a:srgbClr val="202020"/>
+                </a:solidFill>
+              </a:rPr>
+              <a:t>全程持有全局写锁 tasklist_lock</a:t>
+            </a:r>
+            <a:r>
+              <a:rPr sz="1500" b="0">
+                <a:solidFill>
+                  <a:srgbClr val="202020"/>
+                </a:solidFill>
+              </a:rPr>
+              <a:t>；本项目因关系与进程树解耦，无需该全局锁。</a:t>
             </a:r>
           </a:p>
         </p:txBody>
@@ -7856,7 +8526,7 @@
     <p:bg>
       <p:bgPr>
         <a:blipFill dpi="0" rotWithShape="1">
-          <a:blip r:embed="rId2"/>
+          <a:blip r:embed="rId3"/>
           <a:stretch>
             <a:fillRect/>
           </a:stretch>
@@ -7899,29 +8569,29 @@
                   <a:srgbClr val="A00016"/>
                 </a:solidFill>
               </a:rPr>
-              <a:t>2.4 跨进程内存访问：在目标进程地址空间里直接读写</a:t>
+              <a:t>2.4 跨线程读写寄存器：寄存器副本，编译期强制检查内存安全</a:t>
             </a:r>
           </a:p>
         </p:txBody>
       </p:sp>
       <p:pic>
         <p:nvPicPr>
-          <p:cNvPr id="3" name="Picture 2" descr="07_mem_access.png"/>
+          <p:cNvPr id="3" name="Picture 2" descr="08_register_abi.png"/>
           <p:cNvPicPr>
             <a:picLocks noChangeAspect="1"/>
           </p:cNvPicPr>
           <p:nvPr/>
         </p:nvPicPr>
         <p:blipFill>
-          <a:blip r:embed="rId3"/>
+          <a:blip r:embed="rId4"/>
           <a:stretch>
             <a:fillRect/>
           </a:stretch>
         </p:blipFill>
         <p:spPr>
           <a:xfrm>
-            <a:off x="4368721" y="1783080"/>
-            <a:ext cx="3515516" cy="2176271"/>
+            <a:off x="4330645" y="1783080"/>
+            <a:ext cx="3591668" cy="2084831"/>
           </a:xfrm>
           <a:prstGeom prst="rect">
             <a:avLst/>
@@ -7936,8 +8606,8 @@
         </p:nvSpPr>
         <p:spPr>
           <a:xfrm>
-            <a:off x="1005840" y="4069079"/>
-            <a:ext cx="10241280" cy="2194560"/>
+            <a:off x="1005840" y="3977639"/>
+            <a:ext cx="10241280" cy="2286000"/>
           </a:xfrm>
           <a:prstGeom prst="rect">
             <a:avLst/>
@@ -7967,6 +8637,22 @@
               <a:t>•  </a:t>
             </a:r>
             <a:r>
+              <a:rPr sz="1500" b="1">
+                <a:solidFill>
+                  <a:srgbClr val="202020"/>
+                </a:solidFill>
+              </a:rPr>
+              <a:t>快照式访问</a:t>
+            </a:r>
+            <a:r>
+              <a:rPr sz="1500" b="0">
+                <a:solidFill>
+                  <a:srgbClr val="202020"/>
+                </a:solidFill>
+              </a:rPr>
+              <a:t>：tracee 进入 ptrace-stop 时，持锁将用户寄存器上下文复制为一份连续副本 </a:t>
+            </a:r>
+            <a:r>
               <a:rPr sz="1500" b="0">
                 <a:solidFill>
                   <a:srgbClr val="A00016"/>
@@ -7974,33 +8660,15 @@
                 <a:latin typeface="Menlo"/>
                 <a:cs typeface="Menlo"/>
               </a:rPr>
-              <a:t>ptrace PEEK/POKE</a:t>
-            </a:r>
-            <a:r>
-              <a:rPr sz="1500" b="0">
-                <a:solidFill>
-                  <a:srgbClr val="202020"/>
-                </a:solidFill>
-              </a:rPr>
-              <a:t> 与 </a:t>
-            </a:r>
-            <a:r>
-              <a:rPr sz="1500" b="0">
-                <a:solidFill>
-                  <a:srgbClr val="A00016"/>
-                </a:solidFill>
-                <a:latin typeface="Menlo"/>
-                <a:cs typeface="Menlo"/>
-              </a:rPr>
-              <a:t>/proc/&lt;pid&gt;/mem</a:t>
-            </a:r>
-            <a:r>
-              <a:rPr sz="1500" b="0">
-                <a:solidFill>
-                  <a:srgbClr val="202020"/>
-                </a:solidFill>
-              </a:rPr>
-              <a:t> 走同一套底层读写原语，读写的都是「另一个进程」的内存。</a:t>
+              <a:t>CUserRegsStruct</a:t>
+            </a:r>
+            <a:r>
+              <a:rPr sz="1500" b="0">
+                <a:solidFill>
+                  <a:srgbClr val="202020"/>
+                </a:solidFill>
+              </a:rPr>
+              <a:t>；tracer 在副本上按字段读写，resume 时回写。一致性由互斥锁保证、与其是否在 CPU 上执行无关——这正是 2.2 解耦得以成立的前提。</a:t>
             </a:r>
           </a:p>
           <a:p>
@@ -8026,15 +8694,87 @@
                   <a:srgbClr val="202020"/>
                 </a:solidFill>
               </a:rPr>
-              <a:t>不切换地址空间</a:t>
-            </a:r>
-            <a:r>
-              <a:rPr sz="1500" b="0">
-                <a:solidFill>
-                  <a:srgbClr val="202020"/>
-                </a:solidFill>
-              </a:rPr>
-              <a:t>：不把 CPU 页表切到目标进程，而是直接在它的地址空间里按页定位到物理页帧并拷贝；遇到缺页就主动触发一次缺页处理再重试。</a:t>
+              <a:t>按字段分级管控</a:t>
+            </a:r>
+            <a:r>
+              <a:rPr sz="1500" b="0">
+                <a:solidFill>
+                  <a:srgbClr val="202020"/>
+                </a:solidFill>
+              </a:rPr>
+              <a:t>：</a:t>
+            </a:r>
+            <a:r>
+              <a:rPr sz="1500" b="0">
+                <a:solidFill>
+                  <a:srgbClr val="A00016"/>
+                </a:solidFill>
+                <a:latin typeface="Menlo"/>
+                <a:cs typeface="Menlo"/>
+              </a:rPr>
+              <a:t>rax..r15</a:t>
+            </a:r>
+            <a:r>
+              <a:rPr sz="1500" b="0">
+                <a:solidFill>
+                  <a:srgbClr val="202020"/>
+                </a:solidFill>
+              </a:rPr>
+              <a:t> 可自由写入；</a:t>
+            </a:r>
+            <a:r>
+              <a:rPr sz="1500" b="0">
+                <a:solidFill>
+                  <a:srgbClr val="A00016"/>
+                </a:solidFill>
+                <a:latin typeface="Menlo"/>
+                <a:cs typeface="Menlo"/>
+              </a:rPr>
+              <a:t>rip/rsp/fsbase/gsbase</a:t>
+            </a:r>
+            <a:r>
+              <a:rPr sz="1500" b="0">
+                <a:solidFill>
+                  <a:srgbClr val="202020"/>
+                </a:solidFill>
+              </a:rPr>
+              <a:t> 必须是用户地址；</a:t>
+            </a:r>
+            <a:r>
+              <a:rPr sz="1500" b="0">
+                <a:solidFill>
+                  <a:srgbClr val="A00016"/>
+                </a:solidFill>
+                <a:latin typeface="Menlo"/>
+                <a:cs typeface="Menlo"/>
+              </a:rPr>
+              <a:t>rflags</a:t>
+            </a:r>
+            <a:r>
+              <a:rPr sz="1500" b="0">
+                <a:solidFill>
+                  <a:srgbClr val="202020"/>
+                </a:solidFill>
+              </a:rPr>
+              <a:t> 仅放用户态可控位；</a:t>
+            </a:r>
+            <a:r>
+              <a:rPr sz="1500" b="0">
+                <a:solidFill>
+                  <a:srgbClr val="A00016"/>
+                </a:solidFill>
+                <a:latin typeface="Menlo"/>
+                <a:cs typeface="Menlo"/>
+              </a:rPr>
+              <a:t>cs/ss/ds/es</a:t>
+            </a:r>
+            <a:r>
+              <a:rPr sz="1500" b="0">
+                <a:solidFill>
+                  <a:srgbClr val="202020"/>
+                </a:solidFill>
+              </a:rPr>
+              <a:t> 段寄存器固定（源码注释原文：比 Linux 更严）。</a:t>
             </a:r>
           </a:p>
           <a:p>
@@ -8055,12 +8795,248 @@
               <a:t>•  </a:t>
             </a:r>
             <a:r>
-              <a:rPr sz="1500" b="0">
-                <a:solidFill>
-                  <a:srgbClr val="202020"/>
-                </a:solidFill>
-              </a:rPr>
-              <a:t>整条跨进程读写都夹在统一的读写接口和权限检查边界内，安全可控。</a:t>
+              <a:rPr sz="1500" b="1">
+                <a:solidFill>
+                  <a:srgbClr val="202020"/>
+                </a:solidFill>
+              </a:rPr>
+              <a:t>为何要这样设计（已核 Linux 7.1）</a:t>
+            </a:r>
+            <a:r>
+              <a:rPr sz="1500" b="0">
+                <a:solidFill>
+                  <a:srgbClr val="202020"/>
+                </a:solidFill>
+              </a:rPr>
+              <a:t>：Linux 的 </a:t>
+            </a:r>
+            <a:r>
+              <a:rPr sz="1500" b="0">
+                <a:solidFill>
+                  <a:srgbClr val="A00016"/>
+                </a:solidFill>
+                <a:latin typeface="Menlo"/>
+                <a:cs typeface="Menlo"/>
+              </a:rPr>
+              <a:t>getreg</a:t>
+            </a:r>
+            <a:r>
+              <a:rPr sz="1500" b="0">
+                <a:solidFill>
+                  <a:srgbClr val="202020"/>
+                </a:solidFill>
+              </a:rPr>
+              <a:t>/</a:t>
+            </a:r>
+            <a:r>
+              <a:rPr sz="1500" b="0">
+                <a:solidFill>
+                  <a:srgbClr val="A00016"/>
+                </a:solidFill>
+                <a:latin typeface="Menlo"/>
+                <a:cs typeface="Menlo"/>
+              </a:rPr>
+              <a:t>putreg</a:t>
+            </a:r>
+            <a:r>
+              <a:rPr sz="1500" b="0">
+                <a:solidFill>
+                  <a:srgbClr val="202020"/>
+                </a:solidFill>
+              </a:rPr>
+              <a:t> </a:t>
+            </a:r>
+            <a:r>
+              <a:rPr sz="1500" b="1">
+                <a:solidFill>
+                  <a:srgbClr val="202020"/>
+                </a:solidFill>
+              </a:rPr>
+              <a:t>原地读写</a:t>
+            </a:r>
+            <a:r>
+              <a:rPr sz="1500" b="0">
+                <a:solidFill>
+                  <a:srgbClr val="202020"/>
+                </a:solidFill>
+              </a:rPr>
+              <a:t> tracee 内核栈上的 </a:t>
+            </a:r>
+            <a:r>
+              <a:rPr sz="1500" b="0">
+                <a:solidFill>
+                  <a:srgbClr val="A00016"/>
+                </a:solidFill>
+                <a:latin typeface="Menlo"/>
+                <a:cs typeface="Menlo"/>
+              </a:rPr>
+              <a:t>pt_regs</a:t>
+            </a:r>
+            <a:r>
+              <a:rPr sz="1500" b="0">
+                <a:solidFill>
+                  <a:srgbClr val="202020"/>
+                </a:solidFill>
+              </a:rPr>
+              <a:t>，现场还散落在 </a:t>
+            </a:r>
+            <a:r>
+              <a:rPr sz="1500" b="0">
+                <a:solidFill>
+                  <a:srgbClr val="A00016"/>
+                </a:solidFill>
+                <a:latin typeface="Menlo"/>
+                <a:cs typeface="Menlo"/>
+              </a:rPr>
+              <a:t>task-&gt;thread</a:t>
+            </a:r>
+            <a:r>
+              <a:rPr sz="1500" b="0">
+                <a:solidFill>
+                  <a:srgbClr val="202020"/>
+                </a:solidFill>
+              </a:rPr>
+              <a:t>（fsbase/gsbase）；由于修改的是活动的内核栈，必须先经 </a:t>
+            </a:r>
+            <a:r>
+              <a:rPr sz="1500" b="0">
+                <a:solidFill>
+                  <a:srgbClr val="A00016"/>
+                </a:solidFill>
+                <a:latin typeface="Menlo"/>
+                <a:cs typeface="Menlo"/>
+              </a:rPr>
+              <a:t>wait_task_inactive</a:t>
+            </a:r>
+            <a:r>
+              <a:rPr sz="1500" b="0">
+                <a:solidFill>
+                  <a:srgbClr val="202020"/>
+                </a:solidFill>
+              </a:rPr>
+              <a:t> 等待其离开 CPU。这种原地裸指针访问可一比一翻译为 unsafe Rust，但以</a:t>
+            </a:r>
+            <a:r>
+              <a:rPr sz="1500" b="1">
+                <a:solidFill>
+                  <a:srgbClr val="202020"/>
+                </a:solidFill>
+              </a:rPr>
+              <a:t>安全 Rust</a:t>
+            </a:r>
+            <a:r>
+              <a:rPr sz="1500" b="0">
+                <a:solidFill>
+                  <a:srgbClr val="202020"/>
+                </a:solidFill>
+              </a:rPr>
+              <a:t> 表达需要快照式设计：副本为 </a:t>
+            </a:r>
+            <a:r>
+              <a:rPr sz="1500" b="0">
+                <a:solidFill>
+                  <a:srgbClr val="A00016"/>
+                </a:solidFill>
+                <a:latin typeface="Menlo"/>
+                <a:cs typeface="Menlo"/>
+              </a:rPr>
+              <a:t>Pod</a:t>
+            </a:r>
+            <a:r>
+              <a:rPr sz="1500" b="0">
+                <a:solidFill>
+                  <a:srgbClr val="202020"/>
+                </a:solidFill>
+              </a:rPr>
+              <a:t>、按字节安全访问，跨进程内存经可失败的 </a:t>
+            </a:r>
+            <a:r>
+              <a:rPr sz="1500" b="0">
+                <a:solidFill>
+                  <a:srgbClr val="A00016"/>
+                </a:solidFill>
+                <a:latin typeface="Menlo"/>
+                <a:cs typeface="Menlo"/>
+              </a:rPr>
+              <a:t>VmReader</a:t>
+            </a:r>
+            <a:r>
+              <a:rPr sz="1500" b="0">
+                <a:solidFill>
+                  <a:srgbClr val="202020"/>
+                </a:solidFill>
+              </a:rPr>
+              <a:t>/</a:t>
+            </a:r>
+            <a:r>
+              <a:rPr sz="1500" b="0">
+                <a:solidFill>
+                  <a:srgbClr val="A00016"/>
+                </a:solidFill>
+                <a:latin typeface="Menlo"/>
+                <a:cs typeface="Menlo"/>
+              </a:rPr>
+              <a:t>VmWriter</a:t>
+            </a:r>
+            <a:r>
+              <a:rPr sz="1500" b="0">
+                <a:solidFill>
+                  <a:srgbClr val="202020"/>
+                </a:solidFill>
+              </a:rPr>
+              <a:t> 与 </a:t>
+            </a:r>
+            <a:r>
+              <a:rPr sz="1500" b="0">
+                <a:solidFill>
+                  <a:srgbClr val="A00016"/>
+                </a:solidFill>
+                <a:latin typeface="Menlo"/>
+                <a:cs typeface="Menlo"/>
+              </a:rPr>
+              <a:t>UFrame</a:t>
+            </a:r>
+            <a:r>
+              <a:rPr sz="1500" b="0">
+                <a:solidFill>
+                  <a:srgbClr val="202020"/>
+                </a:solidFill>
+              </a:rPr>
+              <a:t> 句柄，越界与释放后访问由所有权与类型系统在</a:t>
+            </a:r>
+            <a:r>
+              <a:rPr sz="1500" b="1">
+                <a:solidFill>
+                  <a:srgbClr val="202020"/>
+                </a:solidFill>
+              </a:rPr>
+              <a:t>编译期</a:t>
+            </a:r>
+            <a:r>
+              <a:rPr sz="1500" b="0">
+                <a:solidFill>
+                  <a:srgbClr val="202020"/>
+                </a:solidFill>
+              </a:rPr>
+              <a:t>阻止，kernel/ 全程零 </a:t>
+            </a:r>
+            <a:r>
+              <a:rPr sz="1500" b="0">
+                <a:solidFill>
+                  <a:srgbClr val="A00016"/>
+                </a:solidFill>
+                <a:latin typeface="Menlo"/>
+                <a:cs typeface="Menlo"/>
+              </a:rPr>
+              <a:t>unsafe</a:t>
+            </a:r>
+            <a:r>
+              <a:rPr sz="1500" b="0">
+                <a:solidFill>
+                  <a:srgbClr val="202020"/>
+                </a:solidFill>
+              </a:rPr>
+              <a:t>。</a:t>
             </a:r>
           </a:p>
         </p:txBody>
@@ -8079,7 +9055,7 @@
     <p:bg>
       <p:bgPr>
         <a:blipFill dpi="0" rotWithShape="1">
-          <a:blip r:embed="rId2"/>
+          <a:blip r:embed="rId3"/>
           <a:stretch>
             <a:fillRect/>
           </a:stretch>
@@ -8122,29 +9098,29 @@
                   <a:srgbClr val="A00016"/>
                 </a:solidFill>
               </a:rPr>
-              <a:t>2.5 x86-64 寄存器 ABI：字段级读写策略</a:t>
+              <a:t>2.5 历史包袱：可维护性改良（字段策略表与信号四态机）</a:t>
             </a:r>
           </a:p>
         </p:txBody>
       </p:sp>
       <p:pic>
         <p:nvPicPr>
-          <p:cNvPr id="3" name="Picture 2" descr="08_register_abi.png"/>
+          <p:cNvPr id="3" name="Picture 2" descr="06_signal_states.png"/>
           <p:cNvPicPr>
             <a:picLocks noChangeAspect="1"/>
           </p:cNvPicPr>
           <p:nvPr/>
         </p:nvPicPr>
         <p:blipFill>
-          <a:blip r:embed="rId3"/>
+          <a:blip r:embed="rId4"/>
           <a:stretch>
             <a:fillRect/>
           </a:stretch>
         </p:blipFill>
         <p:spPr>
           <a:xfrm>
-            <a:off x="4330645" y="1783080"/>
-            <a:ext cx="3591668" cy="2084831"/>
+            <a:off x="2432876" y="1783080"/>
+            <a:ext cx="7387206" cy="2176271"/>
           </a:xfrm>
           <a:prstGeom prst="rect">
             <a:avLst/>
@@ -8159,8 +9135,8 @@
         </p:nvSpPr>
         <p:spPr>
           <a:xfrm>
-            <a:off x="1005840" y="3977639"/>
-            <a:ext cx="10241280" cy="2286000"/>
+            <a:off x="1005840" y="4069079"/>
+            <a:ext cx="10241280" cy="2194560"/>
           </a:xfrm>
           <a:prstGeom prst="rect">
             <a:avLst/>
@@ -8184,44 +9160,10 @@
             <a:r>
               <a:rPr sz="1500" b="0">
                 <a:solidFill>
-                  <a:srgbClr val="A00016"/>
-                </a:solidFill>
-              </a:rPr>
-              <a:t>•  </a:t>
-            </a:r>
-            <a:r>
-              <a:rPr sz="1500" b="1">
-                <a:solidFill>
-                  <a:srgbClr val="202020"/>
-                </a:solidFill>
-              </a:rPr>
-              <a:t>快照式访问</a:t>
-            </a:r>
-            <a:r>
-              <a:rPr sz="1500" b="0">
-                <a:solidFill>
-                  <a:srgbClr val="202020"/>
-                </a:solidFill>
-              </a:rPr>
-              <a:t>：tracee 陷入内核、进入 ptrace-stop 时，持锁把用户寄存器上下文复制成一份寄存器快照；tracer 持锁在快照上按字段修改，tracee 唤醒时再写回——作为 GDB </a:t>
-            </a:r>
-            <a:r>
-              <a:rPr sz="1500" b="0">
-                <a:solidFill>
-                  <a:srgbClr val="A00016"/>
-                </a:solidFill>
-                <a:latin typeface="Menlo"/>
-                <a:cs typeface="Menlo"/>
-              </a:rPr>
-              <a:t>info registers</a:t>
-            </a:r>
-            <a:r>
-              <a:rPr sz="1500" b="0">
-                <a:solidFill>
-                  <a:srgbClr val="202020"/>
-                </a:solidFill>
-              </a:rPr>
-              <a:t> 的 ABI 基础。</a:t>
+                  <a:srgbClr val="202020"/>
+                </a:solidFill>
+              </a:rPr>
+              <a:t>两个将分散、复用收敛为单一显式表示的实例：</a:t>
             </a:r>
           </a:p>
           <a:p>
@@ -8247,15 +9189,15 @@
                   <a:srgbClr val="202020"/>
                 </a:solidFill>
               </a:rPr>
-              <a:t>按字段分级管控</a:t>
-            </a:r>
-            <a:r>
-              <a:rPr sz="1500" b="0">
-                <a:solidFill>
-                  <a:srgbClr val="202020"/>
-                </a:solidFill>
-              </a:rPr>
-              <a:t>：</a:t>
+              <a:t>寄存器字段策略：一张表 vs 重列多遍</a:t>
+            </a:r>
+            <a:r>
+              <a:rPr sz="1500" b="0">
+                <a:solidFill>
+                  <a:srgbClr val="202020"/>
+                </a:solidFill>
+              </a:rPr>
+              <a:t>。Linux 中各字段的特殊处理散布于 </a:t>
             </a:r>
             <a:r>
               <a:rPr sz="1500" b="0">
@@ -8265,15 +9207,15 @@
                 <a:latin typeface="Menlo"/>
                 <a:cs typeface="Menlo"/>
               </a:rPr>
-              <a:t>rax..r15</a:t>
-            </a:r>
-            <a:r>
-              <a:rPr sz="1500" b="0">
-                <a:solidFill>
-                  <a:srgbClr val="202020"/>
-                </a:solidFill>
-              </a:rPr>
-              <a:t> 由 tracer 自由修改；</a:t>
+              <a:t>getreg</a:t>
+            </a:r>
+            <a:r>
+              <a:rPr sz="1500" b="0">
+                <a:solidFill>
+                  <a:srgbClr val="202020"/>
+                </a:solidFill>
+              </a:rPr>
+              <a:t>/</a:t>
             </a:r>
             <a:r>
               <a:rPr sz="1500" b="0">
@@ -8283,15 +9225,15 @@
                 <a:latin typeface="Menlo"/>
                 <a:cs typeface="Menlo"/>
               </a:rPr>
-              <a:t>rip/rsp/fs/gsbase</a:t>
-            </a:r>
-            <a:r>
-              <a:rPr sz="1500" b="0">
-                <a:solidFill>
-                  <a:srgbClr val="202020"/>
-                </a:solidFill>
-              </a:rPr>
-              <a:t> 必须是用户地址；</a:t>
+              <a:t>putreg</a:t>
+            </a:r>
+            <a:r>
+              <a:rPr sz="1500" b="0">
+                <a:solidFill>
+                  <a:srgbClr val="202020"/>
+                </a:solidFill>
+              </a:rPr>
+              <a:t>，32 位 compat 的 </a:t>
             </a:r>
             <a:r>
               <a:rPr sz="1500" b="0">
@@ -8301,15 +9243,15 @@
                 <a:latin typeface="Menlo"/>
                 <a:cs typeface="Menlo"/>
               </a:rPr>
-              <a:t>rflags</a:t>
-            </a:r>
-            <a:r>
-              <a:rPr sz="1500" b="0">
-                <a:solidFill>
-                  <a:srgbClr val="202020"/>
-                </a:solidFill>
-              </a:rPr>
-              <a:t> 仅能写用户态可控位；</a:t>
+              <a:t>getreg32</a:t>
+            </a:r>
+            <a:r>
+              <a:rPr sz="1500" b="0">
+                <a:solidFill>
+                  <a:srgbClr val="202020"/>
+                </a:solidFill>
+              </a:rPr>
+              <a:t>/</a:t>
             </a:r>
             <a:r>
               <a:rPr sz="1500" b="0">
@@ -8319,15 +9261,51 @@
                 <a:latin typeface="Menlo"/>
                 <a:cs typeface="Menlo"/>
               </a:rPr>
-              <a:t>cs/ss/ds/es</a:t>
-            </a:r>
-            <a:r>
-              <a:rPr sz="1500" b="0">
-                <a:solidFill>
-                  <a:srgbClr val="202020"/>
-                </a:solidFill>
-              </a:rPr>
-              <a:t> 段寄存器只读、与 Linux 一致。</a:t>
+              <a:t>putreg32</a:t>
+            </a:r>
+            <a:r>
+              <a:rPr sz="1500" b="0">
+                <a:solidFill>
+                  <a:srgbClr val="202020"/>
+                </a:solidFill>
+              </a:rPr>
+              <a:t> 再以 </a:t>
+            </a:r>
+            <a:r>
+              <a:rPr sz="1500" b="0">
+                <a:solidFill>
+                  <a:srgbClr val="A00016"/>
+                </a:solidFill>
+                <a:latin typeface="Menlo"/>
+                <a:cs typeface="Menlo"/>
+              </a:rPr>
+              <a:t>SEG32</a:t>
+            </a:r>
+            <a:r>
+              <a:rPr sz="1500" b="0">
+                <a:solidFill>
+                  <a:srgbClr val="202020"/>
+                </a:solidFill>
+              </a:rPr>
+              <a:t> 宏重复列出段寄存器（读 / 写 × 64 / 32 位约 4 处分派）。本项目用单张 </a:t>
+            </a:r>
+            <a:r>
+              <a:rPr sz="1500" b="0">
+                <a:solidFill>
+                  <a:srgbClr val="A00016"/>
+                </a:solidFill>
+                <a:latin typeface="Menlo"/>
+                <a:cs typeface="Menlo"/>
+              </a:rPr>
+              <a:t>REG_RULES</a:t>
+            </a:r>
+            <a:r>
+              <a:rPr sz="1500" b="0">
+                <a:solidFill>
+                  <a:srgbClr val="202020"/>
+                </a:solidFill>
+              </a:rPr>
+              <a:t> 表为每个字段声明一次策略，读快照 / 写校验 / 按偏移 PEEK / POKEUSER 四条路径共查同表，并以编译期断言防止表与结构体漂移。</a:t>
             </a:r>
           </a:p>
           <a:p>
@@ -8353,15 +9331,15 @@
                   <a:srgbClr val="202020"/>
                 </a:solidFill>
               </a:rPr>
-              <a:t>与 Linux 的差异</a:t>
-            </a:r>
-            <a:r>
-              <a:rPr sz="1500" b="0">
-                <a:solidFill>
-                  <a:srgbClr val="202020"/>
-                </a:solidFill>
-              </a:rPr>
-              <a:t>：「哪个字段要怎么校验」用单张 </a:t>
+              <a:t>信号四态机：显式状态 vs 复用字段</a:t>
+            </a:r>
+            <a:r>
+              <a:rPr sz="1500" b="0">
+                <a:solidFill>
+                  <a:srgbClr val="202020"/>
+                </a:solidFill>
+              </a:rPr>
+              <a:t>。ptrace-stop 信号的生命周期，本项目以一个四态机 Empty / Pending / Consumed / Injected 显式建模（停 → Pending，wait → Consumed，tracer 注入 → Injected，resume 回投或抑制）。Linux 将同一生命周期分摊在复用字段上：</a:t>
             </a:r>
             <a:r>
               <a:rPr sz="1500" b="0">
@@ -8371,15 +9349,15 @@
                 <a:latin typeface="Menlo"/>
                 <a:cs typeface="Menlo"/>
               </a:rPr>
-              <a:t>REG_RULES</a:t>
-            </a:r>
-            <a:r>
-              <a:rPr sz="1500" b="0">
-                <a:solidFill>
-                  <a:srgbClr val="202020"/>
-                </a:solidFill>
-              </a:rPr>
-              <a:t> 策略表声明一次、读 / 写 / 按偏移四条路径共查同表，替代 Linux 在 </a:t>
+              <a:t>exit_code</a:t>
+            </a:r>
+            <a:r>
+              <a:rPr sz="1500" b="0">
+                <a:solidFill>
+                  <a:srgbClr val="202020"/>
+                </a:solidFill>
+              </a:rPr>
+              <a:t> 既承载停止码，又被回读为注入的新信号，</a:t>
             </a:r>
             <a:r>
               <a:rPr sz="1500" b="0">
@@ -8389,15 +9367,15 @@
                 <a:latin typeface="Menlo"/>
                 <a:cs typeface="Menlo"/>
               </a:rPr>
-              <a:t>getreg</a:t>
-            </a:r>
-            <a:r>
-              <a:rPr sz="1500" b="0">
-                <a:solidFill>
-                  <a:srgbClr val="202020"/>
-                </a:solidFill>
-              </a:rPr>
-              <a:t>/</a:t>
+              <a:t>last_siginfo</a:t>
+            </a:r>
+            <a:r>
+              <a:rPr sz="1500" b="0">
+                <a:solidFill>
+                  <a:srgbClr val="202020"/>
+                </a:solidFill>
+              </a:rPr>
+              <a:t> 指针置 / 清，另加 </a:t>
             </a:r>
             <a:r>
               <a:rPr sz="1500" b="0">
@@ -8407,15 +9385,15 @@
                 <a:latin typeface="Menlo"/>
                 <a:cs typeface="Menlo"/>
               </a:rPr>
-              <a:t>putreg</a:t>
-            </a:r>
-            <a:r>
-              <a:rPr sz="1500" b="0">
-                <a:solidFill>
-                  <a:srgbClr val="202020"/>
-                </a:solidFill>
-              </a:rPr>
-              <a:t>（及 32 位 compat）里重列多遍的历史写法，并以编译期断言防止表与结构体漂移。</a:t>
+              <a:t>jobctl</a:t>
+            </a:r>
+            <a:r>
+              <a:rPr sz="1500" b="0">
+                <a:solidFill>
+                  <a:srgbClr val="202020"/>
+                </a:solidFill>
+              </a:rPr>
+              <a:t> 标志。两者行为等价，显式状态机更易读、易扩展。</a:t>
             </a:r>
           </a:p>
         </p:txBody>
@@ -8477,14 +9455,14 @@
                   <a:srgbClr val="A00016"/>
                 </a:solidFill>
               </a:rPr>
-              <a:t>2.6 恢复语义与信号四态机</a:t>
+              <a:t>2.6 跨进程内存访问：与 Linux 一致的忠实实现</a:t>
             </a:r>
           </a:p>
         </p:txBody>
       </p:sp>
       <p:pic>
         <p:nvPicPr>
-          <p:cNvPr id="3" name="Picture 2" descr="06_signal_states.png"/>
+          <p:cNvPr id="3" name="Picture 2" descr="07_mem_access.png"/>
           <p:cNvPicPr>
             <a:picLocks noChangeAspect="1"/>
           </p:cNvPicPr>
@@ -8498,8 +9476,8 @@
         </p:blipFill>
         <p:spPr>
           <a:xfrm>
-            <a:off x="2588070" y="1783080"/>
-            <a:ext cx="7076819" cy="2084831"/>
+            <a:off x="4442577" y="1783080"/>
+            <a:ext cx="3367805" cy="2084831"/>
           </a:xfrm>
           <a:prstGeom prst="rect">
             <a:avLst/>
@@ -8539,10 +9517,80 @@
             <a:r>
               <a:rPr sz="1500" b="0">
                 <a:solidFill>
-                  <a:srgbClr val="202020"/>
-                </a:solidFill>
-              </a:rPr>
-              <a:t>恢复请求：由 tracer 发送，可选择抑制（丢弃）原信号，或注入一个新信号。恢复语义 CONT（普通继续）、SINGLESTEP（设 TF 单步）、SYSCALL（开 syscall 跟踪）三选一。</a:t>
+                  <a:srgbClr val="A00016"/>
+                </a:solidFill>
+              </a:rPr>
+              <a:t>•  </a:t>
+            </a:r>
+            <a:r>
+              <a:rPr sz="1500" b="0">
+                <a:solidFill>
+                  <a:srgbClr val="A00016"/>
+                </a:solidFill>
+                <a:latin typeface="Menlo"/>
+                <a:cs typeface="Menlo"/>
+              </a:rPr>
+              <a:t>ptrace PEEK/POKE</a:t>
+            </a:r>
+            <a:r>
+              <a:rPr sz="1500" b="0">
+                <a:solidFill>
+                  <a:srgbClr val="202020"/>
+                </a:solidFill>
+              </a:rPr>
+              <a:t> 与 </a:t>
+            </a:r>
+            <a:r>
+              <a:rPr sz="1500" b="0">
+                <a:solidFill>
+                  <a:srgbClr val="A00016"/>
+                </a:solidFill>
+                <a:latin typeface="Menlo"/>
+                <a:cs typeface="Menlo"/>
+              </a:rPr>
+              <a:t>/proc/&lt;pid&gt;/mem</a:t>
+            </a:r>
+            <a:r>
+              <a:rPr sz="1500" b="0">
+                <a:solidFill>
+                  <a:srgbClr val="202020"/>
+                </a:solidFill>
+              </a:rPr>
+              <a:t> 走同一套底层读写原语，读写的均为另一进程的内存——此点</a:t>
+            </a:r>
+            <a:r>
+              <a:rPr sz="1500" b="1">
+                <a:solidFill>
+                  <a:srgbClr val="202020"/>
+                </a:solidFill>
+              </a:rPr>
+              <a:t>与 Linux 一致</a:t>
+            </a:r>
+            <a:r>
+              <a:rPr sz="1500" b="0">
+                <a:solidFill>
+                  <a:srgbClr val="202020"/>
+                </a:solidFill>
+              </a:rPr>
+              <a:t>（Linux 两者亦均经 </a:t>
+            </a:r>
+            <a:r>
+              <a:rPr sz="1500" b="0">
+                <a:solidFill>
+                  <a:srgbClr val="A00016"/>
+                </a:solidFill>
+                <a:latin typeface="Menlo"/>
+                <a:cs typeface="Menlo"/>
+              </a:rPr>
+              <a:t>access_remote_vm</a:t>
+            </a:r>
+            <a:r>
+              <a:rPr sz="1500" b="0">
+                <a:solidFill>
+                  <a:srgbClr val="202020"/>
+                </a:solidFill>
+              </a:rPr>
+              <a:t>）。</a:t>
             </a:r>
           </a:p>
           <a:p>
@@ -8557,10 +9605,44 @@
             <a:r>
               <a:rPr sz="1500" b="0">
                 <a:solidFill>
-                  <a:srgbClr val="202020"/>
-                </a:solidFill>
-              </a:rPr>
-              <a:t>状态如何被消费：</a:t>
+                  <a:srgbClr val="A00016"/>
+                </a:solidFill>
+              </a:rPr>
+              <a:t>•  </a:t>
+            </a:r>
+            <a:r>
+              <a:rPr sz="1500" b="1">
+                <a:solidFill>
+                  <a:srgbClr val="202020"/>
+                </a:solidFill>
+              </a:rPr>
+              <a:t>不切换地址空间</a:t>
+            </a:r>
+            <a:r>
+              <a:rPr sz="1500" b="0">
+                <a:solidFill>
+                  <a:srgbClr val="202020"/>
+                </a:solidFill>
+              </a:rPr>
+              <a:t>：不将 CPU 页表切换至目标进程，而是直接在其地址空间内按页定位物理页帧并拷贝；遇缺页则主动触发一次缺页处理后重试。读、写、清零三种操作共用同一泛型 </a:t>
+            </a:r>
+            <a:r>
+              <a:rPr sz="1500" b="0">
+                <a:solidFill>
+                  <a:srgbClr val="A00016"/>
+                </a:solidFill>
+                <a:latin typeface="Menlo"/>
+                <a:cs typeface="Menlo"/>
+              </a:rPr>
+              <a:t>access_alien</a:t>
+            </a:r>
+            <a:r>
+              <a:rPr sz="1500" b="0">
+                <a:solidFill>
+                  <a:srgbClr val="202020"/>
+                </a:solidFill>
+              </a:rPr>
+              <a:t> 与闭包，易错的分页循环仅实现一处。</a:t>
             </a:r>
           </a:p>
           <a:p>
@@ -8586,7 +9668,7 @@
                   <a:srgbClr val="202020"/>
                 </a:solidFill>
               </a:rPr>
-              <a:t>tracer 通过 wait 消费 Pending：观察并报告，使其转为 Consumed。</a:t>
+              <a:t>整条跨进程读写均处于统一的读写接口与权限检查边界之内，安全可控。</a:t>
             </a:r>
           </a:p>
           <a:p>
@@ -8599,46 +9681,12 @@
               </a:spcAft>
             </a:pPr>
             <a:r>
-              <a:rPr sz="1500" b="0">
-                <a:solidFill>
-                  <a:srgbClr val="A00016"/>
-                </a:solidFill>
-              </a:rPr>
-              <a:t>•  </a:t>
-            </a:r>
-            <a:r>
-              <a:rPr sz="1500" b="0">
-                <a:solidFill>
-                  <a:srgbClr val="202020"/>
-                </a:solidFill>
-              </a:rPr>
-              <a:t>tracer 通过 GETSIGINFO 消费 Pending / Consumed / Injected：读取对应的 siginfo。</a:t>
-            </a:r>
-          </a:p>
-          <a:p>
-            <a:pPr>
-              <a:lnSpc>
-                <a:spcPct val="112000"/>
-              </a:lnSpc>
-              <a:spcAft>
-                <a:spcPts val="700"/>
-              </a:spcAft>
-            </a:pPr>
-            <a:r>
-              <a:rPr sz="1500" b="0">
-                <a:solidFill>
-                  <a:srgbClr val="A00016"/>
-                </a:solidFill>
-              </a:rPr>
-              <a:t>•  </a:t>
-            </a:r>
-            <a:r>
-              <a:rPr sz="1500" b="0">
-                <a:solidFill>
-                  <a:srgbClr val="202020"/>
-                </a:solidFill>
-              </a:rPr>
-              <a:t>tracee 在 resume 时通过 re-inject 消费 Pending / Injected：把信号重新投递给自己。</a:t>
+              <a:rPr sz="1250" b="0">
+                <a:solidFill>
+                  <a:srgbClr val="606060"/>
+                </a:solidFill>
+              </a:rPr>
+              <a:t>此部分与 Linux 行为一致，价值在于忠实与安全，而非差异。</a:t>
             </a:r>
           </a:p>
         </p:txBody>
@@ -8700,7 +9748,7 @@
                   <a:srgbClr val="A00016"/>
                 </a:solidFill>
               </a:rPr>
-              <a:t>2.7 安全模型：统一鉴权 + Yama</a:t>
+              <a:t>2.7 安全模型：统一鉴权 + Yama（与 Linux 一致）</a:t>
             </a:r>
           </a:p>
         </p:txBody>
@@ -8789,7 +9837,7 @@
                   <a:srgbClr val="202020"/>
                 </a:solidFill>
               </a:rPr>
-              <a:t>。</a:t>
+              <a:t>，与 Linux 行为对齐。</a:t>
             </a:r>
           </a:p>
           <a:p>
@@ -11978,7 +13026,7 @@
                   <a:srgbClr val="A00016"/>
                 </a:solidFill>
               </a:rPr>
-              <a:t>1.2 调试的基本需求：以断点为例</a:t>
+              <a:t>1.2 调试的基本需求——以断点为例</a:t>
             </a:r>
           </a:p>
         </p:txBody>
@@ -11999,8 +13047,8 @@
         </p:blipFill>
         <p:spPr>
           <a:xfrm>
-            <a:off x="3419561" y="1783080"/>
-            <a:ext cx="5413837" cy="2084831"/>
+            <a:off x="2840045" y="1783080"/>
+            <a:ext cx="6572869" cy="2084831"/>
           </a:xfrm>
           <a:prstGeom prst="rect">
             <a:avLst/>
@@ -12043,7 +13091,7 @@
                   <a:srgbClr val="202020"/>
                 </a:solidFill>
               </a:rPr>
-              <a:t>调试器对内核的基本诉求</a:t>
+              <a:t>调试器对内核的基本需求：</a:t>
             </a:r>
           </a:p>
           <a:p>
@@ -12139,7 +13187,7 @@
                   <a:srgbClr val="202020"/>
                 </a:solidFill>
               </a:rPr>
-              <a:t>以最常用的「GDB 软件断点」为例，一次命中并恢复，需要内核按下图配合约 8 步：</a:t>
+              <a:t>以最常用的「GDB 软件断点」为例，一次命中并恢复，需要内核按下图配合：</a:t>
             </a:r>
           </a:p>
           <a:p>
@@ -12165,33 +13213,7 @@
                   <a:srgbClr val="202020"/>
                 </a:solidFill>
               </a:rPr>
-              <a:t>写 int3 设断点 → 命中陷入转 SIGTRAP、进入 ptrace-stop → 报告 tracer → 改寄存器并恢复原指令 → 单步越过 → 重新写回 int3 → 继续运行。</a:t>
-            </a:r>
-          </a:p>
-          <a:p>
-            <a:pPr>
-              <a:lnSpc>
-                <a:spcPct val="112000"/>
-              </a:lnSpc>
-              <a:spcAft>
-                <a:spcPts val="700"/>
-              </a:spcAft>
-            </a:pPr>
-            <a:r>
-              <a:rPr sz="1500" b="0">
-                <a:solidFill>
-                  <a:srgbClr val="A00016"/>
-                </a:solidFill>
-              </a:rPr>
-              <a:t>•  </a:t>
-            </a:r>
-            <a:r>
-              <a:rPr sz="1500" b="0">
-                <a:solidFill>
-                  <a:srgbClr val="202020"/>
-                </a:solidFill>
-              </a:rPr>
-              <a:t>这一圈分别用到：跨进程改内存、异常转信号、停 / 等 / 恢复、读写寄存器、单步——正是后面要逐一构建的内核能力。</a:t>
+              <a:t>这些功能分别需要：跨进程改内存、异常转信号、停 / 等 / 恢复、读写寄存器、单步，正是要逐一构建的内核能力。</a:t>
             </a:r>
           </a:p>
         </p:txBody>
@@ -12274,8 +13296,8 @@
         </p:blipFill>
         <p:spPr>
           <a:xfrm>
-            <a:off x="4644136" y="1783080"/>
-            <a:ext cx="2964687" cy="2084831"/>
+            <a:off x="4579120" y="1783080"/>
+            <a:ext cx="3094718" cy="2176271"/>
           </a:xfrm>
           <a:prstGeom prst="rect">
             <a:avLst/>
@@ -12290,8 +13312,8 @@
         </p:nvSpPr>
         <p:spPr>
           <a:xfrm>
-            <a:off x="1005840" y="3977639"/>
-            <a:ext cx="10241280" cy="2286000"/>
+            <a:off x="1005840" y="4069079"/>
+            <a:ext cx="10241280" cy="2194560"/>
           </a:xfrm>
           <a:prstGeom prst="rect">
             <a:avLst/>
@@ -12318,7 +13340,7 @@
                   <a:srgbClr val="202020"/>
                 </a:solidFill>
               </a:rPr>
-              <a:t>GDB / strace 这样的调试器，把对内核的诉求收敛成一条自上而下的通路：用户工具发出请求，经系统调用接口进入内核，先过权限检查鉴权放行，再交给 ptrace 核心状态机。</a:t>
+              <a:t>Linux 暴露给 GDB 等调试器的抽象如图所示：用户工具发出请求，经系统调用接口进入内核，先过权限检查鉴权放行，再交给 ptrace 核心状态机。状态机是整条通路的中枢，负责建立关系、进入 ptrace-stop、向 tracer 报告 wait、再 resume 继续，一旦命中新的停止条件就再次回到 stop。</a:t>
             </a:r>
           </a:p>
           <a:p>
@@ -12336,7 +13358,7 @@
                   <a:srgbClr val="202020"/>
                 </a:solidFill>
               </a:rPr>
-              <a:t>状态机是整条通路的中枢，负责建立关系、进入 ptrace-stop、向 tracer 报告 wait、再 resume 继续，一旦命中新的停止条件就再次回到 stop。围绕这个中枢，向下分出三类能力：跨进程用户空间读写、寄存器上下文快照、以及与 signal / wait / exec / exit / clone 等系统调用的协作。</a:t>
+              <a:t>围绕这个中枢，向下分出三类能力：跨进程用户空间读写、寄存器上下文快照、以及与 signal / wait / exec / exit / clone 等系统调用的协作。</a:t>
             </a:r>
           </a:p>
           <a:p>
@@ -12349,12 +13371,12 @@
               </a:spcAft>
             </a:pPr>
             <a:r>
-              <a:rPr sz="1250" b="0">
-                <a:solidFill>
-                  <a:srgbClr val="606060"/>
-                </a:solidFill>
-              </a:rPr>
-              <a:t>这是 Linux 暴露给调试器的抽象，也是本项目要在 Asterinas 上补齐的整张地图。</a:t>
+              <a:rPr sz="1500" b="0">
+                <a:solidFill>
+                  <a:srgbClr val="202020"/>
+                </a:solidFill>
+              </a:rPr>
+              <a:t>忠实构建相应抽象，才能正确复用 Linux 海量调试器生态。</a:t>
             </a:r>
           </a:p>
         </p:txBody>
@@ -12840,47 +13862,6 @@
           </a:graphicData>
         </a:graphic>
       </p:graphicFrame>
-      <p:sp>
-        <p:nvSpPr>
-          <p:cNvPr id="5" name="TextBox 4"/>
-          <p:cNvSpPr txBox="1"/>
-          <p:nvPr/>
-        </p:nvSpPr>
-        <p:spPr>
-          <a:xfrm>
-            <a:off x="1005840" y="6373368"/>
-            <a:ext cx="10241280" cy="-109728"/>
-          </a:xfrm>
-          <a:prstGeom prst="rect">
-            <a:avLst/>
-          </a:prstGeom>
-          <a:noFill/>
-        </p:spPr>
-        <p:txBody>
-          <a:bodyPr wrap="square" anchor="t" lIns="25400" rIns="25400" tIns="25400" bIns="25400">
-            <a:spAutoFit/>
-          </a:bodyPr>
-          <a:lstStyle/>
-          <a:p>
-            <a:pPr>
-              <a:lnSpc>
-                <a:spcPct val="112000"/>
-              </a:lnSpc>
-              <a:spcAft>
-                <a:spcPts val="700"/>
-              </a:spcAft>
-            </a:pPr>
-            <a:r>
-              <a:rPr sz="1250" b="0">
-                <a:solidFill>
-                  <a:srgbClr val="606060"/>
-                </a:solidFill>
-              </a:rPr>
-              <a:t>左列是「调试器要做的事」，右列是「内核必须补齐的能力」——这张表就是整套设计的需求来源。</a:t>
-            </a:r>
-          </a:p>
-        </p:txBody>
-      </p:sp>
     </p:spTree>
   </p:cSld>
   <p:clrMapOvr>
@@ -12938,7 +13919,7 @@
                   <a:srgbClr val="A00016"/>
                 </a:solidFill>
               </a:rPr>
-              <a:t>1.5 相关工作：其它 OS 的调试路线对比</a:t>
+              <a:t>1.5 相关工作：其它新兴 OS 的调试路线对比</a:t>
             </a:r>
           </a:p>
         </p:txBody>

--- a/research_practice/答辩-科研实践.pptx
+++ b/research_practice/答辩-科研实践.pptx
@@ -809,6 +809,11 @@
           </a:p>
           <a:p>
             <a:r>
+              <a:t>Linux 7.1 源码链接（torvalds/linux，commit ef0c9f7）——`__ptrace_link`（reparent，`child-&gt;parent`）：https://github.com/torvalds/linux/blob/ef0c9f75a19532d7675384708fc8621e10850104/kernel/ptrace.c#L87 ；`ptrace_attach`：https://github.com/torvalds/linux/blob/ef0c9f75a19532d7675384708fc8621e10850104/kernel/ptrace.c#L434 ；`ptrace_traceme`（持 `write_lock_irq(&amp;tasklist_lock)`）：https://github.com/torvalds/linux/blob/ef0c9f75a19532d7675384708fc8621e10850104/kernel/ptrace.c#L512 ；`ptrace_detach`：https://github.com/torvalds/linux/blob/ef0c9f75a19532d7675384708fc8621e10850104/kernel/ptrace.c#L589 ；`ptrace_check_attach`（持 `read_lock(&amp;tasklist_lock)` 与 `wait_task_inactive`）：https://github.com/torvalds/linux/blob/ef0c9f75a19532d7675384708fc8621e10850104/kernel/ptrace.c#L257 ；`exit_ptrace`：https://github.com/torvalds/linux/blob/ef0c9f75a19532d7675384708fc8621e10850104/kernel/ptrace.c#L620 ；`find_task_by_vpid`：https://github.com/torvalds/linux/blob/ef0c9f75a19532d7675384708fc8621e10850104/kernel/pid.c#L488 。</a:t>
+            </a:r>
+          </a:p>
+          <a:p>
+            <a:r>
               <a:t>诚实边界与问答——准确表述为「不需要跨关系变更持有的全局大锁」，而非「零全局锁」：按 tid 查询全局 `PID_TABLE`（类比 Linux `find_task_by_vpid`）仍需一次瞬时加锁，但不跨 attach 操作持有。当前主要支持 TRACEME（tracer 即 tracee 的 parent）；即便补充 ATTACH 亦无需全局大锁，其难点不在锁，而在「停止一个正在运行的 tracee」以及目标并发 exit/exec 的竞态处理。</a:t>
             </a:r>
           </a:p>
@@ -890,6 +895,11 @@
           <a:p>
             <a:r>
               <a:t>Linux 7.1 机制——`getreg`/`putreg` 经 `*pt_regs_access(task_pt_regs(child), offset)` 原地读写内核栈上保存的 `pt_regs`；fsbase/gsbase 经 `x86_fsbase_write_task`/`x86_gsbase_read_task` 存于 `task-&gt;thread`，debug 寄存器另存于 `thread-&gt;ptrace_bps` 等处，现场是分散的。因改的是活动 task 的保存帧，`ptrace_check_attach` 须先 `wait_task_inactive` 确认其已下 CPU。</a:t>
+            </a:r>
+          </a:p>
+          <a:p>
+            <a:r>
+              <a:t>Linux 7.1 源码链接（torvalds/linux，commit ef0c9f7）——`putreg`（写：`*pt_regs_access(task_pt_regs(child), offset) = value`）：https://github.com/torvalds/linux/blob/ef0c9f75a19532d7675384708fc8621e10850104/arch/x86/kernel/ptrace.c#L374 ；`getreg`（读）：https://github.com/torvalds/linux/blob/ef0c9f75a19532d7675384708fc8621e10850104/arch/x86/kernel/ptrace.c#L407 ；`pt_regs_access`（按偏移裸指针定位内核栈帧）：https://github.com/torvalds/linux/blob/ef0c9f75a19532d7675384708fc8621e10850104/arch/x86/kernel/ptrace.c#L243 ；`task_pt_regs`（取内核栈顶保存帧）：https://github.com/torvalds/linux/blob/ef0c9f75a19532d7675384708fc8621e10850104/arch/x86/include/asm/processor.h#L654 ；fsbase/gsbase 散于 `task-&gt;thread`（`x86_fsbase_write_task` 调用点）：https://github.com/torvalds/linux/blob/ef0c9f75a19532d7675384708fc8621e10850104/arch/x86/kernel/ptrace.c#L393 ；`ptrace_check_attach` 须 `wait_task_inactive(__TASK_TRACED|TASK_FROZEN)`：https://github.com/torvalds/linux/blob/ef0c9f75a19532d7675384708fc8621e10850104/kernel/ptrace.c#L280 。</a:t>
             </a:r>
           </a:p>
           <a:p>
